--- a/docs/pptx/carbo/jx-carbo-linsubhr-sens-grade2.pptx
+++ b/docs/pptx/carbo/jx-carbo-linsubhr-sens-grade2.pptx
@@ -5339,7 +5339,7 @@
           <p:spPr>
             <a:xfrm>
               <a:off x="817517" y="1896563"/>
-              <a:ext cx="6236116" cy="82021"/>
+              <a:ext cx="6899879" cy="82021"/>
             </a:xfrm>
             <a:prstGeom prst="rect">
               <a:avLst/>
@@ -5371,7 +5371,7 @@
                   <a:latin typeface="Helvetica"/>
                   <a:cs typeface="Helvetica"/>
                 </a:rPr>
-                <a:t>subHR per 0.1 ratio decline: 1.18 (1.10-1.26), p = &lt;0.001  |  per IQR decline (Δ = 0.28): 1.59 (1.31-1.92)  |  IQR: [0.70, 0.98]</a:t>
+                <a:t>subHR per 0.1 ratio decline: 1.18 (1.10-1.26), p_Bonf = &lt;0.001 (n = 6)  |  per IQR decline (Δ = 0.28): 1.59 (1.31-1.92)  |  IQR: [0.70, 0.98]</a:t>
               </a:r>
             </a:p>
           </p:txBody>

--- a/docs/pptx/carbo/jx-carbo-linsubhr-sens-grade2.pptx
+++ b/docs/pptx/carbo/jx-carbo-linsubhr-sens-grade2.pptx
@@ -5062,8 +5062,8 @@
           </p:nvSpPr>
           <p:spPr>
             <a:xfrm>
-              <a:off x="2155289" y="5785772"/>
-              <a:ext cx="155356" cy="80101"/>
+              <a:off x="2152181" y="5785772"/>
+              <a:ext cx="161574" cy="80101"/>
             </a:xfrm>
             <a:prstGeom prst="rect">
               <a:avLst/>
@@ -5095,7 +5095,7 @@
                   <a:latin typeface="Helvetica"/>
                   <a:cs typeface="Helvetica"/>
                 </a:rPr>
-                <a:t>0.6</a:t>
+                <a:t>-40</a:t>
               </a:r>
             </a:p>
           </p:txBody>
@@ -5108,8 +5108,8 @@
           </p:nvSpPr>
           <p:spPr>
             <a:xfrm>
-              <a:off x="3887213" y="5785772"/>
-              <a:ext cx="155356" cy="80101"/>
+              <a:off x="3884104" y="5785772"/>
+              <a:ext cx="161574" cy="80101"/>
             </a:xfrm>
             <a:prstGeom prst="rect">
               <a:avLst/>
@@ -5141,7 +5141,7 @@
                   <a:latin typeface="Helvetica"/>
                   <a:cs typeface="Helvetica"/>
                 </a:rPr>
-                <a:t>0.8</a:t>
+                <a:t>-20</a:t>
               </a:r>
             </a:p>
           </p:txBody>
@@ -5154,8 +5154,8 @@
           </p:nvSpPr>
           <p:spPr>
             <a:xfrm>
-              <a:off x="5619136" y="5785772"/>
-              <a:ext cx="155356" cy="80101"/>
+              <a:off x="5665725" y="5785772"/>
+              <a:ext cx="62179" cy="80101"/>
             </a:xfrm>
             <a:prstGeom prst="rect">
               <a:avLst/>
@@ -5187,7 +5187,7 @@
                   <a:latin typeface="Helvetica"/>
                   <a:cs typeface="Helvetica"/>
                 </a:rPr>
-                <a:t>1.0</a:t>
+                <a:t>0</a:t>
               </a:r>
             </a:p>
           </p:txBody>
@@ -5200,8 +5200,8 @@
           </p:nvSpPr>
           <p:spPr>
             <a:xfrm>
-              <a:off x="7351060" y="5785772"/>
-              <a:ext cx="155356" cy="80101"/>
+              <a:off x="7366559" y="5785772"/>
+              <a:ext cx="124358" cy="80101"/>
             </a:xfrm>
             <a:prstGeom prst="rect">
               <a:avLst/>
@@ -5233,7 +5233,7 @@
                   <a:latin typeface="Helvetica"/>
                   <a:cs typeface="Helvetica"/>
                 </a:rPr>
-                <a:t>1.2</a:t>
+                <a:t>20</a:t>
               </a:r>
             </a:p>
           </p:txBody>
@@ -5246,8 +5246,8 @@
           </p:nvSpPr>
           <p:spPr>
             <a:xfrm>
-              <a:off x="2691419" y="5925448"/>
-              <a:ext cx="4051889" cy="100218"/>
+              <a:off x="1561815" y="5925448"/>
+              <a:ext cx="6311097" cy="100218"/>
             </a:xfrm>
             <a:prstGeom prst="rect">
               <a:avLst/>
@@ -5279,7 +5279,7 @@
                   <a:latin typeface="Helvetica"/>
                   <a:cs typeface="Helvetica"/>
                 </a:rPr>
-                <a:t>Sensitivity eGFR Ratio (CKD-EPI 2012 CysC / CKD-EPI 2021 Cr)</a:t>
+                <a:t>Sensitivity eGFR Difference (%): 100 × (CKD-EPI 2012 CysC − CKD-EPI 2021 Cr) / CKD-EPI 2021 Cr</a:t>
               </a:r>
             </a:p>
           </p:txBody>
@@ -5339,7 +5339,7 @@
           <p:spPr>
             <a:xfrm>
               <a:off x="817517" y="1896563"/>
-              <a:ext cx="6899879" cy="82021"/>
+              <a:ext cx="7026615" cy="82021"/>
             </a:xfrm>
             <a:prstGeom prst="rect">
               <a:avLst/>
@@ -5371,7 +5371,7 @@
                   <a:latin typeface="Helvetica"/>
                   <a:cs typeface="Helvetica"/>
                 </a:rPr>
-                <a:t>subHR per 0.1 ratio decline: 1.18 (1.10-1.26), p_Bonf = &lt;0.001 (n = 6)  |  per IQR decline (Δ = 0.28): 1.59 (1.31-1.92)  |  IQR: [0.70, 0.98]</a:t>
+                <a:t>subHR per 10 % decline: 1.18 (1.10-1.26), p_Bonf = &lt;0.001 (n = 6)  |  per IQR decline (Δ = 28.0 %): 1.59 (1.31-1.92)  |  IQR: [-30.0, -2.0] %</a:t>
               </a:r>
             </a:p>
           </p:txBody>

--- a/docs/pptx/carbo/jx-carbo-linsubhr-sens-grade2.pptx
+++ b/docs/pptx/carbo/jx-carbo-linsubhr-sens-grade2.pptx
@@ -2265,34 +2265,26 @@
         </p:sp>
         <p:sp>
           <p:nvSpPr>
-            <p:cNvPr id="4" name="pl4"/>
+            <p:cNvPr id="4" name="rc4"/>
             <p:cNvSpPr/>
             <p:nvPr/>
           </p:nvSpPr>
           <p:spPr>
             <a:xfrm>
-              <a:off x="817517" y="5142518"/>
-              <a:ext cx="7799693" cy="0"/>
+              <a:off x="457200" y="1600200"/>
+              <a:ext cx="8229600" cy="4525962"/>
             </a:xfrm>
-            <a:custGeom>
+            <a:prstGeom prst="rect">
               <a:avLst/>
-              <a:pathLst>
-                <a:path w="7799693" h="0">
-                  <a:moveTo>
-                    <a:pt x="0" y="0"/>
-                  </a:moveTo>
-                  <a:lnTo>
-                    <a:pt x="7799693" y="0"/>
-                  </a:lnTo>
-                  <a:lnTo>
-                    <a:pt x="7799693" y="0"/>
-                  </a:lnTo>
-                </a:path>
-              </a:pathLst>
-            </a:custGeom>
-            <a:ln w="6775" cap="flat">
+            </a:prstGeom>
+            <a:solidFill>
+              <a:srgbClr val="FFFFFF">
+                <a:alpha val="100000"/>
+              </a:srgbClr>
+            </a:solidFill>
+            <a:ln w="13550" cap="rnd">
               <a:solidFill>
-                <a:srgbClr val="EBEBEB">
+                <a:srgbClr val="FFFFFF">
                   <a:alpha val="100000"/>
                 </a:srgbClr>
               </a:solidFill>
@@ -2314,21 +2306,21 @@
           </p:nvSpPr>
           <p:spPr>
             <a:xfrm>
-              <a:off x="817517" y="4313054"/>
-              <a:ext cx="7799693" cy="0"/>
+              <a:off x="887106" y="3250627"/>
+              <a:ext cx="7660515" cy="0"/>
             </a:xfrm>
             <a:custGeom>
               <a:avLst/>
               <a:pathLst>
-                <a:path w="7799693" h="0">
+                <a:path w="7660515" h="0">
                   <a:moveTo>
                     <a:pt x="0" y="0"/>
                   </a:moveTo>
                   <a:lnTo>
-                    <a:pt x="7799693" y="0"/>
-                  </a:lnTo>
-                  <a:lnTo>
-                    <a:pt x="7799693" y="0"/>
+                    <a:pt x="7660515" y="0"/>
+                  </a:lnTo>
+                  <a:lnTo>
+                    <a:pt x="7660515" y="0"/>
                   </a:lnTo>
                 </a:path>
               </a:pathLst>
@@ -2357,21 +2349,21 @@
           </p:nvSpPr>
           <p:spPr>
             <a:xfrm>
-              <a:off x="817517" y="3483591"/>
-              <a:ext cx="7799693" cy="0"/>
+              <a:off x="887106" y="2951293"/>
+              <a:ext cx="7660515" cy="0"/>
             </a:xfrm>
             <a:custGeom>
               <a:avLst/>
               <a:pathLst>
-                <a:path w="7799693" h="0">
+                <a:path w="7660515" h="0">
                   <a:moveTo>
                     <a:pt x="0" y="0"/>
                   </a:moveTo>
                   <a:lnTo>
-                    <a:pt x="7799693" y="0"/>
-                  </a:lnTo>
-                  <a:lnTo>
-                    <a:pt x="7799693" y="0"/>
+                    <a:pt x="7660515" y="0"/>
+                  </a:lnTo>
+                  <a:lnTo>
+                    <a:pt x="7660515" y="0"/>
                   </a:lnTo>
                 </a:path>
               </a:pathLst>
@@ -2400,21 +2392,21 @@
           </p:nvSpPr>
           <p:spPr>
             <a:xfrm>
-              <a:off x="817517" y="2654127"/>
-              <a:ext cx="7799693" cy="0"/>
+              <a:off x="887106" y="2651959"/>
+              <a:ext cx="7660515" cy="0"/>
             </a:xfrm>
             <a:custGeom>
               <a:avLst/>
               <a:pathLst>
-                <a:path w="7799693" h="0">
+                <a:path w="7660515" h="0">
                   <a:moveTo>
                     <a:pt x="0" y="0"/>
                   </a:moveTo>
                   <a:lnTo>
-                    <a:pt x="7799693" y="0"/>
-                  </a:lnTo>
-                  <a:lnTo>
-                    <a:pt x="7799693" y="0"/>
+                    <a:pt x="7660515" y="0"/>
+                  </a:lnTo>
+                  <a:lnTo>
+                    <a:pt x="7660515" y="0"/>
                   </a:lnTo>
                 </a:path>
               </a:pathLst>
@@ -2443,21 +2435,21 @@
           </p:nvSpPr>
           <p:spPr>
             <a:xfrm>
-              <a:off x="1367006" y="2073503"/>
-              <a:ext cx="0" cy="3649639"/>
+              <a:off x="887106" y="2352625"/>
+              <a:ext cx="7660515" cy="0"/>
             </a:xfrm>
             <a:custGeom>
               <a:avLst/>
               <a:pathLst>
-                <a:path w="0" h="3649639">
+                <a:path w="7660515" h="0">
                   <a:moveTo>
-                    <a:pt x="0" y="3649639"/>
+                    <a:pt x="0" y="0"/>
                   </a:moveTo>
                   <a:lnTo>
-                    <a:pt x="0" y="0"/>
-                  </a:lnTo>
-                  <a:lnTo>
-                    <a:pt x="0" y="0"/>
+                    <a:pt x="7660515" y="0"/>
+                  </a:lnTo>
+                  <a:lnTo>
+                    <a:pt x="7660515" y="0"/>
                   </a:lnTo>
                 </a:path>
               </a:pathLst>
@@ -2486,15 +2478,15 @@
           </p:nvSpPr>
           <p:spPr>
             <a:xfrm>
-              <a:off x="3098929" y="2073503"/>
-              <a:ext cx="0" cy="3649639"/>
+              <a:off x="1426790" y="2143092"/>
+              <a:ext cx="0" cy="1317069"/>
             </a:xfrm>
             <a:custGeom>
               <a:avLst/>
               <a:pathLst>
-                <a:path w="0" h="3649639">
+                <a:path w="0" h="1317069">
                   <a:moveTo>
-                    <a:pt x="0" y="3649639"/>
+                    <a:pt x="0" y="1317069"/>
                   </a:moveTo>
                   <a:lnTo>
                     <a:pt x="0" y="0"/>
@@ -2529,15 +2521,15 @@
           </p:nvSpPr>
           <p:spPr>
             <a:xfrm>
-              <a:off x="4830853" y="2073503"/>
-              <a:ext cx="0" cy="3649639"/>
+              <a:off x="3127809" y="2143092"/>
+              <a:ext cx="0" cy="1317069"/>
             </a:xfrm>
             <a:custGeom>
               <a:avLst/>
               <a:pathLst>
-                <a:path w="0" h="3649639">
+                <a:path w="0" h="1317069">
                   <a:moveTo>
-                    <a:pt x="0" y="3649639"/>
+                    <a:pt x="0" y="1317069"/>
                   </a:moveTo>
                   <a:lnTo>
                     <a:pt x="0" y="0"/>
@@ -2572,15 +2564,15 @@
           </p:nvSpPr>
           <p:spPr>
             <a:xfrm>
-              <a:off x="6562776" y="2073503"/>
-              <a:ext cx="0" cy="3649639"/>
+              <a:off x="4828828" y="2143092"/>
+              <a:ext cx="0" cy="1317069"/>
             </a:xfrm>
             <a:custGeom>
               <a:avLst/>
               <a:pathLst>
-                <a:path w="0" h="3649639">
+                <a:path w="0" h="1317069">
                   <a:moveTo>
-                    <a:pt x="0" y="3649639"/>
+                    <a:pt x="0" y="1317069"/>
                   </a:moveTo>
                   <a:lnTo>
                     <a:pt x="0" y="0"/>
@@ -2615,15 +2607,15 @@
           </p:nvSpPr>
           <p:spPr>
             <a:xfrm>
-              <a:off x="8294700" y="2073503"/>
-              <a:ext cx="0" cy="3649639"/>
+              <a:off x="6529847" y="2143092"/>
+              <a:ext cx="0" cy="1317069"/>
             </a:xfrm>
             <a:custGeom>
               <a:avLst/>
               <a:pathLst>
-                <a:path w="0" h="3649639">
+                <a:path w="0" h="1317069">
                   <a:moveTo>
-                    <a:pt x="0" y="3649639"/>
+                    <a:pt x="0" y="1317069"/>
                   </a:moveTo>
                   <a:lnTo>
                     <a:pt x="0" y="0"/>
@@ -2658,26 +2650,26 @@
           </p:nvSpPr>
           <p:spPr>
             <a:xfrm>
-              <a:off x="817517" y="5557249"/>
-              <a:ext cx="7799693" cy="0"/>
+              <a:off x="8230866" y="2143092"/>
+              <a:ext cx="0" cy="1317069"/>
             </a:xfrm>
             <a:custGeom>
               <a:avLst/>
               <a:pathLst>
-                <a:path w="7799693" h="0">
+                <a:path w="0" h="1317069">
                   <a:moveTo>
+                    <a:pt x="0" y="1317069"/>
+                  </a:moveTo>
+                  <a:lnTo>
                     <a:pt x="0" y="0"/>
-                  </a:moveTo>
-                  <a:lnTo>
-                    <a:pt x="7799693" y="0"/>
-                  </a:lnTo>
-                  <a:lnTo>
-                    <a:pt x="7799693" y="0"/>
+                  </a:lnTo>
+                  <a:lnTo>
+                    <a:pt x="0" y="0"/>
                   </a:lnTo>
                 </a:path>
               </a:pathLst>
             </a:custGeom>
-            <a:ln w="13550" cap="flat">
+            <a:ln w="6775" cap="flat">
               <a:solidFill>
                 <a:srgbClr val="EBEBEB">
                   <a:alpha val="100000"/>
@@ -2701,21 +2693,21 @@
           </p:nvSpPr>
           <p:spPr>
             <a:xfrm>
-              <a:off x="817517" y="4727786"/>
-              <a:ext cx="7799693" cy="0"/>
+              <a:off x="887106" y="3400294"/>
+              <a:ext cx="7660515" cy="0"/>
             </a:xfrm>
             <a:custGeom>
               <a:avLst/>
               <a:pathLst>
-                <a:path w="7799693" h="0">
+                <a:path w="7660515" h="0">
                   <a:moveTo>
                     <a:pt x="0" y="0"/>
                   </a:moveTo>
                   <a:lnTo>
-                    <a:pt x="7799693" y="0"/>
-                  </a:lnTo>
-                  <a:lnTo>
-                    <a:pt x="7799693" y="0"/>
+                    <a:pt x="7660515" y="0"/>
+                  </a:lnTo>
+                  <a:lnTo>
+                    <a:pt x="7660515" y="0"/>
                   </a:lnTo>
                 </a:path>
               </a:pathLst>
@@ -2744,21 +2736,21 @@
           </p:nvSpPr>
           <p:spPr>
             <a:xfrm>
-              <a:off x="817517" y="3898322"/>
-              <a:ext cx="7799693" cy="0"/>
+              <a:off x="887106" y="3100960"/>
+              <a:ext cx="7660515" cy="0"/>
             </a:xfrm>
             <a:custGeom>
               <a:avLst/>
               <a:pathLst>
-                <a:path w="7799693" h="0">
+                <a:path w="7660515" h="0">
                   <a:moveTo>
                     <a:pt x="0" y="0"/>
                   </a:moveTo>
                   <a:lnTo>
-                    <a:pt x="7799693" y="0"/>
-                  </a:lnTo>
-                  <a:lnTo>
-                    <a:pt x="7799693" y="0"/>
+                    <a:pt x="7660515" y="0"/>
+                  </a:lnTo>
+                  <a:lnTo>
+                    <a:pt x="7660515" y="0"/>
                   </a:lnTo>
                 </a:path>
               </a:pathLst>
@@ -2787,21 +2779,21 @@
           </p:nvSpPr>
           <p:spPr>
             <a:xfrm>
-              <a:off x="817517" y="3068859"/>
-              <a:ext cx="7799693" cy="0"/>
+              <a:off x="887106" y="2801626"/>
+              <a:ext cx="7660515" cy="0"/>
             </a:xfrm>
             <a:custGeom>
               <a:avLst/>
               <a:pathLst>
-                <a:path w="7799693" h="0">
+                <a:path w="7660515" h="0">
                   <a:moveTo>
                     <a:pt x="0" y="0"/>
                   </a:moveTo>
                   <a:lnTo>
-                    <a:pt x="7799693" y="0"/>
-                  </a:lnTo>
-                  <a:lnTo>
-                    <a:pt x="7799693" y="0"/>
+                    <a:pt x="7660515" y="0"/>
+                  </a:lnTo>
+                  <a:lnTo>
+                    <a:pt x="7660515" y="0"/>
                   </a:lnTo>
                 </a:path>
               </a:pathLst>
@@ -2830,21 +2822,21 @@
           </p:nvSpPr>
           <p:spPr>
             <a:xfrm>
-              <a:off x="817517" y="2239395"/>
-              <a:ext cx="7799693" cy="0"/>
+              <a:off x="887106" y="2502292"/>
+              <a:ext cx="7660515" cy="0"/>
             </a:xfrm>
             <a:custGeom>
               <a:avLst/>
               <a:pathLst>
-                <a:path w="7799693" h="0">
+                <a:path w="7660515" h="0">
                   <a:moveTo>
                     <a:pt x="0" y="0"/>
                   </a:moveTo>
                   <a:lnTo>
-                    <a:pt x="7799693" y="0"/>
-                  </a:lnTo>
-                  <a:lnTo>
-                    <a:pt x="7799693" y="0"/>
+                    <a:pt x="7660515" y="0"/>
+                  </a:lnTo>
+                  <a:lnTo>
+                    <a:pt x="7660515" y="0"/>
                   </a:lnTo>
                 </a:path>
               </a:pathLst>
@@ -2873,21 +2865,21 @@
           </p:nvSpPr>
           <p:spPr>
             <a:xfrm>
-              <a:off x="2232968" y="2073503"/>
-              <a:ext cx="0" cy="3649639"/>
+              <a:off x="887106" y="2202958"/>
+              <a:ext cx="7660515" cy="0"/>
             </a:xfrm>
             <a:custGeom>
               <a:avLst/>
               <a:pathLst>
-                <a:path w="0" h="3649639">
+                <a:path w="7660515" h="0">
                   <a:moveTo>
-                    <a:pt x="0" y="3649639"/>
+                    <a:pt x="0" y="0"/>
                   </a:moveTo>
                   <a:lnTo>
-                    <a:pt x="0" y="0"/>
-                  </a:lnTo>
-                  <a:lnTo>
-                    <a:pt x="0" y="0"/>
+                    <a:pt x="7660515" y="0"/>
+                  </a:lnTo>
+                  <a:lnTo>
+                    <a:pt x="7660515" y="0"/>
                   </a:lnTo>
                 </a:path>
               </a:pathLst>
@@ -2916,15 +2908,15 @@
           </p:nvSpPr>
           <p:spPr>
             <a:xfrm>
-              <a:off x="3964891" y="2073503"/>
-              <a:ext cx="0" cy="3649639"/>
+              <a:off x="2277299" y="2143092"/>
+              <a:ext cx="0" cy="1317069"/>
             </a:xfrm>
             <a:custGeom>
               <a:avLst/>
               <a:pathLst>
-                <a:path w="0" h="3649639">
+                <a:path w="0" h="1317069">
                   <a:moveTo>
-                    <a:pt x="0" y="3649639"/>
+                    <a:pt x="0" y="1317069"/>
                   </a:moveTo>
                   <a:lnTo>
                     <a:pt x="0" y="0"/>
@@ -2959,15 +2951,15 @@
           </p:nvSpPr>
           <p:spPr>
             <a:xfrm>
-              <a:off x="5696815" y="2073503"/>
-              <a:ext cx="0" cy="3649639"/>
+              <a:off x="3978318" y="2143092"/>
+              <a:ext cx="0" cy="1317069"/>
             </a:xfrm>
             <a:custGeom>
               <a:avLst/>
               <a:pathLst>
-                <a:path w="0" h="3649639">
+                <a:path w="0" h="1317069">
                   <a:moveTo>
-                    <a:pt x="0" y="3649639"/>
+                    <a:pt x="0" y="1317069"/>
                   </a:moveTo>
                   <a:lnTo>
                     <a:pt x="0" y="0"/>
@@ -3002,15 +2994,15 @@
           </p:nvSpPr>
           <p:spPr>
             <a:xfrm>
-              <a:off x="7428738" y="2073503"/>
-              <a:ext cx="0" cy="3649639"/>
+              <a:off x="5679337" y="2143092"/>
+              <a:ext cx="0" cy="1317069"/>
             </a:xfrm>
             <a:custGeom>
               <a:avLst/>
               <a:pathLst>
-                <a:path w="0" h="3649639">
+                <a:path w="0" h="1317069">
                   <a:moveTo>
-                    <a:pt x="0" y="3649639"/>
+                    <a:pt x="0" y="1317069"/>
                   </a:moveTo>
                   <a:lnTo>
                     <a:pt x="0" y="0"/>
@@ -3039,618 +3031,661 @@
         </p:sp>
         <p:sp>
           <p:nvSpPr>
-            <p:cNvPr id="22" name="pg22"/>
+            <p:cNvPr id="22" name="pl22"/>
             <p:cNvSpPr/>
             <p:nvPr/>
           </p:nvSpPr>
           <p:spPr>
             <a:xfrm>
-              <a:off x="1172049" y="3645306"/>
-              <a:ext cx="7090630" cy="1626634"/>
+              <a:off x="7380356" y="2143092"/>
+              <a:ext cx="0" cy="1317069"/>
             </a:xfrm>
             <a:custGeom>
               <a:avLst/>
               <a:pathLst>
-                <a:path w="7090630" h="1626634">
+                <a:path w="0" h="1317069">
+                  <a:moveTo>
+                    <a:pt x="0" y="1317069"/>
+                  </a:moveTo>
+                  <a:lnTo>
+                    <a:pt x="0" y="0"/>
+                  </a:lnTo>
+                  <a:lnTo>
+                    <a:pt x="0" y="0"/>
+                  </a:lnTo>
+                </a:path>
+              </a:pathLst>
+            </a:custGeom>
+            <a:ln w="13550" cap="flat">
+              <a:solidFill>
+                <a:srgbClr val="EBEBEB">
+                  <a:alpha val="100000"/>
+                </a:srgbClr>
+              </a:solidFill>
+              <a:prstDash val="solid"/>
+              <a:round/>
+            </a:ln>
+          </p:spPr>
+          <p:txBody>
+            <a:bodyPr/>
+            <a:lstStyle/>
+            <a:p/>
+          </p:txBody>
+        </p:sp>
+        <p:sp>
+          <p:nvSpPr>
+            <p:cNvPr id="23" name="pg23"/>
+            <p:cNvSpPr/>
+            <p:nvPr/>
+          </p:nvSpPr>
+          <p:spPr>
+            <a:xfrm>
+              <a:off x="1235312" y="2710319"/>
+              <a:ext cx="6964104" cy="587013"/>
+            </a:xfrm>
+            <a:custGeom>
+              <a:avLst/>
+              <a:pathLst>
+                <a:path w="6964104" h="587013">
                   <a:moveTo>
                     <a:pt x="0" y="0"/>
                   </a:moveTo>
                   <a:lnTo>
-                    <a:pt x="71622" y="36387"/>
-                  </a:lnTo>
-                  <a:lnTo>
-                    <a:pt x="143245" y="72082"/>
-                  </a:lnTo>
-                  <a:lnTo>
-                    <a:pt x="214867" y="107098"/>
-                  </a:lnTo>
-                  <a:lnTo>
-                    <a:pt x="286490" y="141447"/>
-                  </a:lnTo>
-                  <a:lnTo>
-                    <a:pt x="358112" y="175143"/>
-                  </a:lnTo>
-                  <a:lnTo>
-                    <a:pt x="429735" y="208197"/>
-                  </a:lnTo>
-                  <a:lnTo>
-                    <a:pt x="501357" y="240622"/>
-                  </a:lnTo>
-                  <a:lnTo>
-                    <a:pt x="572980" y="272431"/>
-                  </a:lnTo>
-                  <a:lnTo>
-                    <a:pt x="644602" y="303633"/>
-                  </a:lnTo>
-                  <a:lnTo>
-                    <a:pt x="716225" y="334242"/>
-                  </a:lnTo>
-                  <a:lnTo>
-                    <a:pt x="787847" y="364269"/>
-                  </a:lnTo>
-                  <a:lnTo>
-                    <a:pt x="859470" y="393724"/>
-                  </a:lnTo>
-                  <a:lnTo>
-                    <a:pt x="931092" y="422618"/>
-                  </a:lnTo>
-                  <a:lnTo>
-                    <a:pt x="1002715" y="450962"/>
-                  </a:lnTo>
-                  <a:lnTo>
-                    <a:pt x="1074337" y="478767"/>
-                  </a:lnTo>
-                  <a:lnTo>
-                    <a:pt x="1145960" y="506043"/>
-                  </a:lnTo>
-                  <a:lnTo>
-                    <a:pt x="1217582" y="532800"/>
-                  </a:lnTo>
-                  <a:lnTo>
-                    <a:pt x="1289205" y="559047"/>
-                  </a:lnTo>
-                  <a:lnTo>
-                    <a:pt x="1360827" y="584795"/>
-                  </a:lnTo>
-                  <a:lnTo>
-                    <a:pt x="1432450" y="610053"/>
-                  </a:lnTo>
-                  <a:lnTo>
-                    <a:pt x="1504073" y="634830"/>
-                  </a:lnTo>
-                  <a:lnTo>
-                    <a:pt x="1575695" y="659136"/>
-                  </a:lnTo>
-                  <a:lnTo>
-                    <a:pt x="1647318" y="682979"/>
-                  </a:lnTo>
-                  <a:lnTo>
-                    <a:pt x="1718940" y="706369"/>
-                  </a:lnTo>
-                  <a:lnTo>
-                    <a:pt x="1790563" y="729313"/>
-                  </a:lnTo>
-                  <a:lnTo>
-                    <a:pt x="1862185" y="751820"/>
-                  </a:lnTo>
-                  <a:lnTo>
-                    <a:pt x="1933808" y="773899"/>
-                  </a:lnTo>
-                  <a:lnTo>
-                    <a:pt x="2005430" y="795558"/>
-                  </a:lnTo>
-                  <a:lnTo>
-                    <a:pt x="2077053" y="816805"/>
-                  </a:lnTo>
-                  <a:lnTo>
-                    <a:pt x="2148675" y="837647"/>
-                  </a:lnTo>
-                  <a:lnTo>
-                    <a:pt x="2220298" y="858093"/>
-                  </a:lnTo>
-                  <a:lnTo>
-                    <a:pt x="2291920" y="878150"/>
-                  </a:lnTo>
-                  <a:lnTo>
-                    <a:pt x="2363543" y="897825"/>
-                  </a:lnTo>
-                  <a:lnTo>
-                    <a:pt x="2435165" y="917125"/>
-                  </a:lnTo>
-                  <a:lnTo>
-                    <a:pt x="2506788" y="936058"/>
-                  </a:lnTo>
-                  <a:lnTo>
-                    <a:pt x="2578410" y="954631"/>
-                  </a:lnTo>
-                  <a:lnTo>
-                    <a:pt x="2650033" y="972850"/>
-                  </a:lnTo>
-                  <a:lnTo>
-                    <a:pt x="2721655" y="990723"/>
-                  </a:lnTo>
-                  <a:lnTo>
-                    <a:pt x="2793278" y="1008255"/>
-                  </a:lnTo>
-                  <a:lnTo>
-                    <a:pt x="2864901" y="1025454"/>
-                  </a:lnTo>
-                  <a:lnTo>
-                    <a:pt x="2936523" y="1042325"/>
-                  </a:lnTo>
-                  <a:lnTo>
-                    <a:pt x="3008146" y="1058876"/>
-                  </a:lnTo>
-                  <a:lnTo>
-                    <a:pt x="3079768" y="1075111"/>
-                  </a:lnTo>
-                  <a:lnTo>
-                    <a:pt x="3151391" y="1086068"/>
-                  </a:lnTo>
-                  <a:lnTo>
-                    <a:pt x="3223013" y="1092675"/>
-                  </a:lnTo>
-                  <a:lnTo>
-                    <a:pt x="3294636" y="1099230"/>
-                  </a:lnTo>
-                  <a:lnTo>
-                    <a:pt x="3366258" y="1105732"/>
-                  </a:lnTo>
-                  <a:lnTo>
-                    <a:pt x="3437881" y="1112182"/>
-                  </a:lnTo>
-                  <a:lnTo>
-                    <a:pt x="3509503" y="1118581"/>
-                  </a:lnTo>
-                  <a:lnTo>
-                    <a:pt x="3581126" y="1124928"/>
-                  </a:lnTo>
-                  <a:lnTo>
-                    <a:pt x="3652748" y="1131225"/>
-                  </a:lnTo>
-                  <a:lnTo>
-                    <a:pt x="3724371" y="1137471"/>
-                  </a:lnTo>
-                  <a:lnTo>
-                    <a:pt x="3795993" y="1143667"/>
-                  </a:lnTo>
-                  <a:lnTo>
-                    <a:pt x="3867616" y="1149814"/>
-                  </a:lnTo>
-                  <a:lnTo>
-                    <a:pt x="3939238" y="1155911"/>
-                  </a:lnTo>
-                  <a:lnTo>
-                    <a:pt x="4010861" y="1161960"/>
-                  </a:lnTo>
-                  <a:lnTo>
-                    <a:pt x="4082483" y="1167960"/>
-                  </a:lnTo>
-                  <a:lnTo>
-                    <a:pt x="4154106" y="1173912"/>
-                  </a:lnTo>
-                  <a:lnTo>
-                    <a:pt x="4225729" y="1179817"/>
-                  </a:lnTo>
-                  <a:lnTo>
-                    <a:pt x="4297351" y="1185674"/>
-                  </a:lnTo>
-                  <a:lnTo>
-                    <a:pt x="4368974" y="1191485"/>
-                  </a:lnTo>
-                  <a:lnTo>
-                    <a:pt x="4440596" y="1197249"/>
-                  </a:lnTo>
-                  <a:lnTo>
-                    <a:pt x="4512219" y="1202967"/>
-                  </a:lnTo>
-                  <a:lnTo>
-                    <a:pt x="4583841" y="1208639"/>
-                  </a:lnTo>
-                  <a:lnTo>
-                    <a:pt x="4655464" y="1214266"/>
-                  </a:lnTo>
-                  <a:lnTo>
-                    <a:pt x="4727086" y="1219848"/>
-                  </a:lnTo>
-                  <a:lnTo>
-                    <a:pt x="4798709" y="1225385"/>
-                  </a:lnTo>
-                  <a:lnTo>
-                    <a:pt x="4870331" y="1230878"/>
-                  </a:lnTo>
-                  <a:lnTo>
-                    <a:pt x="4941954" y="1236327"/>
-                  </a:lnTo>
-                  <a:lnTo>
-                    <a:pt x="5013576" y="1241732"/>
-                  </a:lnTo>
-                  <a:lnTo>
-                    <a:pt x="5085199" y="1247094"/>
-                  </a:lnTo>
-                  <a:lnTo>
-                    <a:pt x="5156821" y="1252414"/>
-                  </a:lnTo>
-                  <a:lnTo>
-                    <a:pt x="5228444" y="1257690"/>
-                  </a:lnTo>
-                  <a:lnTo>
-                    <a:pt x="5300066" y="1262925"/>
-                  </a:lnTo>
-                  <a:lnTo>
-                    <a:pt x="5371689" y="1268117"/>
-                  </a:lnTo>
-                  <a:lnTo>
-                    <a:pt x="5443311" y="1273268"/>
-                  </a:lnTo>
-                  <a:lnTo>
-                    <a:pt x="5514934" y="1278378"/>
-                  </a:lnTo>
-                  <a:lnTo>
-                    <a:pt x="5586557" y="1283447"/>
-                  </a:lnTo>
-                  <a:lnTo>
-                    <a:pt x="5658179" y="1288475"/>
-                  </a:lnTo>
-                  <a:lnTo>
-                    <a:pt x="5729802" y="1293463"/>
-                  </a:lnTo>
-                  <a:lnTo>
-                    <a:pt x="5801424" y="1298411"/>
-                  </a:lnTo>
-                  <a:lnTo>
-                    <a:pt x="5873047" y="1303320"/>
-                  </a:lnTo>
-                  <a:lnTo>
-                    <a:pt x="5944669" y="1308189"/>
-                  </a:lnTo>
-                  <a:lnTo>
-                    <a:pt x="6016292" y="1313020"/>
-                  </a:lnTo>
-                  <a:lnTo>
-                    <a:pt x="6087914" y="1317811"/>
-                  </a:lnTo>
-                  <a:lnTo>
-                    <a:pt x="6159537" y="1322565"/>
-                  </a:lnTo>
-                  <a:lnTo>
-                    <a:pt x="6231159" y="1327280"/>
-                  </a:lnTo>
-                  <a:lnTo>
-                    <a:pt x="6302782" y="1331958"/>
-                  </a:lnTo>
-                  <a:lnTo>
-                    <a:pt x="6374404" y="1336598"/>
-                  </a:lnTo>
-                  <a:lnTo>
-                    <a:pt x="6446027" y="1341201"/>
-                  </a:lnTo>
-                  <a:lnTo>
-                    <a:pt x="6517649" y="1345767"/>
-                  </a:lnTo>
-                  <a:lnTo>
-                    <a:pt x="6589272" y="1350297"/>
-                  </a:lnTo>
-                  <a:lnTo>
-                    <a:pt x="6660894" y="1354791"/>
-                  </a:lnTo>
-                  <a:lnTo>
-                    <a:pt x="6732517" y="1359248"/>
-                  </a:lnTo>
-                  <a:lnTo>
-                    <a:pt x="6804139" y="1363670"/>
-                  </a:lnTo>
-                  <a:lnTo>
-                    <a:pt x="6875762" y="1368057"/>
-                  </a:lnTo>
-                  <a:lnTo>
-                    <a:pt x="6947385" y="1372408"/>
-                  </a:lnTo>
-                  <a:lnTo>
-                    <a:pt x="7019007" y="1376725"/>
-                  </a:lnTo>
-                  <a:lnTo>
-                    <a:pt x="7090630" y="1381007"/>
-                  </a:lnTo>
-                  <a:lnTo>
-                    <a:pt x="7090630" y="1626634"/>
-                  </a:lnTo>
-                  <a:lnTo>
-                    <a:pt x="7019007" y="1621098"/>
-                  </a:lnTo>
-                  <a:lnTo>
-                    <a:pt x="6947385" y="1615456"/>
-                  </a:lnTo>
-                  <a:lnTo>
-                    <a:pt x="6875762" y="1609703"/>
-                  </a:lnTo>
-                  <a:lnTo>
-                    <a:pt x="6804139" y="1603840"/>
-                  </a:lnTo>
-                  <a:lnTo>
-                    <a:pt x="6732517" y="1597862"/>
-                  </a:lnTo>
-                  <a:lnTo>
-                    <a:pt x="6660894" y="1591769"/>
-                  </a:lnTo>
-                  <a:lnTo>
-                    <a:pt x="6589272" y="1585557"/>
-                  </a:lnTo>
-                  <a:lnTo>
-                    <a:pt x="6517649" y="1579225"/>
-                  </a:lnTo>
-                  <a:lnTo>
-                    <a:pt x="6446027" y="1572770"/>
-                  </a:lnTo>
-                  <a:lnTo>
-                    <a:pt x="6374404" y="1566190"/>
-                  </a:lnTo>
-                  <a:lnTo>
-                    <a:pt x="6302782" y="1559482"/>
-                  </a:lnTo>
-                  <a:lnTo>
-                    <a:pt x="6231159" y="1552643"/>
-                  </a:lnTo>
-                  <a:lnTo>
-                    <a:pt x="6159537" y="1545673"/>
-                  </a:lnTo>
-                  <a:lnTo>
-                    <a:pt x="6087914" y="1538567"/>
-                  </a:lnTo>
-                  <a:lnTo>
-                    <a:pt x="6016292" y="1531323"/>
-                  </a:lnTo>
-                  <a:lnTo>
-                    <a:pt x="5944669" y="1523939"/>
-                  </a:lnTo>
-                  <a:lnTo>
-                    <a:pt x="5873047" y="1516411"/>
-                  </a:lnTo>
-                  <a:lnTo>
-                    <a:pt x="5801424" y="1508737"/>
-                  </a:lnTo>
-                  <a:lnTo>
-                    <a:pt x="5729802" y="1500915"/>
-                  </a:lnTo>
-                  <a:lnTo>
-                    <a:pt x="5658179" y="1492940"/>
-                  </a:lnTo>
-                  <a:lnTo>
-                    <a:pt x="5586557" y="1484811"/>
-                  </a:lnTo>
-                  <a:lnTo>
-                    <a:pt x="5514934" y="1476524"/>
-                  </a:lnTo>
-                  <a:lnTo>
-                    <a:pt x="5443311" y="1468077"/>
-                  </a:lnTo>
-                  <a:lnTo>
-                    <a:pt x="5371689" y="1459465"/>
-                  </a:lnTo>
-                  <a:lnTo>
-                    <a:pt x="5300066" y="1450687"/>
-                  </a:lnTo>
-                  <a:lnTo>
-                    <a:pt x="5228444" y="1441738"/>
-                  </a:lnTo>
-                  <a:lnTo>
-                    <a:pt x="5156821" y="1432616"/>
-                  </a:lnTo>
-                  <a:lnTo>
-                    <a:pt x="5085199" y="1423316"/>
-                  </a:lnTo>
-                  <a:lnTo>
-                    <a:pt x="5013576" y="1413836"/>
-                  </a:lnTo>
-                  <a:lnTo>
-                    <a:pt x="4941954" y="1404173"/>
-                  </a:lnTo>
-                  <a:lnTo>
-                    <a:pt x="4870331" y="1394322"/>
-                  </a:lnTo>
-                  <a:lnTo>
-                    <a:pt x="4798709" y="1384279"/>
-                  </a:lnTo>
-                  <a:lnTo>
-                    <a:pt x="4727086" y="1374042"/>
-                  </a:lnTo>
-                  <a:lnTo>
-                    <a:pt x="4655464" y="1363606"/>
-                  </a:lnTo>
-                  <a:lnTo>
-                    <a:pt x="4583841" y="1352968"/>
-                  </a:lnTo>
-                  <a:lnTo>
-                    <a:pt x="4512219" y="1342123"/>
-                  </a:lnTo>
-                  <a:lnTo>
-                    <a:pt x="4440596" y="1331068"/>
-                  </a:lnTo>
-                  <a:lnTo>
-                    <a:pt x="4368974" y="1319799"/>
-                  </a:lnTo>
-                  <a:lnTo>
-                    <a:pt x="4297351" y="1308311"/>
-                  </a:lnTo>
-                  <a:lnTo>
-                    <a:pt x="4225729" y="1296599"/>
-                  </a:lnTo>
-                  <a:lnTo>
-                    <a:pt x="4154106" y="1284661"/>
-                  </a:lnTo>
-                  <a:lnTo>
-                    <a:pt x="4082483" y="1272491"/>
-                  </a:lnTo>
-                  <a:lnTo>
-                    <a:pt x="4010861" y="1260085"/>
-                  </a:lnTo>
-                  <a:lnTo>
-                    <a:pt x="3939238" y="1247439"/>
-                  </a:lnTo>
-                  <a:lnTo>
-                    <a:pt x="3867616" y="1234547"/>
-                  </a:lnTo>
-                  <a:lnTo>
-                    <a:pt x="3795993" y="1221405"/>
-                  </a:lnTo>
-                  <a:lnTo>
-                    <a:pt x="3724371" y="1208007"/>
-                  </a:lnTo>
-                  <a:lnTo>
-                    <a:pt x="3652748" y="1194350"/>
-                  </a:lnTo>
-                  <a:lnTo>
-                    <a:pt x="3581126" y="1180428"/>
-                  </a:lnTo>
-                  <a:lnTo>
-                    <a:pt x="3509503" y="1166236"/>
-                  </a:lnTo>
-                  <a:lnTo>
-                    <a:pt x="3437881" y="1151769"/>
-                  </a:lnTo>
-                  <a:lnTo>
-                    <a:pt x="3366258" y="1137021"/>
-                  </a:lnTo>
-                  <a:lnTo>
-                    <a:pt x="3294636" y="1121987"/>
-                  </a:lnTo>
-                  <a:lnTo>
-                    <a:pt x="3223013" y="1106661"/>
-                  </a:lnTo>
-                  <a:lnTo>
-                    <a:pt x="3151391" y="1091037"/>
-                  </a:lnTo>
-                  <a:lnTo>
-                    <a:pt x="3079768" y="1079407"/>
-                  </a:lnTo>
-                  <a:lnTo>
-                    <a:pt x="3008146" y="1072692"/>
-                  </a:lnTo>
-                  <a:lnTo>
-                    <a:pt x="2936523" y="1065924"/>
-                  </a:lnTo>
-                  <a:lnTo>
-                    <a:pt x="2864901" y="1059100"/>
-                  </a:lnTo>
-                  <a:lnTo>
-                    <a:pt x="2793278" y="1052222"/>
-                  </a:lnTo>
-                  <a:lnTo>
-                    <a:pt x="2721655" y="1045288"/>
-                  </a:lnTo>
-                  <a:lnTo>
-                    <a:pt x="2650033" y="1038299"/>
-                  </a:lnTo>
-                  <a:lnTo>
-                    <a:pt x="2578410" y="1031253"/>
-                  </a:lnTo>
-                  <a:lnTo>
-                    <a:pt x="2506788" y="1024150"/>
-                  </a:lnTo>
-                  <a:lnTo>
-                    <a:pt x="2435165" y="1016990"/>
-                  </a:lnTo>
-                  <a:lnTo>
-                    <a:pt x="2363543" y="1009772"/>
-                  </a:lnTo>
-                  <a:lnTo>
-                    <a:pt x="2291920" y="1002496"/>
-                  </a:lnTo>
-                  <a:lnTo>
-                    <a:pt x="2220298" y="995161"/>
-                  </a:lnTo>
-                  <a:lnTo>
-                    <a:pt x="2148675" y="987767"/>
-                  </a:lnTo>
-                  <a:lnTo>
-                    <a:pt x="2077053" y="980313"/>
-                  </a:lnTo>
-                  <a:lnTo>
-                    <a:pt x="2005430" y="972800"/>
-                  </a:lnTo>
-                  <a:lnTo>
-                    <a:pt x="1933808" y="965225"/>
-                  </a:lnTo>
-                  <a:lnTo>
-                    <a:pt x="1862185" y="957590"/>
-                  </a:lnTo>
-                  <a:lnTo>
-                    <a:pt x="1790563" y="949893"/>
-                  </a:lnTo>
-                  <a:lnTo>
-                    <a:pt x="1718940" y="942134"/>
-                  </a:lnTo>
-                  <a:lnTo>
-                    <a:pt x="1647318" y="934312"/>
-                  </a:lnTo>
-                  <a:lnTo>
-                    <a:pt x="1575695" y="926428"/>
-                  </a:lnTo>
-                  <a:lnTo>
-                    <a:pt x="1504073" y="918479"/>
-                  </a:lnTo>
-                  <a:lnTo>
-                    <a:pt x="1432450" y="910467"/>
-                  </a:lnTo>
-                  <a:lnTo>
-                    <a:pt x="1360827" y="902390"/>
-                  </a:lnTo>
-                  <a:lnTo>
-                    <a:pt x="1289205" y="894248"/>
-                  </a:lnTo>
-                  <a:lnTo>
-                    <a:pt x="1217582" y="886040"/>
-                  </a:lnTo>
-                  <a:lnTo>
-                    <a:pt x="1145960" y="877766"/>
-                  </a:lnTo>
-                  <a:lnTo>
-                    <a:pt x="1074337" y="869425"/>
-                  </a:lnTo>
-                  <a:lnTo>
-                    <a:pt x="1002715" y="861017"/>
-                  </a:lnTo>
-                  <a:lnTo>
-                    <a:pt x="931092" y="852541"/>
-                  </a:lnTo>
-                  <a:lnTo>
-                    <a:pt x="859470" y="843997"/>
-                  </a:lnTo>
-                  <a:lnTo>
-                    <a:pt x="787847" y="835384"/>
-                  </a:lnTo>
-                  <a:lnTo>
-                    <a:pt x="716225" y="826702"/>
-                  </a:lnTo>
-                  <a:lnTo>
-                    <a:pt x="644602" y="817949"/>
-                  </a:lnTo>
-                  <a:lnTo>
-                    <a:pt x="572980" y="809126"/>
-                  </a:lnTo>
-                  <a:lnTo>
-                    <a:pt x="501357" y="800231"/>
-                  </a:lnTo>
-                  <a:lnTo>
-                    <a:pt x="429735" y="791265"/>
-                  </a:lnTo>
-                  <a:lnTo>
-                    <a:pt x="358112" y="782227"/>
-                  </a:lnTo>
-                  <a:lnTo>
-                    <a:pt x="286490" y="773116"/>
-                  </a:lnTo>
-                  <a:lnTo>
-                    <a:pt x="214867" y="763931"/>
-                  </a:lnTo>
-                  <a:lnTo>
-                    <a:pt x="143245" y="754672"/>
-                  </a:lnTo>
-                  <a:lnTo>
-                    <a:pt x="71622" y="745339"/>
-                  </a:lnTo>
-                  <a:lnTo>
-                    <a:pt x="0" y="735930"/>
+                    <a:pt x="70344" y="13131"/>
+                  </a:lnTo>
+                  <a:lnTo>
+                    <a:pt x="140688" y="26012"/>
+                  </a:lnTo>
+                  <a:lnTo>
+                    <a:pt x="211033" y="38649"/>
+                  </a:lnTo>
+                  <a:lnTo>
+                    <a:pt x="281377" y="51045"/>
+                  </a:lnTo>
+                  <a:lnTo>
+                    <a:pt x="351722" y="63205"/>
+                  </a:lnTo>
+                  <a:lnTo>
+                    <a:pt x="422066" y="75133"/>
+                  </a:lnTo>
+                  <a:lnTo>
+                    <a:pt x="492411" y="86835"/>
+                  </a:lnTo>
+                  <a:lnTo>
+                    <a:pt x="562755" y="98313"/>
+                  </a:lnTo>
+                  <a:lnTo>
+                    <a:pt x="633100" y="109574"/>
+                  </a:lnTo>
+                  <a:lnTo>
+                    <a:pt x="703444" y="120620"/>
+                  </a:lnTo>
+                  <a:lnTo>
+                    <a:pt x="773789" y="131456"/>
+                  </a:lnTo>
+                  <a:lnTo>
+                    <a:pt x="844133" y="142085"/>
+                  </a:lnTo>
+                  <a:lnTo>
+                    <a:pt x="914478" y="152513"/>
+                  </a:lnTo>
+                  <a:lnTo>
+                    <a:pt x="984822" y="162741"/>
+                  </a:lnTo>
+                  <a:lnTo>
+                    <a:pt x="1055167" y="172776"/>
+                  </a:lnTo>
+                  <a:lnTo>
+                    <a:pt x="1125511" y="182619"/>
+                  </a:lnTo>
+                  <a:lnTo>
+                    <a:pt x="1195856" y="192275"/>
+                  </a:lnTo>
+                  <a:lnTo>
+                    <a:pt x="1266200" y="201747"/>
+                  </a:lnTo>
+                  <a:lnTo>
+                    <a:pt x="1336545" y="211039"/>
+                  </a:lnTo>
+                  <a:lnTo>
+                    <a:pt x="1406889" y="220154"/>
+                  </a:lnTo>
+                  <a:lnTo>
+                    <a:pt x="1477234" y="229095"/>
+                  </a:lnTo>
+                  <a:lnTo>
+                    <a:pt x="1547578" y="237866"/>
+                  </a:lnTo>
+                  <a:lnTo>
+                    <a:pt x="1617923" y="246471"/>
+                  </a:lnTo>
+                  <a:lnTo>
+                    <a:pt x="1688267" y="254911"/>
+                  </a:lnTo>
+                  <a:lnTo>
+                    <a:pt x="1758612" y="263191"/>
+                  </a:lnTo>
+                  <a:lnTo>
+                    <a:pt x="1828956" y="271314"/>
+                  </a:lnTo>
+                  <a:lnTo>
+                    <a:pt x="1899301" y="279282"/>
+                  </a:lnTo>
+                  <a:lnTo>
+                    <a:pt x="1969645" y="287098"/>
+                  </a:lnTo>
+                  <a:lnTo>
+                    <a:pt x="2039990" y="294765"/>
+                  </a:lnTo>
+                  <a:lnTo>
+                    <a:pt x="2110334" y="302287"/>
+                  </a:lnTo>
+                  <a:lnTo>
+                    <a:pt x="2180679" y="309665"/>
+                  </a:lnTo>
+                  <a:lnTo>
+                    <a:pt x="2251023" y="316903"/>
+                  </a:lnTo>
+                  <a:lnTo>
+                    <a:pt x="2321368" y="324003"/>
+                  </a:lnTo>
+                  <a:lnTo>
+                    <a:pt x="2391712" y="330969"/>
+                  </a:lnTo>
+                  <a:lnTo>
+                    <a:pt x="2462057" y="337801"/>
+                  </a:lnTo>
+                  <a:lnTo>
+                    <a:pt x="2532401" y="344504"/>
+                  </a:lnTo>
+                  <a:lnTo>
+                    <a:pt x="2602746" y="351078"/>
+                  </a:lnTo>
+                  <a:lnTo>
+                    <a:pt x="2673090" y="357528"/>
+                  </a:lnTo>
+                  <a:lnTo>
+                    <a:pt x="2743435" y="363855"/>
+                  </a:lnTo>
+                  <a:lnTo>
+                    <a:pt x="2813779" y="370062"/>
+                  </a:lnTo>
+                  <a:lnTo>
+                    <a:pt x="2884124" y="376150"/>
+                  </a:lnTo>
+                  <a:lnTo>
+                    <a:pt x="2954468" y="382123"/>
+                  </a:lnTo>
+                  <a:lnTo>
+                    <a:pt x="3024813" y="387982"/>
+                  </a:lnTo>
+                  <a:lnTo>
+                    <a:pt x="3095157" y="391936"/>
+                  </a:lnTo>
+                  <a:lnTo>
+                    <a:pt x="3165502" y="394320"/>
+                  </a:lnTo>
+                  <a:lnTo>
+                    <a:pt x="3235846" y="396686"/>
+                  </a:lnTo>
+                  <a:lnTo>
+                    <a:pt x="3306191" y="399032"/>
+                  </a:lnTo>
+                  <a:lnTo>
+                    <a:pt x="3376535" y="401360"/>
+                  </a:lnTo>
+                  <a:lnTo>
+                    <a:pt x="3446880" y="403669"/>
+                  </a:lnTo>
+                  <a:lnTo>
+                    <a:pt x="3517224" y="405960"/>
+                  </a:lnTo>
+                  <a:lnTo>
+                    <a:pt x="3587569" y="408232"/>
+                  </a:lnTo>
+                  <a:lnTo>
+                    <a:pt x="3657913" y="410486"/>
+                  </a:lnTo>
+                  <a:lnTo>
+                    <a:pt x="3728257" y="412722"/>
+                  </a:lnTo>
+                  <a:lnTo>
+                    <a:pt x="3798602" y="414940"/>
+                  </a:lnTo>
+                  <a:lnTo>
+                    <a:pt x="3868946" y="417141"/>
+                  </a:lnTo>
+                  <a:lnTo>
+                    <a:pt x="3939291" y="419324"/>
+                  </a:lnTo>
+                  <a:lnTo>
+                    <a:pt x="4009635" y="421489"/>
+                  </a:lnTo>
+                  <a:lnTo>
+                    <a:pt x="4079980" y="423637"/>
+                  </a:lnTo>
+                  <a:lnTo>
+                    <a:pt x="4150324" y="425768"/>
+                  </a:lnTo>
+                  <a:lnTo>
+                    <a:pt x="4220669" y="427882"/>
+                  </a:lnTo>
+                  <a:lnTo>
+                    <a:pt x="4291013" y="429979"/>
+                  </a:lnTo>
+                  <a:lnTo>
+                    <a:pt x="4361358" y="432059"/>
+                  </a:lnTo>
+                  <a:lnTo>
+                    <a:pt x="4431702" y="434122"/>
+                  </a:lnTo>
+                  <a:lnTo>
+                    <a:pt x="4502047" y="436169"/>
+                  </a:lnTo>
+                  <a:lnTo>
+                    <a:pt x="4572391" y="438200"/>
+                  </a:lnTo>
+                  <a:lnTo>
+                    <a:pt x="4642736" y="440214"/>
+                  </a:lnTo>
+                  <a:lnTo>
+                    <a:pt x="4713080" y="442212"/>
+                  </a:lnTo>
+                  <a:lnTo>
+                    <a:pt x="4783425" y="444195"/>
+                  </a:lnTo>
+                  <a:lnTo>
+                    <a:pt x="4853769" y="446161"/>
+                  </a:lnTo>
+                  <a:lnTo>
+                    <a:pt x="4924114" y="448112"/>
+                  </a:lnTo>
+                  <a:lnTo>
+                    <a:pt x="4994458" y="450047"/>
+                  </a:lnTo>
+                  <a:lnTo>
+                    <a:pt x="5064803" y="451966"/>
+                  </a:lnTo>
+                  <a:lnTo>
+                    <a:pt x="5135147" y="453870"/>
+                  </a:lnTo>
+                  <a:lnTo>
+                    <a:pt x="5205492" y="455759"/>
+                  </a:lnTo>
+                  <a:lnTo>
+                    <a:pt x="5275836" y="457633"/>
+                  </a:lnTo>
+                  <a:lnTo>
+                    <a:pt x="5346181" y="459492"/>
+                  </a:lnTo>
+                  <a:lnTo>
+                    <a:pt x="5416525" y="461336"/>
+                  </a:lnTo>
+                  <a:lnTo>
+                    <a:pt x="5486870" y="463165"/>
+                  </a:lnTo>
+                  <a:lnTo>
+                    <a:pt x="5557214" y="464980"/>
+                  </a:lnTo>
+                  <a:lnTo>
+                    <a:pt x="5627559" y="466780"/>
+                  </a:lnTo>
+                  <a:lnTo>
+                    <a:pt x="5697903" y="468566"/>
+                  </a:lnTo>
+                  <a:lnTo>
+                    <a:pt x="5768248" y="470337"/>
+                  </a:lnTo>
+                  <a:lnTo>
+                    <a:pt x="5838592" y="472094"/>
+                  </a:lnTo>
+                  <a:lnTo>
+                    <a:pt x="5908937" y="473838"/>
+                  </a:lnTo>
+                  <a:lnTo>
+                    <a:pt x="5979281" y="475567"/>
+                  </a:lnTo>
+                  <a:lnTo>
+                    <a:pt x="6049626" y="477282"/>
+                  </a:lnTo>
+                  <a:lnTo>
+                    <a:pt x="6119970" y="478984"/>
+                  </a:lnTo>
+                  <a:lnTo>
+                    <a:pt x="6190315" y="480672"/>
+                  </a:lnTo>
+                  <a:lnTo>
+                    <a:pt x="6260659" y="482346"/>
+                  </a:lnTo>
+                  <a:lnTo>
+                    <a:pt x="6331004" y="484008"/>
+                  </a:lnTo>
+                  <a:lnTo>
+                    <a:pt x="6401348" y="485655"/>
+                  </a:lnTo>
+                  <a:lnTo>
+                    <a:pt x="6471693" y="487290"/>
+                  </a:lnTo>
+                  <a:lnTo>
+                    <a:pt x="6542037" y="488912"/>
+                  </a:lnTo>
+                  <a:lnTo>
+                    <a:pt x="6612382" y="490520"/>
+                  </a:lnTo>
+                  <a:lnTo>
+                    <a:pt x="6682726" y="492116"/>
+                  </a:lnTo>
+                  <a:lnTo>
+                    <a:pt x="6753071" y="493699"/>
+                  </a:lnTo>
+                  <a:lnTo>
+                    <a:pt x="6823415" y="495269"/>
+                  </a:lnTo>
+                  <a:lnTo>
+                    <a:pt x="6893760" y="496827"/>
+                  </a:lnTo>
+                  <a:lnTo>
+                    <a:pt x="6964104" y="498372"/>
+                  </a:lnTo>
+                  <a:lnTo>
+                    <a:pt x="6964104" y="587013"/>
+                  </a:lnTo>
+                  <a:lnTo>
+                    <a:pt x="6893760" y="585016"/>
+                  </a:lnTo>
+                  <a:lnTo>
+                    <a:pt x="6823415" y="582980"/>
+                  </a:lnTo>
+                  <a:lnTo>
+                    <a:pt x="6753071" y="580904"/>
+                  </a:lnTo>
+                  <a:lnTo>
+                    <a:pt x="6682726" y="578788"/>
+                  </a:lnTo>
+                  <a:lnTo>
+                    <a:pt x="6612382" y="576631"/>
+                  </a:lnTo>
+                  <a:lnTo>
+                    <a:pt x="6542037" y="574432"/>
+                  </a:lnTo>
+                  <a:lnTo>
+                    <a:pt x="6471693" y="572190"/>
+                  </a:lnTo>
+                  <a:lnTo>
+                    <a:pt x="6401348" y="569905"/>
+                  </a:lnTo>
+                  <a:lnTo>
+                    <a:pt x="6331004" y="567575"/>
+                  </a:lnTo>
+                  <a:lnTo>
+                    <a:pt x="6260659" y="565201"/>
+                  </a:lnTo>
+                  <a:lnTo>
+                    <a:pt x="6190315" y="562780"/>
+                  </a:lnTo>
+                  <a:lnTo>
+                    <a:pt x="6119970" y="560312"/>
+                  </a:lnTo>
+                  <a:lnTo>
+                    <a:pt x="6049626" y="557797"/>
+                  </a:lnTo>
+                  <a:lnTo>
+                    <a:pt x="5979281" y="555232"/>
+                  </a:lnTo>
+                  <a:lnTo>
+                    <a:pt x="5908937" y="552618"/>
+                  </a:lnTo>
+                  <a:lnTo>
+                    <a:pt x="5838592" y="549953"/>
+                  </a:lnTo>
+                  <a:lnTo>
+                    <a:pt x="5768248" y="547237"/>
+                  </a:lnTo>
+                  <a:lnTo>
+                    <a:pt x="5697903" y="544467"/>
+                  </a:lnTo>
+                  <a:lnTo>
+                    <a:pt x="5627559" y="541644"/>
+                  </a:lnTo>
+                  <a:lnTo>
+                    <a:pt x="5557214" y="538767"/>
+                  </a:lnTo>
+                  <a:lnTo>
+                    <a:pt x="5486870" y="535833"/>
+                  </a:lnTo>
+                  <a:lnTo>
+                    <a:pt x="5416525" y="532843"/>
+                  </a:lnTo>
+                  <a:lnTo>
+                    <a:pt x="5346181" y="529794"/>
+                  </a:lnTo>
+                  <a:lnTo>
+                    <a:pt x="5275836" y="526686"/>
+                  </a:lnTo>
+                  <a:lnTo>
+                    <a:pt x="5205492" y="523518"/>
+                  </a:lnTo>
+                  <a:lnTo>
+                    <a:pt x="5135147" y="520289"/>
+                  </a:lnTo>
+                  <a:lnTo>
+                    <a:pt x="5064803" y="516997"/>
+                  </a:lnTo>
+                  <a:lnTo>
+                    <a:pt x="4994458" y="513641"/>
+                  </a:lnTo>
+                  <a:lnTo>
+                    <a:pt x="4924114" y="510220"/>
+                  </a:lnTo>
+                  <a:lnTo>
+                    <a:pt x="4853769" y="506733"/>
+                  </a:lnTo>
+                  <a:lnTo>
+                    <a:pt x="4783425" y="503178"/>
+                  </a:lnTo>
+                  <a:lnTo>
+                    <a:pt x="4713080" y="499553"/>
+                  </a:lnTo>
+                  <a:lnTo>
+                    <a:pt x="4642736" y="495859"/>
+                  </a:lnTo>
+                  <a:lnTo>
+                    <a:pt x="4572391" y="492093"/>
+                  </a:lnTo>
+                  <a:lnTo>
+                    <a:pt x="4502047" y="488254"/>
+                  </a:lnTo>
+                  <a:lnTo>
+                    <a:pt x="4431702" y="484340"/>
+                  </a:lnTo>
+                  <a:lnTo>
+                    <a:pt x="4361358" y="480351"/>
+                  </a:lnTo>
+                  <a:lnTo>
+                    <a:pt x="4291013" y="476284"/>
+                  </a:lnTo>
+                  <a:lnTo>
+                    <a:pt x="4220669" y="472138"/>
+                  </a:lnTo>
+                  <a:lnTo>
+                    <a:pt x="4150324" y="467912"/>
+                  </a:lnTo>
+                  <a:lnTo>
+                    <a:pt x="4079980" y="463604"/>
+                  </a:lnTo>
+                  <a:lnTo>
+                    <a:pt x="4009635" y="459212"/>
+                  </a:lnTo>
+                  <a:lnTo>
+                    <a:pt x="3939291" y="454735"/>
+                  </a:lnTo>
+                  <a:lnTo>
+                    <a:pt x="3868946" y="450171"/>
+                  </a:lnTo>
+                  <a:lnTo>
+                    <a:pt x="3798602" y="445519"/>
+                  </a:lnTo>
+                  <a:lnTo>
+                    <a:pt x="3728257" y="440776"/>
+                  </a:lnTo>
+                  <a:lnTo>
+                    <a:pt x="3657913" y="435941"/>
+                  </a:lnTo>
+                  <a:lnTo>
+                    <a:pt x="3587569" y="431013"/>
+                  </a:lnTo>
+                  <a:lnTo>
+                    <a:pt x="3517224" y="425989"/>
+                  </a:lnTo>
+                  <a:lnTo>
+                    <a:pt x="3446880" y="420867"/>
+                  </a:lnTo>
+                  <a:lnTo>
+                    <a:pt x="3376535" y="415646"/>
+                  </a:lnTo>
+                  <a:lnTo>
+                    <a:pt x="3306191" y="410324"/>
+                  </a:lnTo>
+                  <a:lnTo>
+                    <a:pt x="3235846" y="404898"/>
+                  </a:lnTo>
+                  <a:lnTo>
+                    <a:pt x="3165502" y="399367"/>
+                  </a:lnTo>
+                  <a:lnTo>
+                    <a:pt x="3095157" y="393729"/>
+                  </a:lnTo>
+                  <a:lnTo>
+                    <a:pt x="3024813" y="389532"/>
+                  </a:lnTo>
+                  <a:lnTo>
+                    <a:pt x="2954468" y="387109"/>
+                  </a:lnTo>
+                  <a:lnTo>
+                    <a:pt x="2884124" y="384666"/>
+                  </a:lnTo>
+                  <a:lnTo>
+                    <a:pt x="2813779" y="382204"/>
+                  </a:lnTo>
+                  <a:lnTo>
+                    <a:pt x="2743435" y="379722"/>
+                  </a:lnTo>
+                  <a:lnTo>
+                    <a:pt x="2673090" y="377220"/>
+                  </a:lnTo>
+                  <a:lnTo>
+                    <a:pt x="2602746" y="374697"/>
+                  </a:lnTo>
+                  <a:lnTo>
+                    <a:pt x="2532401" y="372155"/>
+                  </a:lnTo>
+                  <a:lnTo>
+                    <a:pt x="2462057" y="369591"/>
+                  </a:lnTo>
+                  <a:lnTo>
+                    <a:pt x="2391712" y="367007"/>
+                  </a:lnTo>
+                  <a:lnTo>
+                    <a:pt x="2321368" y="364403"/>
+                  </a:lnTo>
+                  <a:lnTo>
+                    <a:pt x="2251023" y="361777"/>
+                  </a:lnTo>
+                  <a:lnTo>
+                    <a:pt x="2180679" y="359130"/>
+                  </a:lnTo>
+                  <a:lnTo>
+                    <a:pt x="2110334" y="356462"/>
+                  </a:lnTo>
+                  <a:lnTo>
+                    <a:pt x="2039990" y="353772"/>
+                  </a:lnTo>
+                  <a:lnTo>
+                    <a:pt x="1969645" y="351060"/>
+                  </a:lnTo>
+                  <a:lnTo>
+                    <a:pt x="1899301" y="348327"/>
+                  </a:lnTo>
+                  <a:lnTo>
+                    <a:pt x="1828956" y="345571"/>
+                  </a:lnTo>
+                  <a:lnTo>
+                    <a:pt x="1758612" y="342794"/>
+                  </a:lnTo>
+                  <a:lnTo>
+                    <a:pt x="1688267" y="339994"/>
+                  </a:lnTo>
+                  <a:lnTo>
+                    <a:pt x="1617923" y="337171"/>
+                  </a:lnTo>
+                  <a:lnTo>
+                    <a:pt x="1547578" y="334326"/>
+                  </a:lnTo>
+                  <a:lnTo>
+                    <a:pt x="1477234" y="331457"/>
+                  </a:lnTo>
+                  <a:lnTo>
+                    <a:pt x="1406889" y="328566"/>
+                  </a:lnTo>
+                  <a:lnTo>
+                    <a:pt x="1336545" y="325651"/>
+                  </a:lnTo>
+                  <a:lnTo>
+                    <a:pt x="1266200" y="322713"/>
+                  </a:lnTo>
+                  <a:lnTo>
+                    <a:pt x="1195856" y="319751"/>
+                  </a:lnTo>
+                  <a:lnTo>
+                    <a:pt x="1125511" y="316765"/>
+                  </a:lnTo>
+                  <a:lnTo>
+                    <a:pt x="1055167" y="313755"/>
+                  </a:lnTo>
+                  <a:lnTo>
+                    <a:pt x="984822" y="310721"/>
+                  </a:lnTo>
+                  <a:lnTo>
+                    <a:pt x="914478" y="307662"/>
+                  </a:lnTo>
+                  <a:lnTo>
+                    <a:pt x="844133" y="304578"/>
+                  </a:lnTo>
+                  <a:lnTo>
+                    <a:pt x="773789" y="301470"/>
+                  </a:lnTo>
+                  <a:lnTo>
+                    <a:pt x="703444" y="298337"/>
+                  </a:lnTo>
+                  <a:lnTo>
+                    <a:pt x="633100" y="295178"/>
+                  </a:lnTo>
+                  <a:lnTo>
+                    <a:pt x="562755" y="291994"/>
+                  </a:lnTo>
+                  <a:lnTo>
+                    <a:pt x="492411" y="288784"/>
+                  </a:lnTo>
+                  <a:lnTo>
+                    <a:pt x="422066" y="285549"/>
+                  </a:lnTo>
+                  <a:lnTo>
+                    <a:pt x="351722" y="282287"/>
+                  </a:lnTo>
+                  <a:lnTo>
+                    <a:pt x="281377" y="278999"/>
+                  </a:lnTo>
+                  <a:lnTo>
+                    <a:pt x="211033" y="275684"/>
+                  </a:lnTo>
+                  <a:lnTo>
+                    <a:pt x="140688" y="272343"/>
+                  </a:lnTo>
+                  <a:lnTo>
+                    <a:pt x="70344" y="268975"/>
+                  </a:lnTo>
+                  <a:lnTo>
+                    <a:pt x="0" y="265579"/>
                   </a:lnTo>
                   <a:close/>
                 </a:path>
@@ -3670,643 +3705,318 @@
         </p:sp>
         <p:sp>
           <p:nvSpPr>
-            <p:cNvPr id="23" name="pl23"/>
-            <p:cNvSpPr/>
-            <p:nvPr/>
-          </p:nvSpPr>
-          <p:spPr>
-            <a:xfrm>
-              <a:off x="1172049" y="3645306"/>
-              <a:ext cx="7090630" cy="1381007"/>
-            </a:xfrm>
-            <a:custGeom>
-              <a:avLst/>
-              <a:pathLst>
-                <a:path w="7090630" h="1381007">
-                  <a:moveTo>
-                    <a:pt x="0" y="0"/>
-                  </a:moveTo>
-                  <a:lnTo>
-                    <a:pt x="71622" y="36387"/>
-                  </a:lnTo>
-                  <a:lnTo>
-                    <a:pt x="143245" y="72082"/>
-                  </a:lnTo>
-                  <a:lnTo>
-                    <a:pt x="214867" y="107098"/>
-                  </a:lnTo>
-                  <a:lnTo>
-                    <a:pt x="286490" y="141447"/>
-                  </a:lnTo>
-                  <a:lnTo>
-                    <a:pt x="358112" y="175143"/>
-                  </a:lnTo>
-                  <a:lnTo>
-                    <a:pt x="429735" y="208197"/>
-                  </a:lnTo>
-                  <a:lnTo>
-                    <a:pt x="501357" y="240622"/>
-                  </a:lnTo>
-                  <a:lnTo>
-                    <a:pt x="572980" y="272431"/>
-                  </a:lnTo>
-                  <a:lnTo>
-                    <a:pt x="644602" y="303633"/>
-                  </a:lnTo>
-                  <a:lnTo>
-                    <a:pt x="716225" y="334242"/>
-                  </a:lnTo>
-                  <a:lnTo>
-                    <a:pt x="787847" y="364269"/>
-                  </a:lnTo>
-                  <a:lnTo>
-                    <a:pt x="859470" y="393724"/>
-                  </a:lnTo>
-                  <a:lnTo>
-                    <a:pt x="931092" y="422618"/>
-                  </a:lnTo>
-                  <a:lnTo>
-                    <a:pt x="1002715" y="450962"/>
-                  </a:lnTo>
-                  <a:lnTo>
-                    <a:pt x="1074337" y="478767"/>
-                  </a:lnTo>
-                  <a:lnTo>
-                    <a:pt x="1145960" y="506043"/>
-                  </a:lnTo>
-                  <a:lnTo>
-                    <a:pt x="1217582" y="532800"/>
-                  </a:lnTo>
-                  <a:lnTo>
-                    <a:pt x="1289205" y="559047"/>
-                  </a:lnTo>
-                  <a:lnTo>
-                    <a:pt x="1360827" y="584795"/>
-                  </a:lnTo>
-                  <a:lnTo>
-                    <a:pt x="1432450" y="610053"/>
-                  </a:lnTo>
-                  <a:lnTo>
-                    <a:pt x="1504073" y="634830"/>
-                  </a:lnTo>
-                  <a:lnTo>
-                    <a:pt x="1575695" y="659136"/>
-                  </a:lnTo>
-                  <a:lnTo>
-                    <a:pt x="1647318" y="682979"/>
-                  </a:lnTo>
-                  <a:lnTo>
-                    <a:pt x="1718940" y="706369"/>
-                  </a:lnTo>
-                  <a:lnTo>
-                    <a:pt x="1790563" y="729313"/>
-                  </a:lnTo>
-                  <a:lnTo>
-                    <a:pt x="1862185" y="751820"/>
-                  </a:lnTo>
-                  <a:lnTo>
-                    <a:pt x="1933808" y="773899"/>
-                  </a:lnTo>
-                  <a:lnTo>
-                    <a:pt x="2005430" y="795558"/>
-                  </a:lnTo>
-                  <a:lnTo>
-                    <a:pt x="2077053" y="816805"/>
-                  </a:lnTo>
-                  <a:lnTo>
-                    <a:pt x="2148675" y="837647"/>
-                  </a:lnTo>
-                  <a:lnTo>
-                    <a:pt x="2220298" y="858093"/>
-                  </a:lnTo>
-                  <a:lnTo>
-                    <a:pt x="2291920" y="878150"/>
-                  </a:lnTo>
-                  <a:lnTo>
-                    <a:pt x="2363543" y="897825"/>
-                  </a:lnTo>
-                  <a:lnTo>
-                    <a:pt x="2435165" y="917125"/>
-                  </a:lnTo>
-                  <a:lnTo>
-                    <a:pt x="2506788" y="936058"/>
-                  </a:lnTo>
-                  <a:lnTo>
-                    <a:pt x="2578410" y="954631"/>
-                  </a:lnTo>
-                  <a:lnTo>
-                    <a:pt x="2650033" y="972850"/>
-                  </a:lnTo>
-                  <a:lnTo>
-                    <a:pt x="2721655" y="990723"/>
-                  </a:lnTo>
-                  <a:lnTo>
-                    <a:pt x="2793278" y="1008255"/>
-                  </a:lnTo>
-                  <a:lnTo>
-                    <a:pt x="2864901" y="1025454"/>
-                  </a:lnTo>
-                  <a:lnTo>
-                    <a:pt x="2936523" y="1042325"/>
-                  </a:lnTo>
-                  <a:lnTo>
-                    <a:pt x="3008146" y="1058876"/>
-                  </a:lnTo>
-                  <a:lnTo>
-                    <a:pt x="3079768" y="1075111"/>
-                  </a:lnTo>
-                  <a:lnTo>
-                    <a:pt x="3151391" y="1086068"/>
-                  </a:lnTo>
-                  <a:lnTo>
-                    <a:pt x="3223013" y="1092675"/>
-                  </a:lnTo>
-                  <a:lnTo>
-                    <a:pt x="3294636" y="1099230"/>
-                  </a:lnTo>
-                  <a:lnTo>
-                    <a:pt x="3366258" y="1105732"/>
-                  </a:lnTo>
-                  <a:lnTo>
-                    <a:pt x="3437881" y="1112182"/>
-                  </a:lnTo>
-                  <a:lnTo>
-                    <a:pt x="3509503" y="1118581"/>
-                  </a:lnTo>
-                  <a:lnTo>
-                    <a:pt x="3581126" y="1124928"/>
-                  </a:lnTo>
-                  <a:lnTo>
-                    <a:pt x="3652748" y="1131225"/>
-                  </a:lnTo>
-                  <a:lnTo>
-                    <a:pt x="3724371" y="1137471"/>
-                  </a:lnTo>
-                  <a:lnTo>
-                    <a:pt x="3795993" y="1143667"/>
-                  </a:lnTo>
-                  <a:lnTo>
-                    <a:pt x="3867616" y="1149814"/>
-                  </a:lnTo>
-                  <a:lnTo>
-                    <a:pt x="3939238" y="1155911"/>
-                  </a:lnTo>
-                  <a:lnTo>
-                    <a:pt x="4010861" y="1161960"/>
-                  </a:lnTo>
-                  <a:lnTo>
-                    <a:pt x="4082483" y="1167960"/>
-                  </a:lnTo>
-                  <a:lnTo>
-                    <a:pt x="4154106" y="1173912"/>
-                  </a:lnTo>
-                  <a:lnTo>
-                    <a:pt x="4225729" y="1179817"/>
-                  </a:lnTo>
-                  <a:lnTo>
-                    <a:pt x="4297351" y="1185674"/>
-                  </a:lnTo>
-                  <a:lnTo>
-                    <a:pt x="4368974" y="1191485"/>
-                  </a:lnTo>
-                  <a:lnTo>
-                    <a:pt x="4440596" y="1197249"/>
-                  </a:lnTo>
-                  <a:lnTo>
-                    <a:pt x="4512219" y="1202967"/>
-                  </a:lnTo>
-                  <a:lnTo>
-                    <a:pt x="4583841" y="1208639"/>
-                  </a:lnTo>
-                  <a:lnTo>
-                    <a:pt x="4655464" y="1214266"/>
-                  </a:lnTo>
-                  <a:lnTo>
-                    <a:pt x="4727086" y="1219848"/>
-                  </a:lnTo>
-                  <a:lnTo>
-                    <a:pt x="4798709" y="1225385"/>
-                  </a:lnTo>
-                  <a:lnTo>
-                    <a:pt x="4870331" y="1230878"/>
-                  </a:lnTo>
-                  <a:lnTo>
-                    <a:pt x="4941954" y="1236327"/>
-                  </a:lnTo>
-                  <a:lnTo>
-                    <a:pt x="5013576" y="1241732"/>
-                  </a:lnTo>
-                  <a:lnTo>
-                    <a:pt x="5085199" y="1247094"/>
-                  </a:lnTo>
-                  <a:lnTo>
-                    <a:pt x="5156821" y="1252414"/>
-                  </a:lnTo>
-                  <a:lnTo>
-                    <a:pt x="5228444" y="1257690"/>
-                  </a:lnTo>
-                  <a:lnTo>
-                    <a:pt x="5300066" y="1262925"/>
-                  </a:lnTo>
-                  <a:lnTo>
-                    <a:pt x="5371689" y="1268117"/>
-                  </a:lnTo>
-                  <a:lnTo>
-                    <a:pt x="5443311" y="1273268"/>
-                  </a:lnTo>
-                  <a:lnTo>
-                    <a:pt x="5514934" y="1278378"/>
-                  </a:lnTo>
-                  <a:lnTo>
-                    <a:pt x="5586557" y="1283447"/>
-                  </a:lnTo>
-                  <a:lnTo>
-                    <a:pt x="5658179" y="1288475"/>
-                  </a:lnTo>
-                  <a:lnTo>
-                    <a:pt x="5729802" y="1293463"/>
-                  </a:lnTo>
-                  <a:lnTo>
-                    <a:pt x="5801424" y="1298411"/>
-                  </a:lnTo>
-                  <a:lnTo>
-                    <a:pt x="5873047" y="1303320"/>
-                  </a:lnTo>
-                  <a:lnTo>
-                    <a:pt x="5944669" y="1308189"/>
-                  </a:lnTo>
-                  <a:lnTo>
-                    <a:pt x="6016292" y="1313020"/>
-                  </a:lnTo>
-                  <a:lnTo>
-                    <a:pt x="6087914" y="1317811"/>
-                  </a:lnTo>
-                  <a:lnTo>
-                    <a:pt x="6159537" y="1322565"/>
-                  </a:lnTo>
-                  <a:lnTo>
-                    <a:pt x="6231159" y="1327280"/>
-                  </a:lnTo>
-                  <a:lnTo>
-                    <a:pt x="6302782" y="1331958"/>
-                  </a:lnTo>
-                  <a:lnTo>
-                    <a:pt x="6374404" y="1336598"/>
-                  </a:lnTo>
-                  <a:lnTo>
-                    <a:pt x="6446027" y="1341201"/>
-                  </a:lnTo>
-                  <a:lnTo>
-                    <a:pt x="6517649" y="1345767"/>
-                  </a:lnTo>
-                  <a:lnTo>
-                    <a:pt x="6589272" y="1350297"/>
-                  </a:lnTo>
-                  <a:lnTo>
-                    <a:pt x="6660894" y="1354791"/>
-                  </a:lnTo>
-                  <a:lnTo>
-                    <a:pt x="6732517" y="1359248"/>
-                  </a:lnTo>
-                  <a:lnTo>
-                    <a:pt x="6804139" y="1363670"/>
-                  </a:lnTo>
-                  <a:lnTo>
-                    <a:pt x="6875762" y="1368057"/>
-                  </a:lnTo>
-                  <a:lnTo>
-                    <a:pt x="6947385" y="1372408"/>
-                  </a:lnTo>
-                  <a:lnTo>
-                    <a:pt x="7019007" y="1376725"/>
-                  </a:lnTo>
-                  <a:lnTo>
-                    <a:pt x="7090630" y="1381007"/>
-                  </a:lnTo>
-                </a:path>
-              </a:pathLst>
-            </a:custGeom>
-          </p:spPr>
-          <p:txBody>
-            <a:bodyPr/>
-            <a:lstStyle/>
-            <a:p/>
-          </p:txBody>
-        </p:sp>
-        <p:sp>
-          <p:nvSpPr>
             <p:cNvPr id="24" name="pl24"/>
             <p:cNvSpPr/>
             <p:nvPr/>
           </p:nvSpPr>
           <p:spPr>
             <a:xfrm>
-              <a:off x="1172049" y="4381237"/>
-              <a:ext cx="7090630" cy="890703"/>
+              <a:off x="1235312" y="2710319"/>
+              <a:ext cx="6964104" cy="498372"/>
             </a:xfrm>
             <a:custGeom>
               <a:avLst/>
               <a:pathLst>
-                <a:path w="7090630" h="890703">
+                <a:path w="6964104" h="498372">
                   <a:moveTo>
-                    <a:pt x="7090630" y="890703"/>
+                    <a:pt x="0" y="0"/>
                   </a:moveTo>
                   <a:lnTo>
-                    <a:pt x="7019007" y="885168"/>
-                  </a:lnTo>
-                  <a:lnTo>
-                    <a:pt x="6947385" y="879525"/>
-                  </a:lnTo>
-                  <a:lnTo>
-                    <a:pt x="6875762" y="873773"/>
-                  </a:lnTo>
-                  <a:lnTo>
-                    <a:pt x="6804139" y="867909"/>
-                  </a:lnTo>
-                  <a:lnTo>
-                    <a:pt x="6732517" y="861932"/>
-                  </a:lnTo>
-                  <a:lnTo>
-                    <a:pt x="6660894" y="855838"/>
-                  </a:lnTo>
-                  <a:lnTo>
-                    <a:pt x="6589272" y="849627"/>
-                  </a:lnTo>
-                  <a:lnTo>
-                    <a:pt x="6517649" y="843295"/>
-                  </a:lnTo>
-                  <a:lnTo>
-                    <a:pt x="6446027" y="836840"/>
-                  </a:lnTo>
-                  <a:lnTo>
-                    <a:pt x="6374404" y="830259"/>
-                  </a:lnTo>
-                  <a:lnTo>
-                    <a:pt x="6302782" y="823551"/>
-                  </a:lnTo>
-                  <a:lnTo>
-                    <a:pt x="6231159" y="816713"/>
-                  </a:lnTo>
-                  <a:lnTo>
-                    <a:pt x="6159537" y="809742"/>
-                  </a:lnTo>
-                  <a:lnTo>
-                    <a:pt x="6087914" y="802636"/>
-                  </a:lnTo>
-                  <a:lnTo>
-                    <a:pt x="6016292" y="795393"/>
-                  </a:lnTo>
-                  <a:lnTo>
-                    <a:pt x="5944669" y="788008"/>
-                  </a:lnTo>
-                  <a:lnTo>
-                    <a:pt x="5873047" y="780481"/>
-                  </a:lnTo>
-                  <a:lnTo>
-                    <a:pt x="5801424" y="772807"/>
-                  </a:lnTo>
-                  <a:lnTo>
-                    <a:pt x="5729802" y="764984"/>
-                  </a:lnTo>
-                  <a:lnTo>
-                    <a:pt x="5658179" y="757010"/>
-                  </a:lnTo>
-                  <a:lnTo>
-                    <a:pt x="5586557" y="748881"/>
-                  </a:lnTo>
-                  <a:lnTo>
-                    <a:pt x="5514934" y="740594"/>
-                  </a:lnTo>
-                  <a:lnTo>
-                    <a:pt x="5443311" y="732147"/>
-                  </a:lnTo>
-                  <a:lnTo>
-                    <a:pt x="5371689" y="723535"/>
-                  </a:lnTo>
-                  <a:lnTo>
-                    <a:pt x="5300066" y="714757"/>
-                  </a:lnTo>
-                  <a:lnTo>
-                    <a:pt x="5228444" y="705808"/>
-                  </a:lnTo>
-                  <a:lnTo>
-                    <a:pt x="5156821" y="696685"/>
-                  </a:lnTo>
-                  <a:lnTo>
-                    <a:pt x="5085199" y="687386"/>
-                  </a:lnTo>
-                  <a:lnTo>
-                    <a:pt x="5013576" y="677906"/>
-                  </a:lnTo>
-                  <a:lnTo>
-                    <a:pt x="4941954" y="668242"/>
-                  </a:lnTo>
-                  <a:lnTo>
-                    <a:pt x="4870331" y="658391"/>
-                  </a:lnTo>
-                  <a:lnTo>
-                    <a:pt x="4798709" y="648349"/>
-                  </a:lnTo>
-                  <a:lnTo>
-                    <a:pt x="4727086" y="638112"/>
-                  </a:lnTo>
-                  <a:lnTo>
-                    <a:pt x="4655464" y="627676"/>
-                  </a:lnTo>
-                  <a:lnTo>
-                    <a:pt x="4583841" y="617038"/>
-                  </a:lnTo>
-                  <a:lnTo>
-                    <a:pt x="4512219" y="606193"/>
-                  </a:lnTo>
-                  <a:lnTo>
-                    <a:pt x="4440596" y="595138"/>
-                  </a:lnTo>
-                  <a:lnTo>
-                    <a:pt x="4368974" y="583868"/>
-                  </a:lnTo>
-                  <a:lnTo>
-                    <a:pt x="4297351" y="572380"/>
-                  </a:lnTo>
-                  <a:lnTo>
-                    <a:pt x="4225729" y="560669"/>
-                  </a:lnTo>
-                  <a:lnTo>
-                    <a:pt x="4154106" y="548731"/>
-                  </a:lnTo>
-                  <a:lnTo>
-                    <a:pt x="4082483" y="536561"/>
-                  </a:lnTo>
-                  <a:lnTo>
-                    <a:pt x="4010861" y="524155"/>
-                  </a:lnTo>
-                  <a:lnTo>
-                    <a:pt x="3939238" y="511508"/>
-                  </a:lnTo>
-                  <a:lnTo>
-                    <a:pt x="3867616" y="498616"/>
-                  </a:lnTo>
-                  <a:lnTo>
-                    <a:pt x="3795993" y="485474"/>
-                  </a:lnTo>
-                  <a:lnTo>
-                    <a:pt x="3724371" y="472077"/>
-                  </a:lnTo>
-                  <a:lnTo>
-                    <a:pt x="3652748" y="458420"/>
-                  </a:lnTo>
-                  <a:lnTo>
-                    <a:pt x="3581126" y="444498"/>
-                  </a:lnTo>
-                  <a:lnTo>
-                    <a:pt x="3509503" y="430306"/>
-                  </a:lnTo>
-                  <a:lnTo>
-                    <a:pt x="3437881" y="415839"/>
-                  </a:lnTo>
-                  <a:lnTo>
-                    <a:pt x="3366258" y="401090"/>
-                  </a:lnTo>
-                  <a:lnTo>
-                    <a:pt x="3294636" y="386056"/>
-                  </a:lnTo>
-                  <a:lnTo>
-                    <a:pt x="3223013" y="370730"/>
-                  </a:lnTo>
-                  <a:lnTo>
-                    <a:pt x="3151391" y="355107"/>
-                  </a:lnTo>
-                  <a:lnTo>
-                    <a:pt x="3079768" y="343477"/>
-                  </a:lnTo>
-                  <a:lnTo>
-                    <a:pt x="3008146" y="336762"/>
-                  </a:lnTo>
-                  <a:lnTo>
-                    <a:pt x="2936523" y="329993"/>
-                  </a:lnTo>
-                  <a:lnTo>
-                    <a:pt x="2864901" y="323170"/>
-                  </a:lnTo>
-                  <a:lnTo>
-                    <a:pt x="2793278" y="316292"/>
-                  </a:lnTo>
-                  <a:lnTo>
-                    <a:pt x="2721655" y="309358"/>
-                  </a:lnTo>
-                  <a:lnTo>
-                    <a:pt x="2650033" y="302368"/>
-                  </a:lnTo>
-                  <a:lnTo>
-                    <a:pt x="2578410" y="295322"/>
-                  </a:lnTo>
-                  <a:lnTo>
-                    <a:pt x="2506788" y="288220"/>
-                  </a:lnTo>
-                  <a:lnTo>
-                    <a:pt x="2435165" y="281059"/>
-                  </a:lnTo>
-                  <a:lnTo>
-                    <a:pt x="2363543" y="273842"/>
-                  </a:lnTo>
-                  <a:lnTo>
-                    <a:pt x="2291920" y="266565"/>
-                  </a:lnTo>
-                  <a:lnTo>
-                    <a:pt x="2220298" y="259231"/>
-                  </a:lnTo>
-                  <a:lnTo>
-                    <a:pt x="2148675" y="251837"/>
-                  </a:lnTo>
-                  <a:lnTo>
-                    <a:pt x="2077053" y="244383"/>
-                  </a:lnTo>
-                  <a:lnTo>
-                    <a:pt x="2005430" y="236869"/>
-                  </a:lnTo>
-                  <a:lnTo>
-                    <a:pt x="1933808" y="229295"/>
-                  </a:lnTo>
-                  <a:lnTo>
-                    <a:pt x="1862185" y="221660"/>
-                  </a:lnTo>
-                  <a:lnTo>
-                    <a:pt x="1790563" y="213963"/>
-                  </a:lnTo>
-                  <a:lnTo>
-                    <a:pt x="1718940" y="206204"/>
-                  </a:lnTo>
-                  <a:lnTo>
-                    <a:pt x="1647318" y="198382"/>
-                  </a:lnTo>
-                  <a:lnTo>
-                    <a:pt x="1575695" y="190497"/>
-                  </a:lnTo>
-                  <a:lnTo>
-                    <a:pt x="1504073" y="182549"/>
-                  </a:lnTo>
-                  <a:lnTo>
-                    <a:pt x="1432450" y="174537"/>
-                  </a:lnTo>
-                  <a:lnTo>
-                    <a:pt x="1360827" y="166460"/>
-                  </a:lnTo>
-                  <a:lnTo>
-                    <a:pt x="1289205" y="158318"/>
-                  </a:lnTo>
-                  <a:lnTo>
-                    <a:pt x="1217582" y="150110"/>
-                  </a:lnTo>
-                  <a:lnTo>
-                    <a:pt x="1145960" y="141836"/>
-                  </a:lnTo>
-                  <a:lnTo>
-                    <a:pt x="1074337" y="133495"/>
-                  </a:lnTo>
-                  <a:lnTo>
-                    <a:pt x="1002715" y="125087"/>
-                  </a:lnTo>
-                  <a:lnTo>
-                    <a:pt x="931092" y="116611"/>
-                  </a:lnTo>
-                  <a:lnTo>
-                    <a:pt x="859470" y="108067"/>
-                  </a:lnTo>
-                  <a:lnTo>
-                    <a:pt x="787847" y="99454"/>
-                  </a:lnTo>
-                  <a:lnTo>
-                    <a:pt x="716225" y="90771"/>
-                  </a:lnTo>
-                  <a:lnTo>
-                    <a:pt x="644602" y="82019"/>
-                  </a:lnTo>
-                  <a:lnTo>
-                    <a:pt x="572980" y="73196"/>
-                  </a:lnTo>
-                  <a:lnTo>
-                    <a:pt x="501357" y="64301"/>
-                  </a:lnTo>
-                  <a:lnTo>
-                    <a:pt x="429735" y="55335"/>
-                  </a:lnTo>
-                  <a:lnTo>
-                    <a:pt x="358112" y="46297"/>
-                  </a:lnTo>
-                  <a:lnTo>
-                    <a:pt x="286490" y="37185"/>
-                  </a:lnTo>
-                  <a:lnTo>
-                    <a:pt x="214867" y="28001"/>
-                  </a:lnTo>
-                  <a:lnTo>
-                    <a:pt x="143245" y="18742"/>
-                  </a:lnTo>
-                  <a:lnTo>
-                    <a:pt x="71622" y="9408"/>
-                  </a:lnTo>
-                  <a:lnTo>
-                    <a:pt x="0" y="0"/>
+                    <a:pt x="70344" y="13131"/>
+                  </a:lnTo>
+                  <a:lnTo>
+                    <a:pt x="140688" y="26012"/>
+                  </a:lnTo>
+                  <a:lnTo>
+                    <a:pt x="211033" y="38649"/>
+                  </a:lnTo>
+                  <a:lnTo>
+                    <a:pt x="281377" y="51045"/>
+                  </a:lnTo>
+                  <a:lnTo>
+                    <a:pt x="351722" y="63205"/>
+                  </a:lnTo>
+                  <a:lnTo>
+                    <a:pt x="422066" y="75133"/>
+                  </a:lnTo>
+                  <a:lnTo>
+                    <a:pt x="492411" y="86835"/>
+                  </a:lnTo>
+                  <a:lnTo>
+                    <a:pt x="562755" y="98313"/>
+                  </a:lnTo>
+                  <a:lnTo>
+                    <a:pt x="633100" y="109574"/>
+                  </a:lnTo>
+                  <a:lnTo>
+                    <a:pt x="703444" y="120620"/>
+                  </a:lnTo>
+                  <a:lnTo>
+                    <a:pt x="773789" y="131456"/>
+                  </a:lnTo>
+                  <a:lnTo>
+                    <a:pt x="844133" y="142085"/>
+                  </a:lnTo>
+                  <a:lnTo>
+                    <a:pt x="914478" y="152513"/>
+                  </a:lnTo>
+                  <a:lnTo>
+                    <a:pt x="984822" y="162741"/>
+                  </a:lnTo>
+                  <a:lnTo>
+                    <a:pt x="1055167" y="172776"/>
+                  </a:lnTo>
+                  <a:lnTo>
+                    <a:pt x="1125511" y="182619"/>
+                  </a:lnTo>
+                  <a:lnTo>
+                    <a:pt x="1195856" y="192275"/>
+                  </a:lnTo>
+                  <a:lnTo>
+                    <a:pt x="1266200" y="201747"/>
+                  </a:lnTo>
+                  <a:lnTo>
+                    <a:pt x="1336545" y="211039"/>
+                  </a:lnTo>
+                  <a:lnTo>
+                    <a:pt x="1406889" y="220154"/>
+                  </a:lnTo>
+                  <a:lnTo>
+                    <a:pt x="1477234" y="229095"/>
+                  </a:lnTo>
+                  <a:lnTo>
+                    <a:pt x="1547578" y="237866"/>
+                  </a:lnTo>
+                  <a:lnTo>
+                    <a:pt x="1617923" y="246471"/>
+                  </a:lnTo>
+                  <a:lnTo>
+                    <a:pt x="1688267" y="254911"/>
+                  </a:lnTo>
+                  <a:lnTo>
+                    <a:pt x="1758612" y="263191"/>
+                  </a:lnTo>
+                  <a:lnTo>
+                    <a:pt x="1828956" y="271314"/>
+                  </a:lnTo>
+                  <a:lnTo>
+                    <a:pt x="1899301" y="279282"/>
+                  </a:lnTo>
+                  <a:lnTo>
+                    <a:pt x="1969645" y="287098"/>
+                  </a:lnTo>
+                  <a:lnTo>
+                    <a:pt x="2039990" y="294765"/>
+                  </a:lnTo>
+                  <a:lnTo>
+                    <a:pt x="2110334" y="302287"/>
+                  </a:lnTo>
+                  <a:lnTo>
+                    <a:pt x="2180679" y="309665"/>
+                  </a:lnTo>
+                  <a:lnTo>
+                    <a:pt x="2251023" y="316903"/>
+                  </a:lnTo>
+                  <a:lnTo>
+                    <a:pt x="2321368" y="324003"/>
+                  </a:lnTo>
+                  <a:lnTo>
+                    <a:pt x="2391712" y="330969"/>
+                  </a:lnTo>
+                  <a:lnTo>
+                    <a:pt x="2462057" y="337801"/>
+                  </a:lnTo>
+                  <a:lnTo>
+                    <a:pt x="2532401" y="344504"/>
+                  </a:lnTo>
+                  <a:lnTo>
+                    <a:pt x="2602746" y="351078"/>
+                  </a:lnTo>
+                  <a:lnTo>
+                    <a:pt x="2673090" y="357528"/>
+                  </a:lnTo>
+                  <a:lnTo>
+                    <a:pt x="2743435" y="363855"/>
+                  </a:lnTo>
+                  <a:lnTo>
+                    <a:pt x="2813779" y="370062"/>
+                  </a:lnTo>
+                  <a:lnTo>
+                    <a:pt x="2884124" y="376150"/>
+                  </a:lnTo>
+                  <a:lnTo>
+                    <a:pt x="2954468" y="382123"/>
+                  </a:lnTo>
+                  <a:lnTo>
+                    <a:pt x="3024813" y="387982"/>
+                  </a:lnTo>
+                  <a:lnTo>
+                    <a:pt x="3095157" y="391936"/>
+                  </a:lnTo>
+                  <a:lnTo>
+                    <a:pt x="3165502" y="394320"/>
+                  </a:lnTo>
+                  <a:lnTo>
+                    <a:pt x="3235846" y="396686"/>
+                  </a:lnTo>
+                  <a:lnTo>
+                    <a:pt x="3306191" y="399032"/>
+                  </a:lnTo>
+                  <a:lnTo>
+                    <a:pt x="3376535" y="401360"/>
+                  </a:lnTo>
+                  <a:lnTo>
+                    <a:pt x="3446880" y="403669"/>
+                  </a:lnTo>
+                  <a:lnTo>
+                    <a:pt x="3517224" y="405960"/>
+                  </a:lnTo>
+                  <a:lnTo>
+                    <a:pt x="3587569" y="408232"/>
+                  </a:lnTo>
+                  <a:lnTo>
+                    <a:pt x="3657913" y="410486"/>
+                  </a:lnTo>
+                  <a:lnTo>
+                    <a:pt x="3728257" y="412722"/>
+                  </a:lnTo>
+                  <a:lnTo>
+                    <a:pt x="3798602" y="414940"/>
+                  </a:lnTo>
+                  <a:lnTo>
+                    <a:pt x="3868946" y="417141"/>
+                  </a:lnTo>
+                  <a:lnTo>
+                    <a:pt x="3939291" y="419324"/>
+                  </a:lnTo>
+                  <a:lnTo>
+                    <a:pt x="4009635" y="421489"/>
+                  </a:lnTo>
+                  <a:lnTo>
+                    <a:pt x="4079980" y="423637"/>
+                  </a:lnTo>
+                  <a:lnTo>
+                    <a:pt x="4150324" y="425768"/>
+                  </a:lnTo>
+                  <a:lnTo>
+                    <a:pt x="4220669" y="427882"/>
+                  </a:lnTo>
+                  <a:lnTo>
+                    <a:pt x="4291013" y="429979"/>
+                  </a:lnTo>
+                  <a:lnTo>
+                    <a:pt x="4361358" y="432059"/>
+                  </a:lnTo>
+                  <a:lnTo>
+                    <a:pt x="4431702" y="434122"/>
+                  </a:lnTo>
+                  <a:lnTo>
+                    <a:pt x="4502047" y="436169"/>
+                  </a:lnTo>
+                  <a:lnTo>
+                    <a:pt x="4572391" y="438200"/>
+                  </a:lnTo>
+                  <a:lnTo>
+                    <a:pt x="4642736" y="440214"/>
+                  </a:lnTo>
+                  <a:lnTo>
+                    <a:pt x="4713080" y="442212"/>
+                  </a:lnTo>
+                  <a:lnTo>
+                    <a:pt x="4783425" y="444195"/>
+                  </a:lnTo>
+                  <a:lnTo>
+                    <a:pt x="4853769" y="446161"/>
+                  </a:lnTo>
+                  <a:lnTo>
+                    <a:pt x="4924114" y="448112"/>
+                  </a:lnTo>
+                  <a:lnTo>
+                    <a:pt x="4994458" y="450047"/>
+                  </a:lnTo>
+                  <a:lnTo>
+                    <a:pt x="5064803" y="451966"/>
+                  </a:lnTo>
+                  <a:lnTo>
+                    <a:pt x="5135147" y="453870"/>
+                  </a:lnTo>
+                  <a:lnTo>
+                    <a:pt x="5205492" y="455759"/>
+                  </a:lnTo>
+                  <a:lnTo>
+                    <a:pt x="5275836" y="457633"/>
+                  </a:lnTo>
+                  <a:lnTo>
+                    <a:pt x="5346181" y="459492"/>
+                  </a:lnTo>
+                  <a:lnTo>
+                    <a:pt x="5416525" y="461336"/>
+                  </a:lnTo>
+                  <a:lnTo>
+                    <a:pt x="5486870" y="463165"/>
+                  </a:lnTo>
+                  <a:lnTo>
+                    <a:pt x="5557214" y="464980"/>
+                  </a:lnTo>
+                  <a:lnTo>
+                    <a:pt x="5627559" y="466780"/>
+                  </a:lnTo>
+                  <a:lnTo>
+                    <a:pt x="5697903" y="468566"/>
+                  </a:lnTo>
+                  <a:lnTo>
+                    <a:pt x="5768248" y="470337"/>
+                  </a:lnTo>
+                  <a:lnTo>
+                    <a:pt x="5838592" y="472094"/>
+                  </a:lnTo>
+                  <a:lnTo>
+                    <a:pt x="5908937" y="473838"/>
+                  </a:lnTo>
+                  <a:lnTo>
+                    <a:pt x="5979281" y="475567"/>
+                  </a:lnTo>
+                  <a:lnTo>
+                    <a:pt x="6049626" y="477282"/>
+                  </a:lnTo>
+                  <a:lnTo>
+                    <a:pt x="6119970" y="478984"/>
+                  </a:lnTo>
+                  <a:lnTo>
+                    <a:pt x="6190315" y="480672"/>
+                  </a:lnTo>
+                  <a:lnTo>
+                    <a:pt x="6260659" y="482346"/>
+                  </a:lnTo>
+                  <a:lnTo>
+                    <a:pt x="6331004" y="484008"/>
+                  </a:lnTo>
+                  <a:lnTo>
+                    <a:pt x="6401348" y="485655"/>
+                  </a:lnTo>
+                  <a:lnTo>
+                    <a:pt x="6471693" y="487290"/>
+                  </a:lnTo>
+                  <a:lnTo>
+                    <a:pt x="6542037" y="488912"/>
+                  </a:lnTo>
+                  <a:lnTo>
+                    <a:pt x="6612382" y="490520"/>
+                  </a:lnTo>
+                  <a:lnTo>
+                    <a:pt x="6682726" y="492116"/>
+                  </a:lnTo>
+                  <a:lnTo>
+                    <a:pt x="6753071" y="493699"/>
+                  </a:lnTo>
+                  <a:lnTo>
+                    <a:pt x="6823415" y="495269"/>
+                  </a:lnTo>
+                  <a:lnTo>
+                    <a:pt x="6893760" y="496827"/>
+                  </a:lnTo>
+                  <a:lnTo>
+                    <a:pt x="6964104" y="498372"/>
                   </a:lnTo>
                 </a:path>
               </a:pathLst>
@@ -4326,312 +4036,637 @@
           </p:nvSpPr>
           <p:spPr>
             <a:xfrm>
-              <a:off x="1172049" y="4057760"/>
-              <a:ext cx="7090630" cy="1110284"/>
+              <a:off x="1235312" y="2975899"/>
+              <a:ext cx="6964104" cy="321434"/>
             </a:xfrm>
             <a:custGeom>
               <a:avLst/>
               <a:pathLst>
-                <a:path w="7090630" h="1110284">
+                <a:path w="6964104" h="321434">
+                  <a:moveTo>
+                    <a:pt x="6964104" y="321434"/>
+                  </a:moveTo>
+                  <a:lnTo>
+                    <a:pt x="6893760" y="319436"/>
+                  </a:lnTo>
+                  <a:lnTo>
+                    <a:pt x="6823415" y="317400"/>
+                  </a:lnTo>
+                  <a:lnTo>
+                    <a:pt x="6753071" y="315324"/>
+                  </a:lnTo>
+                  <a:lnTo>
+                    <a:pt x="6682726" y="313208"/>
+                  </a:lnTo>
+                  <a:lnTo>
+                    <a:pt x="6612382" y="311051"/>
+                  </a:lnTo>
+                  <a:lnTo>
+                    <a:pt x="6542037" y="308852"/>
+                  </a:lnTo>
+                  <a:lnTo>
+                    <a:pt x="6471693" y="306610"/>
+                  </a:lnTo>
+                  <a:lnTo>
+                    <a:pt x="6401348" y="304325"/>
+                  </a:lnTo>
+                  <a:lnTo>
+                    <a:pt x="6331004" y="301995"/>
+                  </a:lnTo>
+                  <a:lnTo>
+                    <a:pt x="6260659" y="299621"/>
+                  </a:lnTo>
+                  <a:lnTo>
+                    <a:pt x="6190315" y="297200"/>
+                  </a:lnTo>
+                  <a:lnTo>
+                    <a:pt x="6119970" y="294732"/>
+                  </a:lnTo>
+                  <a:lnTo>
+                    <a:pt x="6049626" y="292217"/>
+                  </a:lnTo>
+                  <a:lnTo>
+                    <a:pt x="5979281" y="289652"/>
+                  </a:lnTo>
+                  <a:lnTo>
+                    <a:pt x="5908937" y="287038"/>
+                  </a:lnTo>
+                  <a:lnTo>
+                    <a:pt x="5838592" y="284373"/>
+                  </a:lnTo>
+                  <a:lnTo>
+                    <a:pt x="5768248" y="281657"/>
+                  </a:lnTo>
+                  <a:lnTo>
+                    <a:pt x="5697903" y="278887"/>
+                  </a:lnTo>
+                  <a:lnTo>
+                    <a:pt x="5627559" y="276065"/>
+                  </a:lnTo>
+                  <a:lnTo>
+                    <a:pt x="5557214" y="273187"/>
+                  </a:lnTo>
+                  <a:lnTo>
+                    <a:pt x="5486870" y="270253"/>
+                  </a:lnTo>
+                  <a:lnTo>
+                    <a:pt x="5416525" y="267263"/>
+                  </a:lnTo>
+                  <a:lnTo>
+                    <a:pt x="5346181" y="264214"/>
+                  </a:lnTo>
+                  <a:lnTo>
+                    <a:pt x="5275836" y="261106"/>
+                  </a:lnTo>
+                  <a:lnTo>
+                    <a:pt x="5205492" y="257939"/>
+                  </a:lnTo>
+                  <a:lnTo>
+                    <a:pt x="5135147" y="254709"/>
+                  </a:lnTo>
+                  <a:lnTo>
+                    <a:pt x="5064803" y="251417"/>
+                  </a:lnTo>
+                  <a:lnTo>
+                    <a:pt x="4994458" y="248061"/>
+                  </a:lnTo>
+                  <a:lnTo>
+                    <a:pt x="4924114" y="244640"/>
+                  </a:lnTo>
+                  <a:lnTo>
+                    <a:pt x="4853769" y="241153"/>
+                  </a:lnTo>
+                  <a:lnTo>
+                    <a:pt x="4783425" y="237598"/>
+                  </a:lnTo>
+                  <a:lnTo>
+                    <a:pt x="4713080" y="233974"/>
+                  </a:lnTo>
+                  <a:lnTo>
+                    <a:pt x="4642736" y="230279"/>
+                  </a:lnTo>
+                  <a:lnTo>
+                    <a:pt x="4572391" y="226513"/>
+                  </a:lnTo>
+                  <a:lnTo>
+                    <a:pt x="4502047" y="222674"/>
+                  </a:lnTo>
+                  <a:lnTo>
+                    <a:pt x="4431702" y="218760"/>
+                  </a:lnTo>
+                  <a:lnTo>
+                    <a:pt x="4361358" y="214771"/>
+                  </a:lnTo>
+                  <a:lnTo>
+                    <a:pt x="4291013" y="210704"/>
+                  </a:lnTo>
+                  <a:lnTo>
+                    <a:pt x="4220669" y="206558"/>
+                  </a:lnTo>
+                  <a:lnTo>
+                    <a:pt x="4150324" y="202332"/>
+                  </a:lnTo>
+                  <a:lnTo>
+                    <a:pt x="4079980" y="198024"/>
+                  </a:lnTo>
+                  <a:lnTo>
+                    <a:pt x="4009635" y="193632"/>
+                  </a:lnTo>
+                  <a:lnTo>
+                    <a:pt x="3939291" y="189155"/>
+                  </a:lnTo>
+                  <a:lnTo>
+                    <a:pt x="3868946" y="184591"/>
+                  </a:lnTo>
+                  <a:lnTo>
+                    <a:pt x="3798602" y="179939"/>
+                  </a:lnTo>
+                  <a:lnTo>
+                    <a:pt x="3728257" y="175196"/>
+                  </a:lnTo>
+                  <a:lnTo>
+                    <a:pt x="3657913" y="170361"/>
+                  </a:lnTo>
+                  <a:lnTo>
+                    <a:pt x="3587569" y="165433"/>
+                  </a:lnTo>
+                  <a:lnTo>
+                    <a:pt x="3517224" y="160409"/>
+                  </a:lnTo>
+                  <a:lnTo>
+                    <a:pt x="3446880" y="155287"/>
+                  </a:lnTo>
+                  <a:lnTo>
+                    <a:pt x="3376535" y="150066"/>
+                  </a:lnTo>
+                  <a:lnTo>
+                    <a:pt x="3306191" y="144744"/>
+                  </a:lnTo>
+                  <a:lnTo>
+                    <a:pt x="3235846" y="139318"/>
+                  </a:lnTo>
+                  <a:lnTo>
+                    <a:pt x="3165502" y="133788"/>
+                  </a:lnTo>
+                  <a:lnTo>
+                    <a:pt x="3095157" y="128149"/>
+                  </a:lnTo>
+                  <a:lnTo>
+                    <a:pt x="3024813" y="123952"/>
+                  </a:lnTo>
+                  <a:lnTo>
+                    <a:pt x="2954468" y="121529"/>
+                  </a:lnTo>
+                  <a:lnTo>
+                    <a:pt x="2884124" y="119087"/>
+                  </a:lnTo>
+                  <a:lnTo>
+                    <a:pt x="2813779" y="116624"/>
+                  </a:lnTo>
+                  <a:lnTo>
+                    <a:pt x="2743435" y="114142"/>
+                  </a:lnTo>
+                  <a:lnTo>
+                    <a:pt x="2673090" y="111640"/>
+                  </a:lnTo>
+                  <a:lnTo>
+                    <a:pt x="2602746" y="109117"/>
+                  </a:lnTo>
+                  <a:lnTo>
+                    <a:pt x="2532401" y="106575"/>
+                  </a:lnTo>
+                  <a:lnTo>
+                    <a:pt x="2462057" y="104011"/>
+                  </a:lnTo>
+                  <a:lnTo>
+                    <a:pt x="2391712" y="101427"/>
+                  </a:lnTo>
+                  <a:lnTo>
+                    <a:pt x="2321368" y="98823"/>
+                  </a:lnTo>
+                  <a:lnTo>
+                    <a:pt x="2251023" y="96197"/>
+                  </a:lnTo>
+                  <a:lnTo>
+                    <a:pt x="2180679" y="93550"/>
+                  </a:lnTo>
+                  <a:lnTo>
+                    <a:pt x="2110334" y="90882"/>
+                  </a:lnTo>
+                  <a:lnTo>
+                    <a:pt x="2039990" y="88192"/>
+                  </a:lnTo>
+                  <a:lnTo>
+                    <a:pt x="1969645" y="85480"/>
+                  </a:lnTo>
+                  <a:lnTo>
+                    <a:pt x="1899301" y="82747"/>
+                  </a:lnTo>
+                  <a:lnTo>
+                    <a:pt x="1828956" y="79991"/>
+                  </a:lnTo>
+                  <a:lnTo>
+                    <a:pt x="1758612" y="77214"/>
+                  </a:lnTo>
+                  <a:lnTo>
+                    <a:pt x="1688267" y="74414"/>
+                  </a:lnTo>
+                  <a:lnTo>
+                    <a:pt x="1617923" y="71591"/>
+                  </a:lnTo>
+                  <a:lnTo>
+                    <a:pt x="1547578" y="68746"/>
+                  </a:lnTo>
+                  <a:lnTo>
+                    <a:pt x="1477234" y="65877"/>
+                  </a:lnTo>
+                  <a:lnTo>
+                    <a:pt x="1406889" y="62986"/>
+                  </a:lnTo>
+                  <a:lnTo>
+                    <a:pt x="1336545" y="60071"/>
+                  </a:lnTo>
+                  <a:lnTo>
+                    <a:pt x="1266200" y="57133"/>
+                  </a:lnTo>
+                  <a:lnTo>
+                    <a:pt x="1195856" y="54171"/>
+                  </a:lnTo>
+                  <a:lnTo>
+                    <a:pt x="1125511" y="51185"/>
+                  </a:lnTo>
+                  <a:lnTo>
+                    <a:pt x="1055167" y="48175"/>
+                  </a:lnTo>
+                  <a:lnTo>
+                    <a:pt x="984822" y="45141"/>
+                  </a:lnTo>
+                  <a:lnTo>
+                    <a:pt x="914478" y="42082"/>
+                  </a:lnTo>
+                  <a:lnTo>
+                    <a:pt x="844133" y="38998"/>
+                  </a:lnTo>
+                  <a:lnTo>
+                    <a:pt x="773789" y="35890"/>
+                  </a:lnTo>
+                  <a:lnTo>
+                    <a:pt x="703444" y="32757"/>
+                  </a:lnTo>
+                  <a:lnTo>
+                    <a:pt x="633100" y="29598"/>
+                  </a:lnTo>
+                  <a:lnTo>
+                    <a:pt x="562755" y="26414"/>
+                  </a:lnTo>
+                  <a:lnTo>
+                    <a:pt x="492411" y="23204"/>
+                  </a:lnTo>
+                  <a:lnTo>
+                    <a:pt x="422066" y="19969"/>
+                  </a:lnTo>
+                  <a:lnTo>
+                    <a:pt x="351722" y="16707"/>
+                  </a:lnTo>
+                  <a:lnTo>
+                    <a:pt x="281377" y="13419"/>
+                  </a:lnTo>
+                  <a:lnTo>
+                    <a:pt x="211033" y="10104"/>
+                  </a:lnTo>
+                  <a:lnTo>
+                    <a:pt x="140688" y="6763"/>
+                  </a:lnTo>
+                  <a:lnTo>
+                    <a:pt x="70344" y="3395"/>
+                  </a:lnTo>
+                  <a:lnTo>
+                    <a:pt x="0" y="0"/>
+                  </a:lnTo>
+                </a:path>
+              </a:pathLst>
+            </a:custGeom>
+          </p:spPr>
+          <p:txBody>
+            <a:bodyPr/>
+            <a:lstStyle/>
+            <a:p/>
+          </p:txBody>
+        </p:sp>
+        <p:sp>
+          <p:nvSpPr>
+            <p:cNvPr id="26" name="pl26"/>
+            <p:cNvSpPr/>
+            <p:nvPr/>
+          </p:nvSpPr>
+          <p:spPr>
+            <a:xfrm>
+              <a:off x="1235312" y="2859163"/>
+              <a:ext cx="6964104" cy="400675"/>
+            </a:xfrm>
+            <a:custGeom>
+              <a:avLst/>
+              <a:pathLst>
+                <a:path w="6964104" h="400675">
                   <a:moveTo>
                     <a:pt x="0" y="0"/>
                   </a:moveTo>
                   <a:lnTo>
-                    <a:pt x="71622" y="20290"/>
-                  </a:lnTo>
-                  <a:lnTo>
-                    <a:pt x="143245" y="40306"/>
-                  </a:lnTo>
-                  <a:lnTo>
-                    <a:pt x="214867" y="60051"/>
-                  </a:lnTo>
-                  <a:lnTo>
-                    <a:pt x="286490" y="79529"/>
-                  </a:lnTo>
-                  <a:lnTo>
-                    <a:pt x="358112" y="98743"/>
-                  </a:lnTo>
-                  <a:lnTo>
-                    <a:pt x="429735" y="117697"/>
-                  </a:lnTo>
-                  <a:lnTo>
-                    <a:pt x="501357" y="136395"/>
-                  </a:lnTo>
-                  <a:lnTo>
-                    <a:pt x="572980" y="154840"/>
-                  </a:lnTo>
-                  <a:lnTo>
-                    <a:pt x="644602" y="173035"/>
-                  </a:lnTo>
-                  <a:lnTo>
-                    <a:pt x="716225" y="190984"/>
-                  </a:lnTo>
-                  <a:lnTo>
-                    <a:pt x="787847" y="208690"/>
-                  </a:lnTo>
-                  <a:lnTo>
-                    <a:pt x="859470" y="226157"/>
-                  </a:lnTo>
-                  <a:lnTo>
-                    <a:pt x="931092" y="243387"/>
-                  </a:lnTo>
-                  <a:lnTo>
-                    <a:pt x="1002715" y="260384"/>
-                  </a:lnTo>
-                  <a:lnTo>
-                    <a:pt x="1074337" y="277151"/>
-                  </a:lnTo>
-                  <a:lnTo>
-                    <a:pt x="1145960" y="293691"/>
-                  </a:lnTo>
-                  <a:lnTo>
-                    <a:pt x="1217582" y="310008"/>
-                  </a:lnTo>
-                  <a:lnTo>
-                    <a:pt x="1289205" y="326103"/>
-                  </a:lnTo>
-                  <a:lnTo>
-                    <a:pt x="1360827" y="341981"/>
-                  </a:lnTo>
-                  <a:lnTo>
-                    <a:pt x="1432450" y="357644"/>
-                  </a:lnTo>
-                  <a:lnTo>
-                    <a:pt x="1504073" y="373095"/>
-                  </a:lnTo>
-                  <a:lnTo>
-                    <a:pt x="1575695" y="388337"/>
-                  </a:lnTo>
-                  <a:lnTo>
-                    <a:pt x="1647318" y="403373"/>
-                  </a:lnTo>
-                  <a:lnTo>
-                    <a:pt x="1718940" y="418205"/>
-                  </a:lnTo>
-                  <a:lnTo>
-                    <a:pt x="1790563" y="432836"/>
-                  </a:lnTo>
-                  <a:lnTo>
-                    <a:pt x="1862185" y="447270"/>
-                  </a:lnTo>
-                  <a:lnTo>
-                    <a:pt x="1933808" y="461508"/>
-                  </a:lnTo>
-                  <a:lnTo>
-                    <a:pt x="2005430" y="475554"/>
-                  </a:lnTo>
-                  <a:lnTo>
-                    <a:pt x="2077053" y="489409"/>
-                  </a:lnTo>
-                  <a:lnTo>
-                    <a:pt x="2148675" y="503077"/>
-                  </a:lnTo>
-                  <a:lnTo>
-                    <a:pt x="2220298" y="516560"/>
-                  </a:lnTo>
-                  <a:lnTo>
-                    <a:pt x="2291920" y="529861"/>
-                  </a:lnTo>
-                  <a:lnTo>
-                    <a:pt x="2363543" y="542981"/>
-                  </a:lnTo>
-                  <a:lnTo>
-                    <a:pt x="2435165" y="555924"/>
-                  </a:lnTo>
-                  <a:lnTo>
-                    <a:pt x="2506788" y="568692"/>
-                  </a:lnTo>
-                  <a:lnTo>
-                    <a:pt x="2578410" y="581287"/>
-                  </a:lnTo>
-                  <a:lnTo>
-                    <a:pt x="2650033" y="593712"/>
-                  </a:lnTo>
-                  <a:lnTo>
-                    <a:pt x="2721655" y="605969"/>
-                  </a:lnTo>
-                  <a:lnTo>
-                    <a:pt x="2793278" y="618059"/>
-                  </a:lnTo>
-                  <a:lnTo>
-                    <a:pt x="2864901" y="629987"/>
-                  </a:lnTo>
-                  <a:lnTo>
-                    <a:pt x="2936523" y="641752"/>
-                  </a:lnTo>
-                  <a:lnTo>
-                    <a:pt x="3008146" y="653359"/>
-                  </a:lnTo>
-                  <a:lnTo>
-                    <a:pt x="3079768" y="664808"/>
-                  </a:lnTo>
-                  <a:lnTo>
-                    <a:pt x="3151391" y="676103"/>
-                  </a:lnTo>
-                  <a:lnTo>
-                    <a:pt x="3223013" y="687245"/>
-                  </a:lnTo>
-                  <a:lnTo>
-                    <a:pt x="3294636" y="698236"/>
-                  </a:lnTo>
-                  <a:lnTo>
-                    <a:pt x="3366258" y="709078"/>
-                  </a:lnTo>
-                  <a:lnTo>
-                    <a:pt x="3437881" y="719773"/>
-                  </a:lnTo>
-                  <a:lnTo>
-                    <a:pt x="3509503" y="730324"/>
-                  </a:lnTo>
-                  <a:lnTo>
-                    <a:pt x="3581126" y="740732"/>
-                  </a:lnTo>
-                  <a:lnTo>
-                    <a:pt x="3652748" y="750999"/>
-                  </a:lnTo>
-                  <a:lnTo>
-                    <a:pt x="3724371" y="761128"/>
-                  </a:lnTo>
-                  <a:lnTo>
-                    <a:pt x="3795993" y="771119"/>
-                  </a:lnTo>
-                  <a:lnTo>
-                    <a:pt x="3867616" y="780975"/>
-                  </a:lnTo>
-                  <a:lnTo>
-                    <a:pt x="3939238" y="790697"/>
-                  </a:lnTo>
-                  <a:lnTo>
-                    <a:pt x="4010861" y="800288"/>
-                  </a:lnTo>
-                  <a:lnTo>
-                    <a:pt x="4082483" y="809750"/>
-                  </a:lnTo>
-                  <a:lnTo>
-                    <a:pt x="4154106" y="819083"/>
-                  </a:lnTo>
-                  <a:lnTo>
-                    <a:pt x="4225729" y="828290"/>
-                  </a:lnTo>
-                  <a:lnTo>
-                    <a:pt x="4297351" y="837372"/>
-                  </a:lnTo>
-                  <a:lnTo>
-                    <a:pt x="4368974" y="846332"/>
-                  </a:lnTo>
-                  <a:lnTo>
-                    <a:pt x="4440596" y="855170"/>
-                  </a:lnTo>
-                  <a:lnTo>
-                    <a:pt x="4512219" y="863889"/>
-                  </a:lnTo>
-                  <a:lnTo>
-                    <a:pt x="4583841" y="872489"/>
-                  </a:lnTo>
-                  <a:lnTo>
-                    <a:pt x="4655464" y="880974"/>
-                  </a:lnTo>
-                  <a:lnTo>
-                    <a:pt x="4727086" y="889343"/>
-                  </a:lnTo>
-                  <a:lnTo>
-                    <a:pt x="4798709" y="897600"/>
-                  </a:lnTo>
-                  <a:lnTo>
-                    <a:pt x="4870331" y="905744"/>
-                  </a:lnTo>
-                  <a:lnTo>
-                    <a:pt x="4941954" y="913778"/>
-                  </a:lnTo>
-                  <a:lnTo>
-                    <a:pt x="5013576" y="921704"/>
-                  </a:lnTo>
-                  <a:lnTo>
-                    <a:pt x="5085199" y="929522"/>
-                  </a:lnTo>
-                  <a:lnTo>
-                    <a:pt x="5156821" y="937235"/>
-                  </a:lnTo>
-                  <a:lnTo>
-                    <a:pt x="5228444" y="944843"/>
-                  </a:lnTo>
-                  <a:lnTo>
-                    <a:pt x="5300066" y="952348"/>
-                  </a:lnTo>
-                  <a:lnTo>
-                    <a:pt x="5371689" y="959752"/>
-                  </a:lnTo>
-                  <a:lnTo>
-                    <a:pt x="5443311" y="967055"/>
-                  </a:lnTo>
-                  <a:lnTo>
-                    <a:pt x="5514934" y="974260"/>
-                  </a:lnTo>
-                  <a:lnTo>
-                    <a:pt x="5586557" y="981367"/>
-                  </a:lnTo>
-                  <a:lnTo>
-                    <a:pt x="5658179" y="988378"/>
-                  </a:lnTo>
-                  <a:lnTo>
-                    <a:pt x="5729802" y="995294"/>
-                  </a:lnTo>
-                  <a:lnTo>
-                    <a:pt x="5801424" y="1002117"/>
-                  </a:lnTo>
-                  <a:lnTo>
-                    <a:pt x="5873047" y="1008847"/>
-                  </a:lnTo>
-                  <a:lnTo>
-                    <a:pt x="5944669" y="1015486"/>
-                  </a:lnTo>
-                  <a:lnTo>
-                    <a:pt x="6016292" y="1022036"/>
-                  </a:lnTo>
-                  <a:lnTo>
-                    <a:pt x="6087914" y="1028496"/>
-                  </a:lnTo>
-                  <a:lnTo>
-                    <a:pt x="6159537" y="1034870"/>
-                  </a:lnTo>
-                  <a:lnTo>
-                    <a:pt x="6231159" y="1041157"/>
-                  </a:lnTo>
-                  <a:lnTo>
-                    <a:pt x="6302782" y="1047359"/>
-                  </a:lnTo>
-                  <a:lnTo>
-                    <a:pt x="6374404" y="1053477"/>
-                  </a:lnTo>
-                  <a:lnTo>
-                    <a:pt x="6446027" y="1059512"/>
-                  </a:lnTo>
-                  <a:lnTo>
-                    <a:pt x="6517649" y="1065466"/>
-                  </a:lnTo>
-                  <a:lnTo>
-                    <a:pt x="6589272" y="1071339"/>
-                  </a:lnTo>
-                  <a:lnTo>
-                    <a:pt x="6660894" y="1077132"/>
-                  </a:lnTo>
-                  <a:lnTo>
-                    <a:pt x="6732517" y="1082847"/>
-                  </a:lnTo>
-                  <a:lnTo>
-                    <a:pt x="6804139" y="1088485"/>
-                  </a:lnTo>
-                  <a:lnTo>
-                    <a:pt x="6875762" y="1094047"/>
-                  </a:lnTo>
-                  <a:lnTo>
-                    <a:pt x="6947385" y="1099533"/>
-                  </a:lnTo>
-                  <a:lnTo>
-                    <a:pt x="7019007" y="1104945"/>
-                  </a:lnTo>
-                  <a:lnTo>
-                    <a:pt x="7090630" y="1110284"/>
+                    <a:pt x="70344" y="7322"/>
+                  </a:lnTo>
+                  <a:lnTo>
+                    <a:pt x="140688" y="14545"/>
+                  </a:lnTo>
+                  <a:lnTo>
+                    <a:pt x="211033" y="21671"/>
+                  </a:lnTo>
+                  <a:lnTo>
+                    <a:pt x="281377" y="28700"/>
+                  </a:lnTo>
+                  <a:lnTo>
+                    <a:pt x="351722" y="35634"/>
+                  </a:lnTo>
+                  <a:lnTo>
+                    <a:pt x="422066" y="42474"/>
+                  </a:lnTo>
+                  <a:lnTo>
+                    <a:pt x="492411" y="49222"/>
+                  </a:lnTo>
+                  <a:lnTo>
+                    <a:pt x="562755" y="55878"/>
+                  </a:lnTo>
+                  <a:lnTo>
+                    <a:pt x="633100" y="62444"/>
+                  </a:lnTo>
+                  <a:lnTo>
+                    <a:pt x="703444" y="68921"/>
+                  </a:lnTo>
+                  <a:lnTo>
+                    <a:pt x="773789" y="75311"/>
+                  </a:lnTo>
+                  <a:lnTo>
+                    <a:pt x="844133" y="81614"/>
+                  </a:lnTo>
+                  <a:lnTo>
+                    <a:pt x="914478" y="87832"/>
+                  </a:lnTo>
+                  <a:lnTo>
+                    <a:pt x="984822" y="93966"/>
+                  </a:lnTo>
+                  <a:lnTo>
+                    <a:pt x="1055167" y="100017"/>
+                  </a:lnTo>
+                  <a:lnTo>
+                    <a:pt x="1125511" y="105986"/>
+                  </a:lnTo>
+                  <a:lnTo>
+                    <a:pt x="1195856" y="111874"/>
+                  </a:lnTo>
+                  <a:lnTo>
+                    <a:pt x="1266200" y="117683"/>
+                  </a:lnTo>
+                  <a:lnTo>
+                    <a:pt x="1336545" y="123413"/>
+                  </a:lnTo>
+                  <a:lnTo>
+                    <a:pt x="1406889" y="129065"/>
+                  </a:lnTo>
+                  <a:lnTo>
+                    <a:pt x="1477234" y="134641"/>
+                  </a:lnTo>
+                  <a:lnTo>
+                    <a:pt x="1547578" y="140141"/>
+                  </a:lnTo>
+                  <a:lnTo>
+                    <a:pt x="1617923" y="145567"/>
+                  </a:lnTo>
+                  <a:lnTo>
+                    <a:pt x="1688267" y="150920"/>
+                  </a:lnTo>
+                  <a:lnTo>
+                    <a:pt x="1758612" y="156200"/>
+                  </a:lnTo>
+                  <a:lnTo>
+                    <a:pt x="1828956" y="161409"/>
+                  </a:lnTo>
+                  <a:lnTo>
+                    <a:pt x="1899301" y="166547"/>
+                  </a:lnTo>
+                  <a:lnTo>
+                    <a:pt x="1969645" y="171616"/>
+                  </a:lnTo>
+                  <a:lnTo>
+                    <a:pt x="2039990" y="176616"/>
+                  </a:lnTo>
+                  <a:lnTo>
+                    <a:pt x="2110334" y="181548"/>
+                  </a:lnTo>
+                  <a:lnTo>
+                    <a:pt x="2180679" y="186414"/>
+                  </a:lnTo>
+                  <a:lnTo>
+                    <a:pt x="2251023" y="191214"/>
+                  </a:lnTo>
+                  <a:lnTo>
+                    <a:pt x="2321368" y="195949"/>
+                  </a:lnTo>
+                  <a:lnTo>
+                    <a:pt x="2391712" y="200620"/>
+                  </a:lnTo>
+                  <a:lnTo>
+                    <a:pt x="2462057" y="205227"/>
+                  </a:lnTo>
+                  <a:lnTo>
+                    <a:pt x="2532401" y="209773"/>
+                  </a:lnTo>
+                  <a:lnTo>
+                    <a:pt x="2602746" y="214256"/>
+                  </a:lnTo>
+                  <a:lnTo>
+                    <a:pt x="2673090" y="218680"/>
+                  </a:lnTo>
+                  <a:lnTo>
+                    <a:pt x="2743435" y="223043"/>
+                  </a:lnTo>
+                  <a:lnTo>
+                    <a:pt x="2813779" y="227347"/>
+                  </a:lnTo>
+                  <a:lnTo>
+                    <a:pt x="2884124" y="231593"/>
+                  </a:lnTo>
+                  <a:lnTo>
+                    <a:pt x="2954468" y="235782"/>
+                  </a:lnTo>
+                  <a:lnTo>
+                    <a:pt x="3024813" y="239913"/>
+                  </a:lnTo>
+                  <a:lnTo>
+                    <a:pt x="3095157" y="243989"/>
+                  </a:lnTo>
+                  <a:lnTo>
+                    <a:pt x="3165502" y="248010"/>
+                  </a:lnTo>
+                  <a:lnTo>
+                    <a:pt x="3235846" y="251976"/>
+                  </a:lnTo>
+                  <a:lnTo>
+                    <a:pt x="3306191" y="255889"/>
+                  </a:lnTo>
+                  <a:lnTo>
+                    <a:pt x="3376535" y="259749"/>
+                  </a:lnTo>
+                  <a:lnTo>
+                    <a:pt x="3446880" y="263556"/>
+                  </a:lnTo>
+                  <a:lnTo>
+                    <a:pt x="3517224" y="267312"/>
+                  </a:lnTo>
+                  <a:lnTo>
+                    <a:pt x="3587569" y="271018"/>
+                  </a:lnTo>
+                  <a:lnTo>
+                    <a:pt x="3657913" y="274673"/>
+                  </a:lnTo>
+                  <a:lnTo>
+                    <a:pt x="3728257" y="278278"/>
+                  </a:lnTo>
+                  <a:lnTo>
+                    <a:pt x="3798602" y="281835"/>
+                  </a:lnTo>
+                  <a:lnTo>
+                    <a:pt x="3868946" y="285344"/>
+                  </a:lnTo>
+                  <a:lnTo>
+                    <a:pt x="3939291" y="288805"/>
+                  </a:lnTo>
+                  <a:lnTo>
+                    <a:pt x="4009635" y="292219"/>
+                  </a:lnTo>
+                  <a:lnTo>
+                    <a:pt x="4079980" y="295587"/>
+                  </a:lnTo>
+                  <a:lnTo>
+                    <a:pt x="4150324" y="298910"/>
+                  </a:lnTo>
+                  <a:lnTo>
+                    <a:pt x="4220669" y="302188"/>
+                  </a:lnTo>
+                  <a:lnTo>
+                    <a:pt x="4291013" y="305421"/>
+                  </a:lnTo>
+                  <a:lnTo>
+                    <a:pt x="4361358" y="308610"/>
+                  </a:lnTo>
+                  <a:lnTo>
+                    <a:pt x="4431702" y="311757"/>
+                  </a:lnTo>
+                  <a:lnTo>
+                    <a:pt x="4502047" y="314861"/>
+                  </a:lnTo>
+                  <a:lnTo>
+                    <a:pt x="4572391" y="317922"/>
+                  </a:lnTo>
+                  <a:lnTo>
+                    <a:pt x="4642736" y="320943"/>
+                  </a:lnTo>
+                  <a:lnTo>
+                    <a:pt x="4713080" y="323922"/>
+                  </a:lnTo>
+                  <a:lnTo>
+                    <a:pt x="4783425" y="326861"/>
+                  </a:lnTo>
+                  <a:lnTo>
+                    <a:pt x="4853769" y="329761"/>
+                  </a:lnTo>
+                  <a:lnTo>
+                    <a:pt x="4924114" y="332621"/>
+                  </a:lnTo>
+                  <a:lnTo>
+                    <a:pt x="4994458" y="335442"/>
+                  </a:lnTo>
+                  <a:lnTo>
+                    <a:pt x="5064803" y="338226"/>
+                  </a:lnTo>
+                  <a:lnTo>
+                    <a:pt x="5135147" y="340971"/>
+                  </a:lnTo>
+                  <a:lnTo>
+                    <a:pt x="5205492" y="343680"/>
+                  </a:lnTo>
+                  <a:lnTo>
+                    <a:pt x="5275836" y="346352"/>
+                  </a:lnTo>
+                  <a:lnTo>
+                    <a:pt x="5346181" y="348987"/>
+                  </a:lnTo>
+                  <a:lnTo>
+                    <a:pt x="5416525" y="351587"/>
+                  </a:lnTo>
+                  <a:lnTo>
+                    <a:pt x="5486870" y="354152"/>
+                  </a:lnTo>
+                  <a:lnTo>
+                    <a:pt x="5557214" y="356682"/>
+                  </a:lnTo>
+                  <a:lnTo>
+                    <a:pt x="5627559" y="359178"/>
+                  </a:lnTo>
+                  <a:lnTo>
+                    <a:pt x="5697903" y="361640"/>
+                  </a:lnTo>
+                  <a:lnTo>
+                    <a:pt x="5768248" y="364069"/>
+                  </a:lnTo>
+                  <a:lnTo>
+                    <a:pt x="5838592" y="366465"/>
+                  </a:lnTo>
+                  <a:lnTo>
+                    <a:pt x="5908937" y="368828"/>
+                  </a:lnTo>
+                  <a:lnTo>
+                    <a:pt x="5979281" y="371160"/>
+                  </a:lnTo>
+                  <a:lnTo>
+                    <a:pt x="6049626" y="373460"/>
+                  </a:lnTo>
+                  <a:lnTo>
+                    <a:pt x="6119970" y="375729"/>
+                  </a:lnTo>
+                  <a:lnTo>
+                    <a:pt x="6190315" y="377967"/>
+                  </a:lnTo>
+                  <a:lnTo>
+                    <a:pt x="6260659" y="380175"/>
+                  </a:lnTo>
+                  <a:lnTo>
+                    <a:pt x="6331004" y="382353"/>
+                  </a:lnTo>
+                  <a:lnTo>
+                    <a:pt x="6401348" y="384501"/>
+                  </a:lnTo>
+                  <a:lnTo>
+                    <a:pt x="6471693" y="386621"/>
+                  </a:lnTo>
+                  <a:lnTo>
+                    <a:pt x="6542037" y="388711"/>
+                  </a:lnTo>
+                  <a:lnTo>
+                    <a:pt x="6612382" y="390774"/>
+                  </a:lnTo>
+                  <a:lnTo>
+                    <a:pt x="6682726" y="392808"/>
+                  </a:lnTo>
+                  <a:lnTo>
+                    <a:pt x="6753071" y="394815"/>
+                  </a:lnTo>
+                  <a:lnTo>
+                    <a:pt x="6823415" y="396795"/>
+                  </a:lnTo>
+                  <a:lnTo>
+                    <a:pt x="6893760" y="398748"/>
+                  </a:lnTo>
+                  <a:lnTo>
+                    <a:pt x="6964104" y="400675"/>
                   </a:lnTo>
                 </a:path>
               </a:pathLst>
@@ -4654,27 +4689,27 @@
         </p:sp>
         <p:sp>
           <p:nvSpPr>
-            <p:cNvPr id="26" name="pl26"/>
+            <p:cNvPr id="27" name="pl27"/>
             <p:cNvSpPr/>
             <p:nvPr/>
           </p:nvSpPr>
           <p:spPr>
             <a:xfrm>
-              <a:off x="817517" y="4727786"/>
-              <a:ext cx="7799693" cy="0"/>
+              <a:off x="887106" y="3100960"/>
+              <a:ext cx="7660515" cy="0"/>
             </a:xfrm>
             <a:custGeom>
               <a:avLst/>
               <a:pathLst>
-                <a:path w="7799693" h="0">
+                <a:path w="7660515" h="0">
                   <a:moveTo>
                     <a:pt x="0" y="0"/>
                   </a:moveTo>
                   <a:lnTo>
-                    <a:pt x="7799693" y="0"/>
-                  </a:lnTo>
-                  <a:lnTo>
-                    <a:pt x="7799693" y="0"/>
+                    <a:pt x="7660515" y="0"/>
+                  </a:lnTo>
+                  <a:lnTo>
+                    <a:pt x="7660515" y="0"/>
                   </a:lnTo>
                 </a:path>
               </a:pathLst>
@@ -4697,21 +4732,21 @@
         </p:sp>
         <p:sp>
           <p:nvSpPr>
-            <p:cNvPr id="27" name="pl27"/>
+            <p:cNvPr id="28" name="pl28"/>
             <p:cNvSpPr/>
             <p:nvPr/>
           </p:nvSpPr>
           <p:spPr>
             <a:xfrm>
-              <a:off x="4284781" y="2073503"/>
-              <a:ext cx="0" cy="3649639"/>
+              <a:off x="4292500" y="2143092"/>
+              <a:ext cx="0" cy="1317069"/>
             </a:xfrm>
             <a:custGeom>
               <a:avLst/>
               <a:pathLst>
-                <a:path w="0" h="3649639">
+                <a:path w="0" h="1317069">
                   <a:moveTo>
-                    <a:pt x="0" y="3649639"/>
+                    <a:pt x="0" y="1317069"/>
                   </a:moveTo>
                   <a:lnTo>
                     <a:pt x="0" y="0"/>
@@ -4740,21 +4775,21 @@
         </p:sp>
         <p:sp>
           <p:nvSpPr>
-            <p:cNvPr id="28" name="pl28"/>
+            <p:cNvPr id="29" name="pl29"/>
             <p:cNvSpPr/>
             <p:nvPr/>
           </p:nvSpPr>
           <p:spPr>
             <a:xfrm>
-              <a:off x="3095906" y="2073503"/>
-              <a:ext cx="0" cy="3649639"/>
+              <a:off x="3124839" y="2143092"/>
+              <a:ext cx="0" cy="1317069"/>
             </a:xfrm>
             <a:custGeom>
               <a:avLst/>
               <a:pathLst>
-                <a:path w="0" h="3649639">
+                <a:path w="0" h="1317069">
                   <a:moveTo>
-                    <a:pt x="0" y="3649639"/>
+                    <a:pt x="0" y="1317069"/>
                   </a:moveTo>
                   <a:lnTo>
                     <a:pt x="0" y="0"/>
@@ -4783,21 +4818,21 @@
         </p:sp>
         <p:sp>
           <p:nvSpPr>
-            <p:cNvPr id="29" name="pl29"/>
+            <p:cNvPr id="30" name="pl30"/>
             <p:cNvSpPr/>
             <p:nvPr/>
           </p:nvSpPr>
           <p:spPr>
             <a:xfrm>
-              <a:off x="5522967" y="2073503"/>
-              <a:ext cx="0" cy="3649639"/>
+              <a:off x="5508592" y="2143092"/>
+              <a:ext cx="0" cy="1317069"/>
             </a:xfrm>
             <a:custGeom>
               <a:avLst/>
               <a:pathLst>
-                <a:path w="0" h="3649639">
+                <a:path w="0" h="1317069">
                   <a:moveTo>
-                    <a:pt x="0" y="3649639"/>
+                    <a:pt x="0" y="1317069"/>
                   </a:moveTo>
                   <a:lnTo>
                     <a:pt x="0" y="0"/>
@@ -4826,13 +4861,13 @@
         </p:sp>
         <p:sp>
           <p:nvSpPr>
-            <p:cNvPr id="30" name="tx30"/>
+            <p:cNvPr id="31" name="tx31"/>
             <p:cNvSpPr/>
             <p:nvPr/>
           </p:nvSpPr>
           <p:spPr>
             <a:xfrm>
-              <a:off x="692708" y="5517199"/>
+              <a:off x="762297" y="3360243"/>
               <a:ext cx="62179" cy="80101"/>
             </a:xfrm>
             <a:prstGeom prst="rect">
@@ -4872,13 +4907,13 @@
         </p:sp>
         <p:sp>
           <p:nvSpPr>
-            <p:cNvPr id="31" name="tx31"/>
+            <p:cNvPr id="32" name="tx32"/>
             <p:cNvSpPr/>
             <p:nvPr/>
           </p:nvSpPr>
           <p:spPr>
             <a:xfrm>
-              <a:off x="692708" y="4687735"/>
+              <a:off x="762297" y="3060909"/>
               <a:ext cx="62179" cy="80101"/>
             </a:xfrm>
             <a:prstGeom prst="rect">
@@ -4918,13 +4953,13 @@
         </p:sp>
         <p:sp>
           <p:nvSpPr>
-            <p:cNvPr id="32" name="tx32"/>
+            <p:cNvPr id="33" name="tx33"/>
             <p:cNvSpPr/>
             <p:nvPr/>
           </p:nvSpPr>
           <p:spPr>
             <a:xfrm>
-              <a:off x="692708" y="3858272"/>
+              <a:off x="762297" y="2761575"/>
               <a:ext cx="62179" cy="80101"/>
             </a:xfrm>
             <a:prstGeom prst="rect">
@@ -4964,13 +4999,13 @@
         </p:sp>
         <p:sp>
           <p:nvSpPr>
-            <p:cNvPr id="33" name="tx33"/>
+            <p:cNvPr id="34" name="tx34"/>
             <p:cNvSpPr/>
             <p:nvPr/>
           </p:nvSpPr>
           <p:spPr>
             <a:xfrm>
-              <a:off x="692708" y="3028808"/>
+              <a:off x="762297" y="2462242"/>
               <a:ext cx="62179" cy="80101"/>
             </a:xfrm>
             <a:prstGeom prst="rect">
@@ -5010,13 +5045,13 @@
         </p:sp>
         <p:sp>
           <p:nvSpPr>
-            <p:cNvPr id="34" name="tx34"/>
+            <p:cNvPr id="35" name="tx35"/>
             <p:cNvSpPr/>
             <p:nvPr/>
           </p:nvSpPr>
           <p:spPr>
             <a:xfrm>
-              <a:off x="692708" y="2199345"/>
+              <a:off x="762297" y="2162908"/>
               <a:ext cx="62179" cy="80101"/>
             </a:xfrm>
             <a:prstGeom prst="rect">
@@ -5056,13 +5091,13 @@
         </p:sp>
         <p:sp>
           <p:nvSpPr>
-            <p:cNvPr id="35" name="tx35"/>
+            <p:cNvPr id="36" name="tx36"/>
             <p:cNvSpPr/>
             <p:nvPr/>
           </p:nvSpPr>
           <p:spPr>
             <a:xfrm>
-              <a:off x="2152181" y="5785772"/>
+              <a:off x="2196512" y="3522791"/>
               <a:ext cx="161574" cy="80101"/>
             </a:xfrm>
             <a:prstGeom prst="rect">
@@ -5102,13 +5137,13 @@
         </p:sp>
         <p:sp>
           <p:nvSpPr>
-            <p:cNvPr id="36" name="tx36"/>
+            <p:cNvPr id="37" name="tx37"/>
             <p:cNvSpPr/>
             <p:nvPr/>
           </p:nvSpPr>
           <p:spPr>
             <a:xfrm>
-              <a:off x="3884104" y="5785772"/>
+              <a:off x="3897531" y="3522791"/>
               <a:ext cx="161574" cy="80101"/>
             </a:xfrm>
             <a:prstGeom prst="rect">
@@ -5148,13 +5183,13 @@
         </p:sp>
         <p:sp>
           <p:nvSpPr>
-            <p:cNvPr id="37" name="tx37"/>
+            <p:cNvPr id="38" name="tx38"/>
             <p:cNvSpPr/>
             <p:nvPr/>
           </p:nvSpPr>
           <p:spPr>
             <a:xfrm>
-              <a:off x="5665725" y="5785772"/>
+              <a:off x="5648248" y="3522791"/>
               <a:ext cx="62179" cy="80101"/>
             </a:xfrm>
             <a:prstGeom prst="rect">
@@ -5194,13 +5229,13 @@
         </p:sp>
         <p:sp>
           <p:nvSpPr>
-            <p:cNvPr id="38" name="tx38"/>
+            <p:cNvPr id="39" name="tx39"/>
             <p:cNvSpPr/>
             <p:nvPr/>
           </p:nvSpPr>
           <p:spPr>
             <a:xfrm>
-              <a:off x="7366559" y="5785772"/>
+              <a:off x="7318177" y="3522791"/>
               <a:ext cx="124358" cy="80101"/>
             </a:xfrm>
             <a:prstGeom prst="rect">
@@ -5240,13 +5275,13 @@
         </p:sp>
         <p:sp>
           <p:nvSpPr>
-            <p:cNvPr id="39" name="tx39"/>
+            <p:cNvPr id="40" name="tx40"/>
             <p:cNvSpPr/>
             <p:nvPr/>
           </p:nvSpPr>
           <p:spPr>
             <a:xfrm>
-              <a:off x="1561815" y="5925448"/>
+              <a:off x="1561815" y="3662467"/>
               <a:ext cx="6311097" cy="100218"/>
             </a:xfrm>
             <a:prstGeom prst="rect">
@@ -5286,13 +5321,13 @@
         </p:sp>
         <p:sp>
           <p:nvSpPr>
-            <p:cNvPr id="40" name="tx40"/>
+            <p:cNvPr id="41" name="tx41"/>
             <p:cNvSpPr/>
             <p:nvPr/>
           </p:nvSpPr>
           <p:spPr>
             <a:xfrm rot="-5400000">
-              <a:off x="68446" y="3848213"/>
+              <a:off x="138035" y="2751517"/>
               <a:ext cx="1016904" cy="100218"/>
             </a:xfrm>
             <a:prstGeom prst="rect">
@@ -5332,13 +5367,13 @@
         </p:sp>
         <p:sp>
           <p:nvSpPr>
-            <p:cNvPr id="41" name="tx41"/>
+            <p:cNvPr id="42" name="tx42"/>
             <p:cNvSpPr/>
             <p:nvPr/>
           </p:nvSpPr>
           <p:spPr>
             <a:xfrm>
-              <a:off x="817517" y="1896563"/>
+              <a:off x="887106" y="1966152"/>
               <a:ext cx="7026615" cy="82021"/>
             </a:xfrm>
             <a:prstGeom prst="rect">
@@ -5378,13 +5413,3789 @@
         </p:sp>
         <p:sp>
           <p:nvSpPr>
-            <p:cNvPr id="42" name="tx42"/>
+            <p:cNvPr id="43" name="tx43"/>
             <p:cNvSpPr/>
             <p:nvPr/>
           </p:nvSpPr>
           <p:spPr>
             <a:xfrm>
-              <a:off x="817517" y="1669789"/>
+              <a:off x="887106" y="1739378"/>
+              <a:ext cx="3668481" cy="120152"/>
+            </a:xfrm>
+            <a:prstGeom prst="rect">
+              <a:avLst/>
+            </a:prstGeom>
+            <a:noFill/>
+          </p:spPr>
+          <p:txBody>
+            <a:bodyPr lIns="0" rIns="0" tIns="0" bIns="0" anchorCtr="1" anchor="ctr" wrap="none"/>
+            <a:lstStyle/>
+            <a:p>
+              <a:pPr algn="l" marL="0" marR="0" indent="0">
+                <a:lnSpc>
+                  <a:spcPts val="1320"/>
+                </a:lnSpc>
+                <a:spcBef>
+                  <a:spcPts val="0"/>
+                </a:spcBef>
+                <a:spcAft>
+                  <a:spcPts val="0"/>
+                </a:spcAft>
+              </a:pPr>
+              <a:r>
+                <a:rPr sz="1320">
+                  <a:solidFill>
+                    <a:srgbClr val="000000">
+                      <a:alpha val="100000"/>
+                    </a:srgbClr>
+                  </a:solidFill>
+                  <a:latin typeface="Helvetica"/>
+                  <a:cs typeface="Helvetica"/>
+                </a:rPr>
+                <a:t>Composite Grade 2 AEs (Sensitivity, Carboplatin)</a:t>
+              </a:r>
+            </a:p>
+          </p:txBody>
+        </p:sp>
+        <p:sp>
+          <p:nvSpPr>
+            <p:cNvPr id="44" name="pl44"/>
+            <p:cNvSpPr/>
+            <p:nvPr/>
+          </p:nvSpPr>
+          <p:spPr>
+            <a:xfrm>
+              <a:off x="887106" y="5444019"/>
+              <a:ext cx="7660515" cy="0"/>
+            </a:xfrm>
+            <a:custGeom>
+              <a:avLst/>
+              <a:pathLst>
+                <a:path w="7660515" h="0">
+                  <a:moveTo>
+                    <a:pt x="0" y="0"/>
+                  </a:moveTo>
+                  <a:lnTo>
+                    <a:pt x="7660515" y="0"/>
+                  </a:lnTo>
+                  <a:lnTo>
+                    <a:pt x="7660515" y="0"/>
+                  </a:lnTo>
+                </a:path>
+              </a:pathLst>
+            </a:custGeom>
+            <a:ln w="6775" cap="flat">
+              <a:solidFill>
+                <a:srgbClr val="EBEBEB">
+                  <a:alpha val="100000"/>
+                </a:srgbClr>
+              </a:solidFill>
+              <a:prstDash val="solid"/>
+              <a:round/>
+            </a:ln>
+          </p:spPr>
+          <p:txBody>
+            <a:bodyPr/>
+            <a:lstStyle/>
+            <a:p/>
+          </p:txBody>
+        </p:sp>
+        <p:sp>
+          <p:nvSpPr>
+            <p:cNvPr id="45" name="pl45"/>
+            <p:cNvSpPr/>
+            <p:nvPr/>
+          </p:nvSpPr>
+          <p:spPr>
+            <a:xfrm>
+              <a:off x="887106" y="5144686"/>
+              <a:ext cx="7660515" cy="0"/>
+            </a:xfrm>
+            <a:custGeom>
+              <a:avLst/>
+              <a:pathLst>
+                <a:path w="7660515" h="0">
+                  <a:moveTo>
+                    <a:pt x="0" y="0"/>
+                  </a:moveTo>
+                  <a:lnTo>
+                    <a:pt x="7660515" y="0"/>
+                  </a:lnTo>
+                  <a:lnTo>
+                    <a:pt x="7660515" y="0"/>
+                  </a:lnTo>
+                </a:path>
+              </a:pathLst>
+            </a:custGeom>
+            <a:ln w="6775" cap="flat">
+              <a:solidFill>
+                <a:srgbClr val="EBEBEB">
+                  <a:alpha val="100000"/>
+                </a:srgbClr>
+              </a:solidFill>
+              <a:prstDash val="solid"/>
+              <a:round/>
+            </a:ln>
+          </p:spPr>
+          <p:txBody>
+            <a:bodyPr/>
+            <a:lstStyle/>
+            <a:p/>
+          </p:txBody>
+        </p:sp>
+        <p:sp>
+          <p:nvSpPr>
+            <p:cNvPr id="46" name="pl46"/>
+            <p:cNvSpPr/>
+            <p:nvPr/>
+          </p:nvSpPr>
+          <p:spPr>
+            <a:xfrm>
+              <a:off x="887106" y="4845352"/>
+              <a:ext cx="7660515" cy="0"/>
+            </a:xfrm>
+            <a:custGeom>
+              <a:avLst/>
+              <a:pathLst>
+                <a:path w="7660515" h="0">
+                  <a:moveTo>
+                    <a:pt x="0" y="0"/>
+                  </a:moveTo>
+                  <a:lnTo>
+                    <a:pt x="7660515" y="0"/>
+                  </a:lnTo>
+                  <a:lnTo>
+                    <a:pt x="7660515" y="0"/>
+                  </a:lnTo>
+                </a:path>
+              </a:pathLst>
+            </a:custGeom>
+            <a:ln w="6775" cap="flat">
+              <a:solidFill>
+                <a:srgbClr val="EBEBEB">
+                  <a:alpha val="100000"/>
+                </a:srgbClr>
+              </a:solidFill>
+              <a:prstDash val="solid"/>
+              <a:round/>
+            </a:ln>
+          </p:spPr>
+          <p:txBody>
+            <a:bodyPr/>
+            <a:lstStyle/>
+            <a:p/>
+          </p:txBody>
+        </p:sp>
+        <p:sp>
+          <p:nvSpPr>
+            <p:cNvPr id="47" name="pl47"/>
+            <p:cNvSpPr/>
+            <p:nvPr/>
+          </p:nvSpPr>
+          <p:spPr>
+            <a:xfrm>
+              <a:off x="887106" y="4546018"/>
+              <a:ext cx="7660515" cy="0"/>
+            </a:xfrm>
+            <a:custGeom>
+              <a:avLst/>
+              <a:pathLst>
+                <a:path w="7660515" h="0">
+                  <a:moveTo>
+                    <a:pt x="0" y="0"/>
+                  </a:moveTo>
+                  <a:lnTo>
+                    <a:pt x="7660515" y="0"/>
+                  </a:lnTo>
+                  <a:lnTo>
+                    <a:pt x="7660515" y="0"/>
+                  </a:lnTo>
+                </a:path>
+              </a:pathLst>
+            </a:custGeom>
+            <a:ln w="6775" cap="flat">
+              <a:solidFill>
+                <a:srgbClr val="EBEBEB">
+                  <a:alpha val="100000"/>
+                </a:srgbClr>
+              </a:solidFill>
+              <a:prstDash val="solid"/>
+              <a:round/>
+            </a:ln>
+          </p:spPr>
+          <p:txBody>
+            <a:bodyPr/>
+            <a:lstStyle/>
+            <a:p/>
+          </p:txBody>
+        </p:sp>
+        <p:sp>
+          <p:nvSpPr>
+            <p:cNvPr id="48" name="pl48"/>
+            <p:cNvSpPr/>
+            <p:nvPr/>
+          </p:nvSpPr>
+          <p:spPr>
+            <a:xfrm>
+              <a:off x="1001535" y="4336484"/>
+              <a:ext cx="0" cy="1317069"/>
+            </a:xfrm>
+            <a:custGeom>
+              <a:avLst/>
+              <a:pathLst>
+                <a:path w="0" h="1317069">
+                  <a:moveTo>
+                    <a:pt x="0" y="1317069"/>
+                  </a:moveTo>
+                  <a:lnTo>
+                    <a:pt x="0" y="0"/>
+                  </a:lnTo>
+                  <a:lnTo>
+                    <a:pt x="0" y="0"/>
+                  </a:lnTo>
+                </a:path>
+              </a:pathLst>
+            </a:custGeom>
+            <a:ln w="6775" cap="flat">
+              <a:solidFill>
+                <a:srgbClr val="EBEBEB">
+                  <a:alpha val="100000"/>
+                </a:srgbClr>
+              </a:solidFill>
+              <a:prstDash val="solid"/>
+              <a:round/>
+            </a:ln>
+          </p:spPr>
+          <p:txBody>
+            <a:bodyPr/>
+            <a:lstStyle/>
+            <a:p/>
+          </p:txBody>
+        </p:sp>
+        <p:sp>
+          <p:nvSpPr>
+            <p:cNvPr id="49" name="pl49"/>
+            <p:cNvSpPr/>
+            <p:nvPr/>
+          </p:nvSpPr>
+          <p:spPr>
+            <a:xfrm>
+              <a:off x="1852045" y="4336484"/>
+              <a:ext cx="0" cy="1317069"/>
+            </a:xfrm>
+            <a:custGeom>
+              <a:avLst/>
+              <a:pathLst>
+                <a:path w="0" h="1317069">
+                  <a:moveTo>
+                    <a:pt x="0" y="1317069"/>
+                  </a:moveTo>
+                  <a:lnTo>
+                    <a:pt x="0" y="0"/>
+                  </a:lnTo>
+                  <a:lnTo>
+                    <a:pt x="0" y="0"/>
+                  </a:lnTo>
+                </a:path>
+              </a:pathLst>
+            </a:custGeom>
+            <a:ln w="6775" cap="flat">
+              <a:solidFill>
+                <a:srgbClr val="EBEBEB">
+                  <a:alpha val="100000"/>
+                </a:srgbClr>
+              </a:solidFill>
+              <a:prstDash val="solid"/>
+              <a:round/>
+            </a:ln>
+          </p:spPr>
+          <p:txBody>
+            <a:bodyPr/>
+            <a:lstStyle/>
+            <a:p/>
+          </p:txBody>
+        </p:sp>
+        <p:sp>
+          <p:nvSpPr>
+            <p:cNvPr id="50" name="pl50"/>
+            <p:cNvSpPr/>
+            <p:nvPr/>
+          </p:nvSpPr>
+          <p:spPr>
+            <a:xfrm>
+              <a:off x="2702554" y="4336484"/>
+              <a:ext cx="0" cy="1317069"/>
+            </a:xfrm>
+            <a:custGeom>
+              <a:avLst/>
+              <a:pathLst>
+                <a:path w="0" h="1317069">
+                  <a:moveTo>
+                    <a:pt x="0" y="1317069"/>
+                  </a:moveTo>
+                  <a:lnTo>
+                    <a:pt x="0" y="0"/>
+                  </a:lnTo>
+                  <a:lnTo>
+                    <a:pt x="0" y="0"/>
+                  </a:lnTo>
+                </a:path>
+              </a:pathLst>
+            </a:custGeom>
+            <a:ln w="6775" cap="flat">
+              <a:solidFill>
+                <a:srgbClr val="EBEBEB">
+                  <a:alpha val="100000"/>
+                </a:srgbClr>
+              </a:solidFill>
+              <a:prstDash val="solid"/>
+              <a:round/>
+            </a:ln>
+          </p:spPr>
+          <p:txBody>
+            <a:bodyPr/>
+            <a:lstStyle/>
+            <a:p/>
+          </p:txBody>
+        </p:sp>
+        <p:sp>
+          <p:nvSpPr>
+            <p:cNvPr id="51" name="pl51"/>
+            <p:cNvSpPr/>
+            <p:nvPr/>
+          </p:nvSpPr>
+          <p:spPr>
+            <a:xfrm>
+              <a:off x="3553064" y="4336484"/>
+              <a:ext cx="0" cy="1317069"/>
+            </a:xfrm>
+            <a:custGeom>
+              <a:avLst/>
+              <a:pathLst>
+                <a:path w="0" h="1317069">
+                  <a:moveTo>
+                    <a:pt x="0" y="1317069"/>
+                  </a:moveTo>
+                  <a:lnTo>
+                    <a:pt x="0" y="0"/>
+                  </a:lnTo>
+                  <a:lnTo>
+                    <a:pt x="0" y="0"/>
+                  </a:lnTo>
+                </a:path>
+              </a:pathLst>
+            </a:custGeom>
+            <a:ln w="6775" cap="flat">
+              <a:solidFill>
+                <a:srgbClr val="EBEBEB">
+                  <a:alpha val="100000"/>
+                </a:srgbClr>
+              </a:solidFill>
+              <a:prstDash val="solid"/>
+              <a:round/>
+            </a:ln>
+          </p:spPr>
+          <p:txBody>
+            <a:bodyPr/>
+            <a:lstStyle/>
+            <a:p/>
+          </p:txBody>
+        </p:sp>
+        <p:sp>
+          <p:nvSpPr>
+            <p:cNvPr id="52" name="pl52"/>
+            <p:cNvSpPr/>
+            <p:nvPr/>
+          </p:nvSpPr>
+          <p:spPr>
+            <a:xfrm>
+              <a:off x="4403573" y="4336484"/>
+              <a:ext cx="0" cy="1317069"/>
+            </a:xfrm>
+            <a:custGeom>
+              <a:avLst/>
+              <a:pathLst>
+                <a:path w="0" h="1317069">
+                  <a:moveTo>
+                    <a:pt x="0" y="1317069"/>
+                  </a:moveTo>
+                  <a:lnTo>
+                    <a:pt x="0" y="0"/>
+                  </a:lnTo>
+                  <a:lnTo>
+                    <a:pt x="0" y="0"/>
+                  </a:lnTo>
+                </a:path>
+              </a:pathLst>
+            </a:custGeom>
+            <a:ln w="6775" cap="flat">
+              <a:solidFill>
+                <a:srgbClr val="EBEBEB">
+                  <a:alpha val="100000"/>
+                </a:srgbClr>
+              </a:solidFill>
+              <a:prstDash val="solid"/>
+              <a:round/>
+            </a:ln>
+          </p:spPr>
+          <p:txBody>
+            <a:bodyPr/>
+            <a:lstStyle/>
+            <a:p/>
+          </p:txBody>
+        </p:sp>
+        <p:sp>
+          <p:nvSpPr>
+            <p:cNvPr id="53" name="pl53"/>
+            <p:cNvSpPr/>
+            <p:nvPr/>
+          </p:nvSpPr>
+          <p:spPr>
+            <a:xfrm>
+              <a:off x="5254082" y="4336484"/>
+              <a:ext cx="0" cy="1317069"/>
+            </a:xfrm>
+            <a:custGeom>
+              <a:avLst/>
+              <a:pathLst>
+                <a:path w="0" h="1317069">
+                  <a:moveTo>
+                    <a:pt x="0" y="1317069"/>
+                  </a:moveTo>
+                  <a:lnTo>
+                    <a:pt x="0" y="0"/>
+                  </a:lnTo>
+                  <a:lnTo>
+                    <a:pt x="0" y="0"/>
+                  </a:lnTo>
+                </a:path>
+              </a:pathLst>
+            </a:custGeom>
+            <a:ln w="6775" cap="flat">
+              <a:solidFill>
+                <a:srgbClr val="EBEBEB">
+                  <a:alpha val="100000"/>
+                </a:srgbClr>
+              </a:solidFill>
+              <a:prstDash val="solid"/>
+              <a:round/>
+            </a:ln>
+          </p:spPr>
+          <p:txBody>
+            <a:bodyPr/>
+            <a:lstStyle/>
+            <a:p/>
+          </p:txBody>
+        </p:sp>
+        <p:sp>
+          <p:nvSpPr>
+            <p:cNvPr id="54" name="pl54"/>
+            <p:cNvSpPr/>
+            <p:nvPr/>
+          </p:nvSpPr>
+          <p:spPr>
+            <a:xfrm>
+              <a:off x="6104592" y="4336484"/>
+              <a:ext cx="0" cy="1317069"/>
+            </a:xfrm>
+            <a:custGeom>
+              <a:avLst/>
+              <a:pathLst>
+                <a:path w="0" h="1317069">
+                  <a:moveTo>
+                    <a:pt x="0" y="1317069"/>
+                  </a:moveTo>
+                  <a:lnTo>
+                    <a:pt x="0" y="0"/>
+                  </a:lnTo>
+                  <a:lnTo>
+                    <a:pt x="0" y="0"/>
+                  </a:lnTo>
+                </a:path>
+              </a:pathLst>
+            </a:custGeom>
+            <a:ln w="6775" cap="flat">
+              <a:solidFill>
+                <a:srgbClr val="EBEBEB">
+                  <a:alpha val="100000"/>
+                </a:srgbClr>
+              </a:solidFill>
+              <a:prstDash val="solid"/>
+              <a:round/>
+            </a:ln>
+          </p:spPr>
+          <p:txBody>
+            <a:bodyPr/>
+            <a:lstStyle/>
+            <a:p/>
+          </p:txBody>
+        </p:sp>
+        <p:sp>
+          <p:nvSpPr>
+            <p:cNvPr id="55" name="pl55"/>
+            <p:cNvSpPr/>
+            <p:nvPr/>
+          </p:nvSpPr>
+          <p:spPr>
+            <a:xfrm>
+              <a:off x="6955101" y="4336484"/>
+              <a:ext cx="0" cy="1317069"/>
+            </a:xfrm>
+            <a:custGeom>
+              <a:avLst/>
+              <a:pathLst>
+                <a:path w="0" h="1317069">
+                  <a:moveTo>
+                    <a:pt x="0" y="1317069"/>
+                  </a:moveTo>
+                  <a:lnTo>
+                    <a:pt x="0" y="0"/>
+                  </a:lnTo>
+                  <a:lnTo>
+                    <a:pt x="0" y="0"/>
+                  </a:lnTo>
+                </a:path>
+              </a:pathLst>
+            </a:custGeom>
+            <a:ln w="6775" cap="flat">
+              <a:solidFill>
+                <a:srgbClr val="EBEBEB">
+                  <a:alpha val="100000"/>
+                </a:srgbClr>
+              </a:solidFill>
+              <a:prstDash val="solid"/>
+              <a:round/>
+            </a:ln>
+          </p:spPr>
+          <p:txBody>
+            <a:bodyPr/>
+            <a:lstStyle/>
+            <a:p/>
+          </p:txBody>
+        </p:sp>
+        <p:sp>
+          <p:nvSpPr>
+            <p:cNvPr id="56" name="pl56"/>
+            <p:cNvSpPr/>
+            <p:nvPr/>
+          </p:nvSpPr>
+          <p:spPr>
+            <a:xfrm>
+              <a:off x="7805611" y="4336484"/>
+              <a:ext cx="0" cy="1317069"/>
+            </a:xfrm>
+            <a:custGeom>
+              <a:avLst/>
+              <a:pathLst>
+                <a:path w="0" h="1317069">
+                  <a:moveTo>
+                    <a:pt x="0" y="1317069"/>
+                  </a:moveTo>
+                  <a:lnTo>
+                    <a:pt x="0" y="0"/>
+                  </a:lnTo>
+                  <a:lnTo>
+                    <a:pt x="0" y="0"/>
+                  </a:lnTo>
+                </a:path>
+              </a:pathLst>
+            </a:custGeom>
+            <a:ln w="6775" cap="flat">
+              <a:solidFill>
+                <a:srgbClr val="EBEBEB">
+                  <a:alpha val="100000"/>
+                </a:srgbClr>
+              </a:solidFill>
+              <a:prstDash val="solid"/>
+              <a:round/>
+            </a:ln>
+          </p:spPr>
+          <p:txBody>
+            <a:bodyPr/>
+            <a:lstStyle/>
+            <a:p/>
+          </p:txBody>
+        </p:sp>
+        <p:sp>
+          <p:nvSpPr>
+            <p:cNvPr id="57" name="pl57"/>
+            <p:cNvSpPr/>
+            <p:nvPr/>
+          </p:nvSpPr>
+          <p:spPr>
+            <a:xfrm>
+              <a:off x="887106" y="5593686"/>
+              <a:ext cx="7660515" cy="0"/>
+            </a:xfrm>
+            <a:custGeom>
+              <a:avLst/>
+              <a:pathLst>
+                <a:path w="7660515" h="0">
+                  <a:moveTo>
+                    <a:pt x="0" y="0"/>
+                  </a:moveTo>
+                  <a:lnTo>
+                    <a:pt x="7660515" y="0"/>
+                  </a:lnTo>
+                  <a:lnTo>
+                    <a:pt x="7660515" y="0"/>
+                  </a:lnTo>
+                </a:path>
+              </a:pathLst>
+            </a:custGeom>
+            <a:ln w="13550" cap="flat">
+              <a:solidFill>
+                <a:srgbClr val="EBEBEB">
+                  <a:alpha val="100000"/>
+                </a:srgbClr>
+              </a:solidFill>
+              <a:prstDash val="solid"/>
+              <a:round/>
+            </a:ln>
+          </p:spPr>
+          <p:txBody>
+            <a:bodyPr/>
+            <a:lstStyle/>
+            <a:p/>
+          </p:txBody>
+        </p:sp>
+        <p:sp>
+          <p:nvSpPr>
+            <p:cNvPr id="58" name="pl58"/>
+            <p:cNvSpPr/>
+            <p:nvPr/>
+          </p:nvSpPr>
+          <p:spPr>
+            <a:xfrm>
+              <a:off x="887106" y="5294352"/>
+              <a:ext cx="7660515" cy="0"/>
+            </a:xfrm>
+            <a:custGeom>
+              <a:avLst/>
+              <a:pathLst>
+                <a:path w="7660515" h="0">
+                  <a:moveTo>
+                    <a:pt x="0" y="0"/>
+                  </a:moveTo>
+                  <a:lnTo>
+                    <a:pt x="7660515" y="0"/>
+                  </a:lnTo>
+                  <a:lnTo>
+                    <a:pt x="7660515" y="0"/>
+                  </a:lnTo>
+                </a:path>
+              </a:pathLst>
+            </a:custGeom>
+            <a:ln w="13550" cap="flat">
+              <a:solidFill>
+                <a:srgbClr val="EBEBEB">
+                  <a:alpha val="100000"/>
+                </a:srgbClr>
+              </a:solidFill>
+              <a:prstDash val="solid"/>
+              <a:round/>
+            </a:ln>
+          </p:spPr>
+          <p:txBody>
+            <a:bodyPr/>
+            <a:lstStyle/>
+            <a:p/>
+          </p:txBody>
+        </p:sp>
+        <p:sp>
+          <p:nvSpPr>
+            <p:cNvPr id="59" name="pl59"/>
+            <p:cNvSpPr/>
+            <p:nvPr/>
+          </p:nvSpPr>
+          <p:spPr>
+            <a:xfrm>
+              <a:off x="887106" y="4995019"/>
+              <a:ext cx="7660515" cy="0"/>
+            </a:xfrm>
+            <a:custGeom>
+              <a:avLst/>
+              <a:pathLst>
+                <a:path w="7660515" h="0">
+                  <a:moveTo>
+                    <a:pt x="0" y="0"/>
+                  </a:moveTo>
+                  <a:lnTo>
+                    <a:pt x="7660515" y="0"/>
+                  </a:lnTo>
+                  <a:lnTo>
+                    <a:pt x="7660515" y="0"/>
+                  </a:lnTo>
+                </a:path>
+              </a:pathLst>
+            </a:custGeom>
+            <a:ln w="13550" cap="flat">
+              <a:solidFill>
+                <a:srgbClr val="EBEBEB">
+                  <a:alpha val="100000"/>
+                </a:srgbClr>
+              </a:solidFill>
+              <a:prstDash val="solid"/>
+              <a:round/>
+            </a:ln>
+          </p:spPr>
+          <p:txBody>
+            <a:bodyPr/>
+            <a:lstStyle/>
+            <a:p/>
+          </p:txBody>
+        </p:sp>
+        <p:sp>
+          <p:nvSpPr>
+            <p:cNvPr id="60" name="pl60"/>
+            <p:cNvSpPr/>
+            <p:nvPr/>
+          </p:nvSpPr>
+          <p:spPr>
+            <a:xfrm>
+              <a:off x="887106" y="4695685"/>
+              <a:ext cx="7660515" cy="0"/>
+            </a:xfrm>
+            <a:custGeom>
+              <a:avLst/>
+              <a:pathLst>
+                <a:path w="7660515" h="0">
+                  <a:moveTo>
+                    <a:pt x="0" y="0"/>
+                  </a:moveTo>
+                  <a:lnTo>
+                    <a:pt x="7660515" y="0"/>
+                  </a:lnTo>
+                  <a:lnTo>
+                    <a:pt x="7660515" y="0"/>
+                  </a:lnTo>
+                </a:path>
+              </a:pathLst>
+            </a:custGeom>
+            <a:ln w="13550" cap="flat">
+              <a:solidFill>
+                <a:srgbClr val="EBEBEB">
+                  <a:alpha val="100000"/>
+                </a:srgbClr>
+              </a:solidFill>
+              <a:prstDash val="solid"/>
+              <a:round/>
+            </a:ln>
+          </p:spPr>
+          <p:txBody>
+            <a:bodyPr/>
+            <a:lstStyle/>
+            <a:p/>
+          </p:txBody>
+        </p:sp>
+        <p:sp>
+          <p:nvSpPr>
+            <p:cNvPr id="61" name="pl61"/>
+            <p:cNvSpPr/>
+            <p:nvPr/>
+          </p:nvSpPr>
+          <p:spPr>
+            <a:xfrm>
+              <a:off x="887106" y="4396351"/>
+              <a:ext cx="7660515" cy="0"/>
+            </a:xfrm>
+            <a:custGeom>
+              <a:avLst/>
+              <a:pathLst>
+                <a:path w="7660515" h="0">
+                  <a:moveTo>
+                    <a:pt x="0" y="0"/>
+                  </a:moveTo>
+                  <a:lnTo>
+                    <a:pt x="7660515" y="0"/>
+                  </a:lnTo>
+                  <a:lnTo>
+                    <a:pt x="7660515" y="0"/>
+                  </a:lnTo>
+                </a:path>
+              </a:pathLst>
+            </a:custGeom>
+            <a:ln w="13550" cap="flat">
+              <a:solidFill>
+                <a:srgbClr val="EBEBEB">
+                  <a:alpha val="100000"/>
+                </a:srgbClr>
+              </a:solidFill>
+              <a:prstDash val="solid"/>
+              <a:round/>
+            </a:ln>
+          </p:spPr>
+          <p:txBody>
+            <a:bodyPr/>
+            <a:lstStyle/>
+            <a:p/>
+          </p:txBody>
+        </p:sp>
+        <p:sp>
+          <p:nvSpPr>
+            <p:cNvPr id="62" name="pl62"/>
+            <p:cNvSpPr/>
+            <p:nvPr/>
+          </p:nvSpPr>
+          <p:spPr>
+            <a:xfrm>
+              <a:off x="1426790" y="4336484"/>
+              <a:ext cx="0" cy="1317069"/>
+            </a:xfrm>
+            <a:custGeom>
+              <a:avLst/>
+              <a:pathLst>
+                <a:path w="0" h="1317069">
+                  <a:moveTo>
+                    <a:pt x="0" y="1317069"/>
+                  </a:moveTo>
+                  <a:lnTo>
+                    <a:pt x="0" y="0"/>
+                  </a:lnTo>
+                  <a:lnTo>
+                    <a:pt x="0" y="0"/>
+                  </a:lnTo>
+                </a:path>
+              </a:pathLst>
+            </a:custGeom>
+            <a:ln w="13550" cap="flat">
+              <a:solidFill>
+                <a:srgbClr val="EBEBEB">
+                  <a:alpha val="100000"/>
+                </a:srgbClr>
+              </a:solidFill>
+              <a:prstDash val="solid"/>
+              <a:round/>
+            </a:ln>
+          </p:spPr>
+          <p:txBody>
+            <a:bodyPr/>
+            <a:lstStyle/>
+            <a:p/>
+          </p:txBody>
+        </p:sp>
+        <p:sp>
+          <p:nvSpPr>
+            <p:cNvPr id="63" name="pl63"/>
+            <p:cNvSpPr/>
+            <p:nvPr/>
+          </p:nvSpPr>
+          <p:spPr>
+            <a:xfrm>
+              <a:off x="2277299" y="4336484"/>
+              <a:ext cx="0" cy="1317069"/>
+            </a:xfrm>
+            <a:custGeom>
+              <a:avLst/>
+              <a:pathLst>
+                <a:path w="0" h="1317069">
+                  <a:moveTo>
+                    <a:pt x="0" y="1317069"/>
+                  </a:moveTo>
+                  <a:lnTo>
+                    <a:pt x="0" y="0"/>
+                  </a:lnTo>
+                  <a:lnTo>
+                    <a:pt x="0" y="0"/>
+                  </a:lnTo>
+                </a:path>
+              </a:pathLst>
+            </a:custGeom>
+            <a:ln w="13550" cap="flat">
+              <a:solidFill>
+                <a:srgbClr val="EBEBEB">
+                  <a:alpha val="100000"/>
+                </a:srgbClr>
+              </a:solidFill>
+              <a:prstDash val="solid"/>
+              <a:round/>
+            </a:ln>
+          </p:spPr>
+          <p:txBody>
+            <a:bodyPr/>
+            <a:lstStyle/>
+            <a:p/>
+          </p:txBody>
+        </p:sp>
+        <p:sp>
+          <p:nvSpPr>
+            <p:cNvPr id="64" name="pl64"/>
+            <p:cNvSpPr/>
+            <p:nvPr/>
+          </p:nvSpPr>
+          <p:spPr>
+            <a:xfrm>
+              <a:off x="3127809" y="4336484"/>
+              <a:ext cx="0" cy="1317069"/>
+            </a:xfrm>
+            <a:custGeom>
+              <a:avLst/>
+              <a:pathLst>
+                <a:path w="0" h="1317069">
+                  <a:moveTo>
+                    <a:pt x="0" y="1317069"/>
+                  </a:moveTo>
+                  <a:lnTo>
+                    <a:pt x="0" y="0"/>
+                  </a:lnTo>
+                  <a:lnTo>
+                    <a:pt x="0" y="0"/>
+                  </a:lnTo>
+                </a:path>
+              </a:pathLst>
+            </a:custGeom>
+            <a:ln w="13550" cap="flat">
+              <a:solidFill>
+                <a:srgbClr val="EBEBEB">
+                  <a:alpha val="100000"/>
+                </a:srgbClr>
+              </a:solidFill>
+              <a:prstDash val="solid"/>
+              <a:round/>
+            </a:ln>
+          </p:spPr>
+          <p:txBody>
+            <a:bodyPr/>
+            <a:lstStyle/>
+            <a:p/>
+          </p:txBody>
+        </p:sp>
+        <p:sp>
+          <p:nvSpPr>
+            <p:cNvPr id="65" name="pl65"/>
+            <p:cNvSpPr/>
+            <p:nvPr/>
+          </p:nvSpPr>
+          <p:spPr>
+            <a:xfrm>
+              <a:off x="3978318" y="4336484"/>
+              <a:ext cx="0" cy="1317069"/>
+            </a:xfrm>
+            <a:custGeom>
+              <a:avLst/>
+              <a:pathLst>
+                <a:path w="0" h="1317069">
+                  <a:moveTo>
+                    <a:pt x="0" y="1317069"/>
+                  </a:moveTo>
+                  <a:lnTo>
+                    <a:pt x="0" y="0"/>
+                  </a:lnTo>
+                  <a:lnTo>
+                    <a:pt x="0" y="0"/>
+                  </a:lnTo>
+                </a:path>
+              </a:pathLst>
+            </a:custGeom>
+            <a:ln w="13550" cap="flat">
+              <a:solidFill>
+                <a:srgbClr val="EBEBEB">
+                  <a:alpha val="100000"/>
+                </a:srgbClr>
+              </a:solidFill>
+              <a:prstDash val="solid"/>
+              <a:round/>
+            </a:ln>
+          </p:spPr>
+          <p:txBody>
+            <a:bodyPr/>
+            <a:lstStyle/>
+            <a:p/>
+          </p:txBody>
+        </p:sp>
+        <p:sp>
+          <p:nvSpPr>
+            <p:cNvPr id="66" name="pl66"/>
+            <p:cNvSpPr/>
+            <p:nvPr/>
+          </p:nvSpPr>
+          <p:spPr>
+            <a:xfrm>
+              <a:off x="4828828" y="4336484"/>
+              <a:ext cx="0" cy="1317069"/>
+            </a:xfrm>
+            <a:custGeom>
+              <a:avLst/>
+              <a:pathLst>
+                <a:path w="0" h="1317069">
+                  <a:moveTo>
+                    <a:pt x="0" y="1317069"/>
+                  </a:moveTo>
+                  <a:lnTo>
+                    <a:pt x="0" y="0"/>
+                  </a:lnTo>
+                  <a:lnTo>
+                    <a:pt x="0" y="0"/>
+                  </a:lnTo>
+                </a:path>
+              </a:pathLst>
+            </a:custGeom>
+            <a:ln w="13550" cap="flat">
+              <a:solidFill>
+                <a:srgbClr val="EBEBEB">
+                  <a:alpha val="100000"/>
+                </a:srgbClr>
+              </a:solidFill>
+              <a:prstDash val="solid"/>
+              <a:round/>
+            </a:ln>
+          </p:spPr>
+          <p:txBody>
+            <a:bodyPr/>
+            <a:lstStyle/>
+            <a:p/>
+          </p:txBody>
+        </p:sp>
+        <p:sp>
+          <p:nvSpPr>
+            <p:cNvPr id="67" name="pl67"/>
+            <p:cNvSpPr/>
+            <p:nvPr/>
+          </p:nvSpPr>
+          <p:spPr>
+            <a:xfrm>
+              <a:off x="5679337" y="4336484"/>
+              <a:ext cx="0" cy="1317069"/>
+            </a:xfrm>
+            <a:custGeom>
+              <a:avLst/>
+              <a:pathLst>
+                <a:path w="0" h="1317069">
+                  <a:moveTo>
+                    <a:pt x="0" y="1317069"/>
+                  </a:moveTo>
+                  <a:lnTo>
+                    <a:pt x="0" y="0"/>
+                  </a:lnTo>
+                  <a:lnTo>
+                    <a:pt x="0" y="0"/>
+                  </a:lnTo>
+                </a:path>
+              </a:pathLst>
+            </a:custGeom>
+            <a:ln w="13550" cap="flat">
+              <a:solidFill>
+                <a:srgbClr val="EBEBEB">
+                  <a:alpha val="100000"/>
+                </a:srgbClr>
+              </a:solidFill>
+              <a:prstDash val="solid"/>
+              <a:round/>
+            </a:ln>
+          </p:spPr>
+          <p:txBody>
+            <a:bodyPr/>
+            <a:lstStyle/>
+            <a:p/>
+          </p:txBody>
+        </p:sp>
+        <p:sp>
+          <p:nvSpPr>
+            <p:cNvPr id="68" name="pl68"/>
+            <p:cNvSpPr/>
+            <p:nvPr/>
+          </p:nvSpPr>
+          <p:spPr>
+            <a:xfrm>
+              <a:off x="6529847" y="4336484"/>
+              <a:ext cx="0" cy="1317069"/>
+            </a:xfrm>
+            <a:custGeom>
+              <a:avLst/>
+              <a:pathLst>
+                <a:path w="0" h="1317069">
+                  <a:moveTo>
+                    <a:pt x="0" y="1317069"/>
+                  </a:moveTo>
+                  <a:lnTo>
+                    <a:pt x="0" y="0"/>
+                  </a:lnTo>
+                  <a:lnTo>
+                    <a:pt x="0" y="0"/>
+                  </a:lnTo>
+                </a:path>
+              </a:pathLst>
+            </a:custGeom>
+            <a:ln w="13550" cap="flat">
+              <a:solidFill>
+                <a:srgbClr val="EBEBEB">
+                  <a:alpha val="100000"/>
+                </a:srgbClr>
+              </a:solidFill>
+              <a:prstDash val="solid"/>
+              <a:round/>
+            </a:ln>
+          </p:spPr>
+          <p:txBody>
+            <a:bodyPr/>
+            <a:lstStyle/>
+            <a:p/>
+          </p:txBody>
+        </p:sp>
+        <p:sp>
+          <p:nvSpPr>
+            <p:cNvPr id="69" name="pl69"/>
+            <p:cNvSpPr/>
+            <p:nvPr/>
+          </p:nvSpPr>
+          <p:spPr>
+            <a:xfrm>
+              <a:off x="7380356" y="4336484"/>
+              <a:ext cx="0" cy="1317069"/>
+            </a:xfrm>
+            <a:custGeom>
+              <a:avLst/>
+              <a:pathLst>
+                <a:path w="0" h="1317069">
+                  <a:moveTo>
+                    <a:pt x="0" y="1317069"/>
+                  </a:moveTo>
+                  <a:lnTo>
+                    <a:pt x="0" y="0"/>
+                  </a:lnTo>
+                  <a:lnTo>
+                    <a:pt x="0" y="0"/>
+                  </a:lnTo>
+                </a:path>
+              </a:pathLst>
+            </a:custGeom>
+            <a:ln w="13550" cap="flat">
+              <a:solidFill>
+                <a:srgbClr val="EBEBEB">
+                  <a:alpha val="100000"/>
+                </a:srgbClr>
+              </a:solidFill>
+              <a:prstDash val="solid"/>
+              <a:round/>
+            </a:ln>
+          </p:spPr>
+          <p:txBody>
+            <a:bodyPr/>
+            <a:lstStyle/>
+            <a:p/>
+          </p:txBody>
+        </p:sp>
+        <p:sp>
+          <p:nvSpPr>
+            <p:cNvPr id="70" name="pl70"/>
+            <p:cNvSpPr/>
+            <p:nvPr/>
+          </p:nvSpPr>
+          <p:spPr>
+            <a:xfrm>
+              <a:off x="8230866" y="4336484"/>
+              <a:ext cx="0" cy="1317069"/>
+            </a:xfrm>
+            <a:custGeom>
+              <a:avLst/>
+              <a:pathLst>
+                <a:path w="0" h="1317069">
+                  <a:moveTo>
+                    <a:pt x="0" y="1317069"/>
+                  </a:moveTo>
+                  <a:lnTo>
+                    <a:pt x="0" y="0"/>
+                  </a:lnTo>
+                  <a:lnTo>
+                    <a:pt x="0" y="0"/>
+                  </a:lnTo>
+                </a:path>
+              </a:pathLst>
+            </a:custGeom>
+            <a:ln w="13550" cap="flat">
+              <a:solidFill>
+                <a:srgbClr val="EBEBEB">
+                  <a:alpha val="100000"/>
+                </a:srgbClr>
+              </a:solidFill>
+              <a:prstDash val="solid"/>
+              <a:round/>
+            </a:ln>
+          </p:spPr>
+          <p:txBody>
+            <a:bodyPr/>
+            <a:lstStyle/>
+            <a:p/>
+          </p:txBody>
+        </p:sp>
+        <p:sp>
+          <p:nvSpPr>
+            <p:cNvPr id="71" name="pg71"/>
+            <p:cNvSpPr/>
+            <p:nvPr/>
+          </p:nvSpPr>
+          <p:spPr>
+            <a:xfrm>
+              <a:off x="1235312" y="4903711"/>
+              <a:ext cx="6964104" cy="587013"/>
+            </a:xfrm>
+            <a:custGeom>
+              <a:avLst/>
+              <a:pathLst>
+                <a:path w="6964104" h="587013">
+                  <a:moveTo>
+                    <a:pt x="0" y="0"/>
+                  </a:moveTo>
+                  <a:lnTo>
+                    <a:pt x="70344" y="13131"/>
+                  </a:lnTo>
+                  <a:lnTo>
+                    <a:pt x="140688" y="26012"/>
+                  </a:lnTo>
+                  <a:lnTo>
+                    <a:pt x="211033" y="38649"/>
+                  </a:lnTo>
+                  <a:lnTo>
+                    <a:pt x="281377" y="51045"/>
+                  </a:lnTo>
+                  <a:lnTo>
+                    <a:pt x="351722" y="63205"/>
+                  </a:lnTo>
+                  <a:lnTo>
+                    <a:pt x="422066" y="75133"/>
+                  </a:lnTo>
+                  <a:lnTo>
+                    <a:pt x="492411" y="86835"/>
+                  </a:lnTo>
+                  <a:lnTo>
+                    <a:pt x="562755" y="98313"/>
+                  </a:lnTo>
+                  <a:lnTo>
+                    <a:pt x="633100" y="109574"/>
+                  </a:lnTo>
+                  <a:lnTo>
+                    <a:pt x="703444" y="120620"/>
+                  </a:lnTo>
+                  <a:lnTo>
+                    <a:pt x="773789" y="131456"/>
+                  </a:lnTo>
+                  <a:lnTo>
+                    <a:pt x="844133" y="142085"/>
+                  </a:lnTo>
+                  <a:lnTo>
+                    <a:pt x="914478" y="152513"/>
+                  </a:lnTo>
+                  <a:lnTo>
+                    <a:pt x="984822" y="162741"/>
+                  </a:lnTo>
+                  <a:lnTo>
+                    <a:pt x="1055167" y="172776"/>
+                  </a:lnTo>
+                  <a:lnTo>
+                    <a:pt x="1125511" y="182619"/>
+                  </a:lnTo>
+                  <a:lnTo>
+                    <a:pt x="1195856" y="192275"/>
+                  </a:lnTo>
+                  <a:lnTo>
+                    <a:pt x="1266200" y="201747"/>
+                  </a:lnTo>
+                  <a:lnTo>
+                    <a:pt x="1336545" y="211039"/>
+                  </a:lnTo>
+                  <a:lnTo>
+                    <a:pt x="1406889" y="220154"/>
+                  </a:lnTo>
+                  <a:lnTo>
+                    <a:pt x="1477234" y="229095"/>
+                  </a:lnTo>
+                  <a:lnTo>
+                    <a:pt x="1547578" y="237866"/>
+                  </a:lnTo>
+                  <a:lnTo>
+                    <a:pt x="1617923" y="246471"/>
+                  </a:lnTo>
+                  <a:lnTo>
+                    <a:pt x="1688267" y="254911"/>
+                  </a:lnTo>
+                  <a:lnTo>
+                    <a:pt x="1758612" y="263191"/>
+                  </a:lnTo>
+                  <a:lnTo>
+                    <a:pt x="1828956" y="271314"/>
+                  </a:lnTo>
+                  <a:lnTo>
+                    <a:pt x="1899301" y="279282"/>
+                  </a:lnTo>
+                  <a:lnTo>
+                    <a:pt x="1969645" y="287098"/>
+                  </a:lnTo>
+                  <a:lnTo>
+                    <a:pt x="2039990" y="294765"/>
+                  </a:lnTo>
+                  <a:lnTo>
+                    <a:pt x="2110334" y="302287"/>
+                  </a:lnTo>
+                  <a:lnTo>
+                    <a:pt x="2180679" y="309665"/>
+                  </a:lnTo>
+                  <a:lnTo>
+                    <a:pt x="2251023" y="316903"/>
+                  </a:lnTo>
+                  <a:lnTo>
+                    <a:pt x="2321368" y="324003"/>
+                  </a:lnTo>
+                  <a:lnTo>
+                    <a:pt x="2391712" y="330969"/>
+                  </a:lnTo>
+                  <a:lnTo>
+                    <a:pt x="2462057" y="337801"/>
+                  </a:lnTo>
+                  <a:lnTo>
+                    <a:pt x="2532401" y="344504"/>
+                  </a:lnTo>
+                  <a:lnTo>
+                    <a:pt x="2602746" y="351078"/>
+                  </a:lnTo>
+                  <a:lnTo>
+                    <a:pt x="2673090" y="357528"/>
+                  </a:lnTo>
+                  <a:lnTo>
+                    <a:pt x="2743435" y="363855"/>
+                  </a:lnTo>
+                  <a:lnTo>
+                    <a:pt x="2813779" y="370062"/>
+                  </a:lnTo>
+                  <a:lnTo>
+                    <a:pt x="2884124" y="376150"/>
+                  </a:lnTo>
+                  <a:lnTo>
+                    <a:pt x="2954468" y="382123"/>
+                  </a:lnTo>
+                  <a:lnTo>
+                    <a:pt x="3024813" y="387982"/>
+                  </a:lnTo>
+                  <a:lnTo>
+                    <a:pt x="3095157" y="391936"/>
+                  </a:lnTo>
+                  <a:lnTo>
+                    <a:pt x="3165502" y="394320"/>
+                  </a:lnTo>
+                  <a:lnTo>
+                    <a:pt x="3235846" y="396686"/>
+                  </a:lnTo>
+                  <a:lnTo>
+                    <a:pt x="3306191" y="399032"/>
+                  </a:lnTo>
+                  <a:lnTo>
+                    <a:pt x="3376535" y="401360"/>
+                  </a:lnTo>
+                  <a:lnTo>
+                    <a:pt x="3446880" y="403669"/>
+                  </a:lnTo>
+                  <a:lnTo>
+                    <a:pt x="3517224" y="405960"/>
+                  </a:lnTo>
+                  <a:lnTo>
+                    <a:pt x="3587569" y="408232"/>
+                  </a:lnTo>
+                  <a:lnTo>
+                    <a:pt x="3657913" y="410486"/>
+                  </a:lnTo>
+                  <a:lnTo>
+                    <a:pt x="3728257" y="412722"/>
+                  </a:lnTo>
+                  <a:lnTo>
+                    <a:pt x="3798602" y="414940"/>
+                  </a:lnTo>
+                  <a:lnTo>
+                    <a:pt x="3868946" y="417141"/>
+                  </a:lnTo>
+                  <a:lnTo>
+                    <a:pt x="3939291" y="419324"/>
+                  </a:lnTo>
+                  <a:lnTo>
+                    <a:pt x="4009635" y="421489"/>
+                  </a:lnTo>
+                  <a:lnTo>
+                    <a:pt x="4079980" y="423637"/>
+                  </a:lnTo>
+                  <a:lnTo>
+                    <a:pt x="4150324" y="425768"/>
+                  </a:lnTo>
+                  <a:lnTo>
+                    <a:pt x="4220669" y="427882"/>
+                  </a:lnTo>
+                  <a:lnTo>
+                    <a:pt x="4291013" y="429979"/>
+                  </a:lnTo>
+                  <a:lnTo>
+                    <a:pt x="4361358" y="432059"/>
+                  </a:lnTo>
+                  <a:lnTo>
+                    <a:pt x="4431702" y="434122"/>
+                  </a:lnTo>
+                  <a:lnTo>
+                    <a:pt x="4502047" y="436169"/>
+                  </a:lnTo>
+                  <a:lnTo>
+                    <a:pt x="4572391" y="438200"/>
+                  </a:lnTo>
+                  <a:lnTo>
+                    <a:pt x="4642736" y="440214"/>
+                  </a:lnTo>
+                  <a:lnTo>
+                    <a:pt x="4713080" y="442212"/>
+                  </a:lnTo>
+                  <a:lnTo>
+                    <a:pt x="4783425" y="444195"/>
+                  </a:lnTo>
+                  <a:lnTo>
+                    <a:pt x="4853769" y="446161"/>
+                  </a:lnTo>
+                  <a:lnTo>
+                    <a:pt x="4924114" y="448112"/>
+                  </a:lnTo>
+                  <a:lnTo>
+                    <a:pt x="4994458" y="450047"/>
+                  </a:lnTo>
+                  <a:lnTo>
+                    <a:pt x="5064803" y="451966"/>
+                  </a:lnTo>
+                  <a:lnTo>
+                    <a:pt x="5135147" y="453870"/>
+                  </a:lnTo>
+                  <a:lnTo>
+                    <a:pt x="5205492" y="455759"/>
+                  </a:lnTo>
+                  <a:lnTo>
+                    <a:pt x="5275836" y="457633"/>
+                  </a:lnTo>
+                  <a:lnTo>
+                    <a:pt x="5346181" y="459492"/>
+                  </a:lnTo>
+                  <a:lnTo>
+                    <a:pt x="5416525" y="461336"/>
+                  </a:lnTo>
+                  <a:lnTo>
+                    <a:pt x="5486870" y="463165"/>
+                  </a:lnTo>
+                  <a:lnTo>
+                    <a:pt x="5557214" y="464980"/>
+                  </a:lnTo>
+                  <a:lnTo>
+                    <a:pt x="5627559" y="466780"/>
+                  </a:lnTo>
+                  <a:lnTo>
+                    <a:pt x="5697903" y="468566"/>
+                  </a:lnTo>
+                  <a:lnTo>
+                    <a:pt x="5768248" y="470337"/>
+                  </a:lnTo>
+                  <a:lnTo>
+                    <a:pt x="5838592" y="472094"/>
+                  </a:lnTo>
+                  <a:lnTo>
+                    <a:pt x="5908937" y="473838"/>
+                  </a:lnTo>
+                  <a:lnTo>
+                    <a:pt x="5979281" y="475567"/>
+                  </a:lnTo>
+                  <a:lnTo>
+                    <a:pt x="6049626" y="477282"/>
+                  </a:lnTo>
+                  <a:lnTo>
+                    <a:pt x="6119970" y="478984"/>
+                  </a:lnTo>
+                  <a:lnTo>
+                    <a:pt x="6190315" y="480672"/>
+                  </a:lnTo>
+                  <a:lnTo>
+                    <a:pt x="6260659" y="482346"/>
+                  </a:lnTo>
+                  <a:lnTo>
+                    <a:pt x="6331004" y="484008"/>
+                  </a:lnTo>
+                  <a:lnTo>
+                    <a:pt x="6401348" y="485655"/>
+                  </a:lnTo>
+                  <a:lnTo>
+                    <a:pt x="6471693" y="487290"/>
+                  </a:lnTo>
+                  <a:lnTo>
+                    <a:pt x="6542037" y="488912"/>
+                  </a:lnTo>
+                  <a:lnTo>
+                    <a:pt x="6612382" y="490520"/>
+                  </a:lnTo>
+                  <a:lnTo>
+                    <a:pt x="6682726" y="492116"/>
+                  </a:lnTo>
+                  <a:lnTo>
+                    <a:pt x="6753071" y="493699"/>
+                  </a:lnTo>
+                  <a:lnTo>
+                    <a:pt x="6823415" y="495269"/>
+                  </a:lnTo>
+                  <a:lnTo>
+                    <a:pt x="6893760" y="496827"/>
+                  </a:lnTo>
+                  <a:lnTo>
+                    <a:pt x="6964104" y="498372"/>
+                  </a:lnTo>
+                  <a:lnTo>
+                    <a:pt x="6964104" y="587013"/>
+                  </a:lnTo>
+                  <a:lnTo>
+                    <a:pt x="6893760" y="585016"/>
+                  </a:lnTo>
+                  <a:lnTo>
+                    <a:pt x="6823415" y="582980"/>
+                  </a:lnTo>
+                  <a:lnTo>
+                    <a:pt x="6753071" y="580904"/>
+                  </a:lnTo>
+                  <a:lnTo>
+                    <a:pt x="6682726" y="578788"/>
+                  </a:lnTo>
+                  <a:lnTo>
+                    <a:pt x="6612382" y="576631"/>
+                  </a:lnTo>
+                  <a:lnTo>
+                    <a:pt x="6542037" y="574432"/>
+                  </a:lnTo>
+                  <a:lnTo>
+                    <a:pt x="6471693" y="572190"/>
+                  </a:lnTo>
+                  <a:lnTo>
+                    <a:pt x="6401348" y="569905"/>
+                  </a:lnTo>
+                  <a:lnTo>
+                    <a:pt x="6331004" y="567575"/>
+                  </a:lnTo>
+                  <a:lnTo>
+                    <a:pt x="6260659" y="565201"/>
+                  </a:lnTo>
+                  <a:lnTo>
+                    <a:pt x="6190315" y="562780"/>
+                  </a:lnTo>
+                  <a:lnTo>
+                    <a:pt x="6119970" y="560312"/>
+                  </a:lnTo>
+                  <a:lnTo>
+                    <a:pt x="6049626" y="557797"/>
+                  </a:lnTo>
+                  <a:lnTo>
+                    <a:pt x="5979281" y="555232"/>
+                  </a:lnTo>
+                  <a:lnTo>
+                    <a:pt x="5908937" y="552618"/>
+                  </a:lnTo>
+                  <a:lnTo>
+                    <a:pt x="5838592" y="549953"/>
+                  </a:lnTo>
+                  <a:lnTo>
+                    <a:pt x="5768248" y="547237"/>
+                  </a:lnTo>
+                  <a:lnTo>
+                    <a:pt x="5697903" y="544467"/>
+                  </a:lnTo>
+                  <a:lnTo>
+                    <a:pt x="5627559" y="541644"/>
+                  </a:lnTo>
+                  <a:lnTo>
+                    <a:pt x="5557214" y="538767"/>
+                  </a:lnTo>
+                  <a:lnTo>
+                    <a:pt x="5486870" y="535833"/>
+                  </a:lnTo>
+                  <a:lnTo>
+                    <a:pt x="5416525" y="532843"/>
+                  </a:lnTo>
+                  <a:lnTo>
+                    <a:pt x="5346181" y="529794"/>
+                  </a:lnTo>
+                  <a:lnTo>
+                    <a:pt x="5275836" y="526686"/>
+                  </a:lnTo>
+                  <a:lnTo>
+                    <a:pt x="5205492" y="523518"/>
+                  </a:lnTo>
+                  <a:lnTo>
+                    <a:pt x="5135147" y="520289"/>
+                  </a:lnTo>
+                  <a:lnTo>
+                    <a:pt x="5064803" y="516997"/>
+                  </a:lnTo>
+                  <a:lnTo>
+                    <a:pt x="4994458" y="513641"/>
+                  </a:lnTo>
+                  <a:lnTo>
+                    <a:pt x="4924114" y="510220"/>
+                  </a:lnTo>
+                  <a:lnTo>
+                    <a:pt x="4853769" y="506733"/>
+                  </a:lnTo>
+                  <a:lnTo>
+                    <a:pt x="4783425" y="503178"/>
+                  </a:lnTo>
+                  <a:lnTo>
+                    <a:pt x="4713080" y="499553"/>
+                  </a:lnTo>
+                  <a:lnTo>
+                    <a:pt x="4642736" y="495859"/>
+                  </a:lnTo>
+                  <a:lnTo>
+                    <a:pt x="4572391" y="492093"/>
+                  </a:lnTo>
+                  <a:lnTo>
+                    <a:pt x="4502047" y="488254"/>
+                  </a:lnTo>
+                  <a:lnTo>
+                    <a:pt x="4431702" y="484340"/>
+                  </a:lnTo>
+                  <a:lnTo>
+                    <a:pt x="4361358" y="480351"/>
+                  </a:lnTo>
+                  <a:lnTo>
+                    <a:pt x="4291013" y="476284"/>
+                  </a:lnTo>
+                  <a:lnTo>
+                    <a:pt x="4220669" y="472138"/>
+                  </a:lnTo>
+                  <a:lnTo>
+                    <a:pt x="4150324" y="467912"/>
+                  </a:lnTo>
+                  <a:lnTo>
+                    <a:pt x="4079980" y="463604"/>
+                  </a:lnTo>
+                  <a:lnTo>
+                    <a:pt x="4009635" y="459212"/>
+                  </a:lnTo>
+                  <a:lnTo>
+                    <a:pt x="3939291" y="454735"/>
+                  </a:lnTo>
+                  <a:lnTo>
+                    <a:pt x="3868946" y="450171"/>
+                  </a:lnTo>
+                  <a:lnTo>
+                    <a:pt x="3798602" y="445519"/>
+                  </a:lnTo>
+                  <a:lnTo>
+                    <a:pt x="3728257" y="440776"/>
+                  </a:lnTo>
+                  <a:lnTo>
+                    <a:pt x="3657913" y="435941"/>
+                  </a:lnTo>
+                  <a:lnTo>
+                    <a:pt x="3587569" y="431013"/>
+                  </a:lnTo>
+                  <a:lnTo>
+                    <a:pt x="3517224" y="425989"/>
+                  </a:lnTo>
+                  <a:lnTo>
+                    <a:pt x="3446880" y="420867"/>
+                  </a:lnTo>
+                  <a:lnTo>
+                    <a:pt x="3376535" y="415646"/>
+                  </a:lnTo>
+                  <a:lnTo>
+                    <a:pt x="3306191" y="410324"/>
+                  </a:lnTo>
+                  <a:lnTo>
+                    <a:pt x="3235846" y="404898"/>
+                  </a:lnTo>
+                  <a:lnTo>
+                    <a:pt x="3165502" y="399367"/>
+                  </a:lnTo>
+                  <a:lnTo>
+                    <a:pt x="3095157" y="393729"/>
+                  </a:lnTo>
+                  <a:lnTo>
+                    <a:pt x="3024813" y="389532"/>
+                  </a:lnTo>
+                  <a:lnTo>
+                    <a:pt x="2954468" y="387109"/>
+                  </a:lnTo>
+                  <a:lnTo>
+                    <a:pt x="2884124" y="384666"/>
+                  </a:lnTo>
+                  <a:lnTo>
+                    <a:pt x="2813779" y="382204"/>
+                  </a:lnTo>
+                  <a:lnTo>
+                    <a:pt x="2743435" y="379722"/>
+                  </a:lnTo>
+                  <a:lnTo>
+                    <a:pt x="2673090" y="377220"/>
+                  </a:lnTo>
+                  <a:lnTo>
+                    <a:pt x="2602746" y="374697"/>
+                  </a:lnTo>
+                  <a:lnTo>
+                    <a:pt x="2532401" y="372155"/>
+                  </a:lnTo>
+                  <a:lnTo>
+                    <a:pt x="2462057" y="369591"/>
+                  </a:lnTo>
+                  <a:lnTo>
+                    <a:pt x="2391712" y="367007"/>
+                  </a:lnTo>
+                  <a:lnTo>
+                    <a:pt x="2321368" y="364403"/>
+                  </a:lnTo>
+                  <a:lnTo>
+                    <a:pt x="2251023" y="361777"/>
+                  </a:lnTo>
+                  <a:lnTo>
+                    <a:pt x="2180679" y="359130"/>
+                  </a:lnTo>
+                  <a:lnTo>
+                    <a:pt x="2110334" y="356462"/>
+                  </a:lnTo>
+                  <a:lnTo>
+                    <a:pt x="2039990" y="353772"/>
+                  </a:lnTo>
+                  <a:lnTo>
+                    <a:pt x="1969645" y="351060"/>
+                  </a:lnTo>
+                  <a:lnTo>
+                    <a:pt x="1899301" y="348327"/>
+                  </a:lnTo>
+                  <a:lnTo>
+                    <a:pt x="1828956" y="345571"/>
+                  </a:lnTo>
+                  <a:lnTo>
+                    <a:pt x="1758612" y="342794"/>
+                  </a:lnTo>
+                  <a:lnTo>
+                    <a:pt x="1688267" y="339994"/>
+                  </a:lnTo>
+                  <a:lnTo>
+                    <a:pt x="1617923" y="337171"/>
+                  </a:lnTo>
+                  <a:lnTo>
+                    <a:pt x="1547578" y="334326"/>
+                  </a:lnTo>
+                  <a:lnTo>
+                    <a:pt x="1477234" y="331457"/>
+                  </a:lnTo>
+                  <a:lnTo>
+                    <a:pt x="1406889" y="328566"/>
+                  </a:lnTo>
+                  <a:lnTo>
+                    <a:pt x="1336545" y="325651"/>
+                  </a:lnTo>
+                  <a:lnTo>
+                    <a:pt x="1266200" y="322713"/>
+                  </a:lnTo>
+                  <a:lnTo>
+                    <a:pt x="1195856" y="319751"/>
+                  </a:lnTo>
+                  <a:lnTo>
+                    <a:pt x="1125511" y="316765"/>
+                  </a:lnTo>
+                  <a:lnTo>
+                    <a:pt x="1055167" y="313755"/>
+                  </a:lnTo>
+                  <a:lnTo>
+                    <a:pt x="984822" y="310721"/>
+                  </a:lnTo>
+                  <a:lnTo>
+                    <a:pt x="914478" y="307662"/>
+                  </a:lnTo>
+                  <a:lnTo>
+                    <a:pt x="844133" y="304578"/>
+                  </a:lnTo>
+                  <a:lnTo>
+                    <a:pt x="773789" y="301470"/>
+                  </a:lnTo>
+                  <a:lnTo>
+                    <a:pt x="703444" y="298337"/>
+                  </a:lnTo>
+                  <a:lnTo>
+                    <a:pt x="633100" y="295178"/>
+                  </a:lnTo>
+                  <a:lnTo>
+                    <a:pt x="562755" y="291994"/>
+                  </a:lnTo>
+                  <a:lnTo>
+                    <a:pt x="492411" y="288784"/>
+                  </a:lnTo>
+                  <a:lnTo>
+                    <a:pt x="422066" y="285549"/>
+                  </a:lnTo>
+                  <a:lnTo>
+                    <a:pt x="351722" y="282287"/>
+                  </a:lnTo>
+                  <a:lnTo>
+                    <a:pt x="281377" y="278999"/>
+                  </a:lnTo>
+                  <a:lnTo>
+                    <a:pt x="211033" y="275684"/>
+                  </a:lnTo>
+                  <a:lnTo>
+                    <a:pt x="140688" y="272343"/>
+                  </a:lnTo>
+                  <a:lnTo>
+                    <a:pt x="70344" y="268975"/>
+                  </a:lnTo>
+                  <a:lnTo>
+                    <a:pt x="0" y="265579"/>
+                  </a:lnTo>
+                  <a:close/>
+                </a:path>
+              </a:pathLst>
+            </a:custGeom>
+            <a:solidFill>
+              <a:srgbClr val="FF8C00">
+                <a:alpha val="20000"/>
+              </a:srgbClr>
+            </a:solidFill>
+          </p:spPr>
+          <p:txBody>
+            <a:bodyPr/>
+            <a:lstStyle/>
+            <a:p/>
+          </p:txBody>
+        </p:sp>
+        <p:sp>
+          <p:nvSpPr>
+            <p:cNvPr id="72" name="pl72"/>
+            <p:cNvSpPr/>
+            <p:nvPr/>
+          </p:nvSpPr>
+          <p:spPr>
+            <a:xfrm>
+              <a:off x="1235312" y="4903711"/>
+              <a:ext cx="6964104" cy="498372"/>
+            </a:xfrm>
+            <a:custGeom>
+              <a:avLst/>
+              <a:pathLst>
+                <a:path w="6964104" h="498372">
+                  <a:moveTo>
+                    <a:pt x="0" y="0"/>
+                  </a:moveTo>
+                  <a:lnTo>
+                    <a:pt x="70344" y="13131"/>
+                  </a:lnTo>
+                  <a:lnTo>
+                    <a:pt x="140688" y="26012"/>
+                  </a:lnTo>
+                  <a:lnTo>
+                    <a:pt x="211033" y="38649"/>
+                  </a:lnTo>
+                  <a:lnTo>
+                    <a:pt x="281377" y="51045"/>
+                  </a:lnTo>
+                  <a:lnTo>
+                    <a:pt x="351722" y="63205"/>
+                  </a:lnTo>
+                  <a:lnTo>
+                    <a:pt x="422066" y="75133"/>
+                  </a:lnTo>
+                  <a:lnTo>
+                    <a:pt x="492411" y="86835"/>
+                  </a:lnTo>
+                  <a:lnTo>
+                    <a:pt x="562755" y="98313"/>
+                  </a:lnTo>
+                  <a:lnTo>
+                    <a:pt x="633100" y="109574"/>
+                  </a:lnTo>
+                  <a:lnTo>
+                    <a:pt x="703444" y="120620"/>
+                  </a:lnTo>
+                  <a:lnTo>
+                    <a:pt x="773789" y="131456"/>
+                  </a:lnTo>
+                  <a:lnTo>
+                    <a:pt x="844133" y="142085"/>
+                  </a:lnTo>
+                  <a:lnTo>
+                    <a:pt x="914478" y="152513"/>
+                  </a:lnTo>
+                  <a:lnTo>
+                    <a:pt x="984822" y="162741"/>
+                  </a:lnTo>
+                  <a:lnTo>
+                    <a:pt x="1055167" y="172776"/>
+                  </a:lnTo>
+                  <a:lnTo>
+                    <a:pt x="1125511" y="182619"/>
+                  </a:lnTo>
+                  <a:lnTo>
+                    <a:pt x="1195856" y="192275"/>
+                  </a:lnTo>
+                  <a:lnTo>
+                    <a:pt x="1266200" y="201747"/>
+                  </a:lnTo>
+                  <a:lnTo>
+                    <a:pt x="1336545" y="211039"/>
+                  </a:lnTo>
+                  <a:lnTo>
+                    <a:pt x="1406889" y="220154"/>
+                  </a:lnTo>
+                  <a:lnTo>
+                    <a:pt x="1477234" y="229095"/>
+                  </a:lnTo>
+                  <a:lnTo>
+                    <a:pt x="1547578" y="237866"/>
+                  </a:lnTo>
+                  <a:lnTo>
+                    <a:pt x="1617923" y="246471"/>
+                  </a:lnTo>
+                  <a:lnTo>
+                    <a:pt x="1688267" y="254911"/>
+                  </a:lnTo>
+                  <a:lnTo>
+                    <a:pt x="1758612" y="263191"/>
+                  </a:lnTo>
+                  <a:lnTo>
+                    <a:pt x="1828956" y="271314"/>
+                  </a:lnTo>
+                  <a:lnTo>
+                    <a:pt x="1899301" y="279282"/>
+                  </a:lnTo>
+                  <a:lnTo>
+                    <a:pt x="1969645" y="287098"/>
+                  </a:lnTo>
+                  <a:lnTo>
+                    <a:pt x="2039990" y="294765"/>
+                  </a:lnTo>
+                  <a:lnTo>
+                    <a:pt x="2110334" y="302287"/>
+                  </a:lnTo>
+                  <a:lnTo>
+                    <a:pt x="2180679" y="309665"/>
+                  </a:lnTo>
+                  <a:lnTo>
+                    <a:pt x="2251023" y="316903"/>
+                  </a:lnTo>
+                  <a:lnTo>
+                    <a:pt x="2321368" y="324003"/>
+                  </a:lnTo>
+                  <a:lnTo>
+                    <a:pt x="2391712" y="330969"/>
+                  </a:lnTo>
+                  <a:lnTo>
+                    <a:pt x="2462057" y="337801"/>
+                  </a:lnTo>
+                  <a:lnTo>
+                    <a:pt x="2532401" y="344504"/>
+                  </a:lnTo>
+                  <a:lnTo>
+                    <a:pt x="2602746" y="351078"/>
+                  </a:lnTo>
+                  <a:lnTo>
+                    <a:pt x="2673090" y="357528"/>
+                  </a:lnTo>
+                  <a:lnTo>
+                    <a:pt x="2743435" y="363855"/>
+                  </a:lnTo>
+                  <a:lnTo>
+                    <a:pt x="2813779" y="370062"/>
+                  </a:lnTo>
+                  <a:lnTo>
+                    <a:pt x="2884124" y="376150"/>
+                  </a:lnTo>
+                  <a:lnTo>
+                    <a:pt x="2954468" y="382123"/>
+                  </a:lnTo>
+                  <a:lnTo>
+                    <a:pt x="3024813" y="387982"/>
+                  </a:lnTo>
+                  <a:lnTo>
+                    <a:pt x="3095157" y="391936"/>
+                  </a:lnTo>
+                  <a:lnTo>
+                    <a:pt x="3165502" y="394320"/>
+                  </a:lnTo>
+                  <a:lnTo>
+                    <a:pt x="3235846" y="396686"/>
+                  </a:lnTo>
+                  <a:lnTo>
+                    <a:pt x="3306191" y="399032"/>
+                  </a:lnTo>
+                  <a:lnTo>
+                    <a:pt x="3376535" y="401360"/>
+                  </a:lnTo>
+                  <a:lnTo>
+                    <a:pt x="3446880" y="403669"/>
+                  </a:lnTo>
+                  <a:lnTo>
+                    <a:pt x="3517224" y="405960"/>
+                  </a:lnTo>
+                  <a:lnTo>
+                    <a:pt x="3587569" y="408232"/>
+                  </a:lnTo>
+                  <a:lnTo>
+                    <a:pt x="3657913" y="410486"/>
+                  </a:lnTo>
+                  <a:lnTo>
+                    <a:pt x="3728257" y="412722"/>
+                  </a:lnTo>
+                  <a:lnTo>
+                    <a:pt x="3798602" y="414940"/>
+                  </a:lnTo>
+                  <a:lnTo>
+                    <a:pt x="3868946" y="417141"/>
+                  </a:lnTo>
+                  <a:lnTo>
+                    <a:pt x="3939291" y="419324"/>
+                  </a:lnTo>
+                  <a:lnTo>
+                    <a:pt x="4009635" y="421489"/>
+                  </a:lnTo>
+                  <a:lnTo>
+                    <a:pt x="4079980" y="423637"/>
+                  </a:lnTo>
+                  <a:lnTo>
+                    <a:pt x="4150324" y="425768"/>
+                  </a:lnTo>
+                  <a:lnTo>
+                    <a:pt x="4220669" y="427882"/>
+                  </a:lnTo>
+                  <a:lnTo>
+                    <a:pt x="4291013" y="429979"/>
+                  </a:lnTo>
+                  <a:lnTo>
+                    <a:pt x="4361358" y="432059"/>
+                  </a:lnTo>
+                  <a:lnTo>
+                    <a:pt x="4431702" y="434122"/>
+                  </a:lnTo>
+                  <a:lnTo>
+                    <a:pt x="4502047" y="436169"/>
+                  </a:lnTo>
+                  <a:lnTo>
+                    <a:pt x="4572391" y="438200"/>
+                  </a:lnTo>
+                  <a:lnTo>
+                    <a:pt x="4642736" y="440214"/>
+                  </a:lnTo>
+                  <a:lnTo>
+                    <a:pt x="4713080" y="442212"/>
+                  </a:lnTo>
+                  <a:lnTo>
+                    <a:pt x="4783425" y="444195"/>
+                  </a:lnTo>
+                  <a:lnTo>
+                    <a:pt x="4853769" y="446161"/>
+                  </a:lnTo>
+                  <a:lnTo>
+                    <a:pt x="4924114" y="448112"/>
+                  </a:lnTo>
+                  <a:lnTo>
+                    <a:pt x="4994458" y="450047"/>
+                  </a:lnTo>
+                  <a:lnTo>
+                    <a:pt x="5064803" y="451966"/>
+                  </a:lnTo>
+                  <a:lnTo>
+                    <a:pt x="5135147" y="453870"/>
+                  </a:lnTo>
+                  <a:lnTo>
+                    <a:pt x="5205492" y="455759"/>
+                  </a:lnTo>
+                  <a:lnTo>
+                    <a:pt x="5275836" y="457633"/>
+                  </a:lnTo>
+                  <a:lnTo>
+                    <a:pt x="5346181" y="459492"/>
+                  </a:lnTo>
+                  <a:lnTo>
+                    <a:pt x="5416525" y="461336"/>
+                  </a:lnTo>
+                  <a:lnTo>
+                    <a:pt x="5486870" y="463165"/>
+                  </a:lnTo>
+                  <a:lnTo>
+                    <a:pt x="5557214" y="464980"/>
+                  </a:lnTo>
+                  <a:lnTo>
+                    <a:pt x="5627559" y="466780"/>
+                  </a:lnTo>
+                  <a:lnTo>
+                    <a:pt x="5697903" y="468566"/>
+                  </a:lnTo>
+                  <a:lnTo>
+                    <a:pt x="5768248" y="470337"/>
+                  </a:lnTo>
+                  <a:lnTo>
+                    <a:pt x="5838592" y="472094"/>
+                  </a:lnTo>
+                  <a:lnTo>
+                    <a:pt x="5908937" y="473838"/>
+                  </a:lnTo>
+                  <a:lnTo>
+                    <a:pt x="5979281" y="475567"/>
+                  </a:lnTo>
+                  <a:lnTo>
+                    <a:pt x="6049626" y="477282"/>
+                  </a:lnTo>
+                  <a:lnTo>
+                    <a:pt x="6119970" y="478984"/>
+                  </a:lnTo>
+                  <a:lnTo>
+                    <a:pt x="6190315" y="480672"/>
+                  </a:lnTo>
+                  <a:lnTo>
+                    <a:pt x="6260659" y="482346"/>
+                  </a:lnTo>
+                  <a:lnTo>
+                    <a:pt x="6331004" y="484008"/>
+                  </a:lnTo>
+                  <a:lnTo>
+                    <a:pt x="6401348" y="485655"/>
+                  </a:lnTo>
+                  <a:lnTo>
+                    <a:pt x="6471693" y="487290"/>
+                  </a:lnTo>
+                  <a:lnTo>
+                    <a:pt x="6542037" y="488912"/>
+                  </a:lnTo>
+                  <a:lnTo>
+                    <a:pt x="6612382" y="490520"/>
+                  </a:lnTo>
+                  <a:lnTo>
+                    <a:pt x="6682726" y="492116"/>
+                  </a:lnTo>
+                  <a:lnTo>
+                    <a:pt x="6753071" y="493699"/>
+                  </a:lnTo>
+                  <a:lnTo>
+                    <a:pt x="6823415" y="495269"/>
+                  </a:lnTo>
+                  <a:lnTo>
+                    <a:pt x="6893760" y="496827"/>
+                  </a:lnTo>
+                  <a:lnTo>
+                    <a:pt x="6964104" y="498372"/>
+                  </a:lnTo>
+                </a:path>
+              </a:pathLst>
+            </a:custGeom>
+          </p:spPr>
+          <p:txBody>
+            <a:bodyPr/>
+            <a:lstStyle/>
+            <a:p/>
+          </p:txBody>
+        </p:sp>
+        <p:sp>
+          <p:nvSpPr>
+            <p:cNvPr id="73" name="pl73"/>
+            <p:cNvSpPr/>
+            <p:nvPr/>
+          </p:nvSpPr>
+          <p:spPr>
+            <a:xfrm>
+              <a:off x="1235312" y="5169291"/>
+              <a:ext cx="6964104" cy="321434"/>
+            </a:xfrm>
+            <a:custGeom>
+              <a:avLst/>
+              <a:pathLst>
+                <a:path w="6964104" h="321434">
+                  <a:moveTo>
+                    <a:pt x="6964104" y="321434"/>
+                  </a:moveTo>
+                  <a:lnTo>
+                    <a:pt x="6893760" y="319436"/>
+                  </a:lnTo>
+                  <a:lnTo>
+                    <a:pt x="6823415" y="317400"/>
+                  </a:lnTo>
+                  <a:lnTo>
+                    <a:pt x="6753071" y="315324"/>
+                  </a:lnTo>
+                  <a:lnTo>
+                    <a:pt x="6682726" y="313208"/>
+                  </a:lnTo>
+                  <a:lnTo>
+                    <a:pt x="6612382" y="311051"/>
+                  </a:lnTo>
+                  <a:lnTo>
+                    <a:pt x="6542037" y="308852"/>
+                  </a:lnTo>
+                  <a:lnTo>
+                    <a:pt x="6471693" y="306610"/>
+                  </a:lnTo>
+                  <a:lnTo>
+                    <a:pt x="6401348" y="304325"/>
+                  </a:lnTo>
+                  <a:lnTo>
+                    <a:pt x="6331004" y="301995"/>
+                  </a:lnTo>
+                  <a:lnTo>
+                    <a:pt x="6260659" y="299621"/>
+                  </a:lnTo>
+                  <a:lnTo>
+                    <a:pt x="6190315" y="297200"/>
+                  </a:lnTo>
+                  <a:lnTo>
+                    <a:pt x="6119970" y="294732"/>
+                  </a:lnTo>
+                  <a:lnTo>
+                    <a:pt x="6049626" y="292217"/>
+                  </a:lnTo>
+                  <a:lnTo>
+                    <a:pt x="5979281" y="289652"/>
+                  </a:lnTo>
+                  <a:lnTo>
+                    <a:pt x="5908937" y="287038"/>
+                  </a:lnTo>
+                  <a:lnTo>
+                    <a:pt x="5838592" y="284373"/>
+                  </a:lnTo>
+                  <a:lnTo>
+                    <a:pt x="5768248" y="281657"/>
+                  </a:lnTo>
+                  <a:lnTo>
+                    <a:pt x="5697903" y="278887"/>
+                  </a:lnTo>
+                  <a:lnTo>
+                    <a:pt x="5627559" y="276065"/>
+                  </a:lnTo>
+                  <a:lnTo>
+                    <a:pt x="5557214" y="273187"/>
+                  </a:lnTo>
+                  <a:lnTo>
+                    <a:pt x="5486870" y="270253"/>
+                  </a:lnTo>
+                  <a:lnTo>
+                    <a:pt x="5416525" y="267263"/>
+                  </a:lnTo>
+                  <a:lnTo>
+                    <a:pt x="5346181" y="264214"/>
+                  </a:lnTo>
+                  <a:lnTo>
+                    <a:pt x="5275836" y="261106"/>
+                  </a:lnTo>
+                  <a:lnTo>
+                    <a:pt x="5205492" y="257939"/>
+                  </a:lnTo>
+                  <a:lnTo>
+                    <a:pt x="5135147" y="254709"/>
+                  </a:lnTo>
+                  <a:lnTo>
+                    <a:pt x="5064803" y="251417"/>
+                  </a:lnTo>
+                  <a:lnTo>
+                    <a:pt x="4994458" y="248061"/>
+                  </a:lnTo>
+                  <a:lnTo>
+                    <a:pt x="4924114" y="244640"/>
+                  </a:lnTo>
+                  <a:lnTo>
+                    <a:pt x="4853769" y="241153"/>
+                  </a:lnTo>
+                  <a:lnTo>
+                    <a:pt x="4783425" y="237598"/>
+                  </a:lnTo>
+                  <a:lnTo>
+                    <a:pt x="4713080" y="233974"/>
+                  </a:lnTo>
+                  <a:lnTo>
+                    <a:pt x="4642736" y="230279"/>
+                  </a:lnTo>
+                  <a:lnTo>
+                    <a:pt x="4572391" y="226513"/>
+                  </a:lnTo>
+                  <a:lnTo>
+                    <a:pt x="4502047" y="222674"/>
+                  </a:lnTo>
+                  <a:lnTo>
+                    <a:pt x="4431702" y="218760"/>
+                  </a:lnTo>
+                  <a:lnTo>
+                    <a:pt x="4361358" y="214771"/>
+                  </a:lnTo>
+                  <a:lnTo>
+                    <a:pt x="4291013" y="210704"/>
+                  </a:lnTo>
+                  <a:lnTo>
+                    <a:pt x="4220669" y="206558"/>
+                  </a:lnTo>
+                  <a:lnTo>
+                    <a:pt x="4150324" y="202332"/>
+                  </a:lnTo>
+                  <a:lnTo>
+                    <a:pt x="4079980" y="198024"/>
+                  </a:lnTo>
+                  <a:lnTo>
+                    <a:pt x="4009635" y="193632"/>
+                  </a:lnTo>
+                  <a:lnTo>
+                    <a:pt x="3939291" y="189155"/>
+                  </a:lnTo>
+                  <a:lnTo>
+                    <a:pt x="3868946" y="184591"/>
+                  </a:lnTo>
+                  <a:lnTo>
+                    <a:pt x="3798602" y="179939"/>
+                  </a:lnTo>
+                  <a:lnTo>
+                    <a:pt x="3728257" y="175196"/>
+                  </a:lnTo>
+                  <a:lnTo>
+                    <a:pt x="3657913" y="170361"/>
+                  </a:lnTo>
+                  <a:lnTo>
+                    <a:pt x="3587569" y="165433"/>
+                  </a:lnTo>
+                  <a:lnTo>
+                    <a:pt x="3517224" y="160409"/>
+                  </a:lnTo>
+                  <a:lnTo>
+                    <a:pt x="3446880" y="155287"/>
+                  </a:lnTo>
+                  <a:lnTo>
+                    <a:pt x="3376535" y="150066"/>
+                  </a:lnTo>
+                  <a:lnTo>
+                    <a:pt x="3306191" y="144744"/>
+                  </a:lnTo>
+                  <a:lnTo>
+                    <a:pt x="3235846" y="139318"/>
+                  </a:lnTo>
+                  <a:lnTo>
+                    <a:pt x="3165502" y="133788"/>
+                  </a:lnTo>
+                  <a:lnTo>
+                    <a:pt x="3095157" y="128149"/>
+                  </a:lnTo>
+                  <a:lnTo>
+                    <a:pt x="3024813" y="123952"/>
+                  </a:lnTo>
+                  <a:lnTo>
+                    <a:pt x="2954468" y="121529"/>
+                  </a:lnTo>
+                  <a:lnTo>
+                    <a:pt x="2884124" y="119087"/>
+                  </a:lnTo>
+                  <a:lnTo>
+                    <a:pt x="2813779" y="116624"/>
+                  </a:lnTo>
+                  <a:lnTo>
+                    <a:pt x="2743435" y="114142"/>
+                  </a:lnTo>
+                  <a:lnTo>
+                    <a:pt x="2673090" y="111640"/>
+                  </a:lnTo>
+                  <a:lnTo>
+                    <a:pt x="2602746" y="109117"/>
+                  </a:lnTo>
+                  <a:lnTo>
+                    <a:pt x="2532401" y="106575"/>
+                  </a:lnTo>
+                  <a:lnTo>
+                    <a:pt x="2462057" y="104011"/>
+                  </a:lnTo>
+                  <a:lnTo>
+                    <a:pt x="2391712" y="101427"/>
+                  </a:lnTo>
+                  <a:lnTo>
+                    <a:pt x="2321368" y="98823"/>
+                  </a:lnTo>
+                  <a:lnTo>
+                    <a:pt x="2251023" y="96197"/>
+                  </a:lnTo>
+                  <a:lnTo>
+                    <a:pt x="2180679" y="93550"/>
+                  </a:lnTo>
+                  <a:lnTo>
+                    <a:pt x="2110334" y="90882"/>
+                  </a:lnTo>
+                  <a:lnTo>
+                    <a:pt x="2039990" y="88192"/>
+                  </a:lnTo>
+                  <a:lnTo>
+                    <a:pt x="1969645" y="85480"/>
+                  </a:lnTo>
+                  <a:lnTo>
+                    <a:pt x="1899301" y="82747"/>
+                  </a:lnTo>
+                  <a:lnTo>
+                    <a:pt x="1828956" y="79991"/>
+                  </a:lnTo>
+                  <a:lnTo>
+                    <a:pt x="1758612" y="77214"/>
+                  </a:lnTo>
+                  <a:lnTo>
+                    <a:pt x="1688267" y="74414"/>
+                  </a:lnTo>
+                  <a:lnTo>
+                    <a:pt x="1617923" y="71591"/>
+                  </a:lnTo>
+                  <a:lnTo>
+                    <a:pt x="1547578" y="68746"/>
+                  </a:lnTo>
+                  <a:lnTo>
+                    <a:pt x="1477234" y="65877"/>
+                  </a:lnTo>
+                  <a:lnTo>
+                    <a:pt x="1406889" y="62986"/>
+                  </a:lnTo>
+                  <a:lnTo>
+                    <a:pt x="1336545" y="60071"/>
+                  </a:lnTo>
+                  <a:lnTo>
+                    <a:pt x="1266200" y="57133"/>
+                  </a:lnTo>
+                  <a:lnTo>
+                    <a:pt x="1195856" y="54171"/>
+                  </a:lnTo>
+                  <a:lnTo>
+                    <a:pt x="1125511" y="51185"/>
+                  </a:lnTo>
+                  <a:lnTo>
+                    <a:pt x="1055167" y="48175"/>
+                  </a:lnTo>
+                  <a:lnTo>
+                    <a:pt x="984822" y="45141"/>
+                  </a:lnTo>
+                  <a:lnTo>
+                    <a:pt x="914478" y="42082"/>
+                  </a:lnTo>
+                  <a:lnTo>
+                    <a:pt x="844133" y="38998"/>
+                  </a:lnTo>
+                  <a:lnTo>
+                    <a:pt x="773789" y="35890"/>
+                  </a:lnTo>
+                  <a:lnTo>
+                    <a:pt x="703444" y="32757"/>
+                  </a:lnTo>
+                  <a:lnTo>
+                    <a:pt x="633100" y="29598"/>
+                  </a:lnTo>
+                  <a:lnTo>
+                    <a:pt x="562755" y="26414"/>
+                  </a:lnTo>
+                  <a:lnTo>
+                    <a:pt x="492411" y="23204"/>
+                  </a:lnTo>
+                  <a:lnTo>
+                    <a:pt x="422066" y="19969"/>
+                  </a:lnTo>
+                  <a:lnTo>
+                    <a:pt x="351722" y="16707"/>
+                  </a:lnTo>
+                  <a:lnTo>
+                    <a:pt x="281377" y="13419"/>
+                  </a:lnTo>
+                  <a:lnTo>
+                    <a:pt x="211033" y="10104"/>
+                  </a:lnTo>
+                  <a:lnTo>
+                    <a:pt x="140688" y="6763"/>
+                  </a:lnTo>
+                  <a:lnTo>
+                    <a:pt x="70344" y="3395"/>
+                  </a:lnTo>
+                  <a:lnTo>
+                    <a:pt x="0" y="0"/>
+                  </a:lnTo>
+                </a:path>
+              </a:pathLst>
+            </a:custGeom>
+          </p:spPr>
+          <p:txBody>
+            <a:bodyPr/>
+            <a:lstStyle/>
+            <a:p/>
+          </p:txBody>
+        </p:sp>
+        <p:sp>
+          <p:nvSpPr>
+            <p:cNvPr id="74" name="pl74"/>
+            <p:cNvSpPr/>
+            <p:nvPr/>
+          </p:nvSpPr>
+          <p:spPr>
+            <a:xfrm>
+              <a:off x="1235312" y="5052556"/>
+              <a:ext cx="6964104" cy="400675"/>
+            </a:xfrm>
+            <a:custGeom>
+              <a:avLst/>
+              <a:pathLst>
+                <a:path w="6964104" h="400675">
+                  <a:moveTo>
+                    <a:pt x="0" y="0"/>
+                  </a:moveTo>
+                  <a:lnTo>
+                    <a:pt x="70344" y="7322"/>
+                  </a:lnTo>
+                  <a:lnTo>
+                    <a:pt x="140688" y="14545"/>
+                  </a:lnTo>
+                  <a:lnTo>
+                    <a:pt x="211033" y="21671"/>
+                  </a:lnTo>
+                  <a:lnTo>
+                    <a:pt x="281377" y="28700"/>
+                  </a:lnTo>
+                  <a:lnTo>
+                    <a:pt x="351722" y="35634"/>
+                  </a:lnTo>
+                  <a:lnTo>
+                    <a:pt x="422066" y="42474"/>
+                  </a:lnTo>
+                  <a:lnTo>
+                    <a:pt x="492411" y="49222"/>
+                  </a:lnTo>
+                  <a:lnTo>
+                    <a:pt x="562755" y="55878"/>
+                  </a:lnTo>
+                  <a:lnTo>
+                    <a:pt x="633100" y="62444"/>
+                  </a:lnTo>
+                  <a:lnTo>
+                    <a:pt x="703444" y="68921"/>
+                  </a:lnTo>
+                  <a:lnTo>
+                    <a:pt x="773789" y="75311"/>
+                  </a:lnTo>
+                  <a:lnTo>
+                    <a:pt x="844133" y="81614"/>
+                  </a:lnTo>
+                  <a:lnTo>
+                    <a:pt x="914478" y="87832"/>
+                  </a:lnTo>
+                  <a:lnTo>
+                    <a:pt x="984822" y="93966"/>
+                  </a:lnTo>
+                  <a:lnTo>
+                    <a:pt x="1055167" y="100017"/>
+                  </a:lnTo>
+                  <a:lnTo>
+                    <a:pt x="1125511" y="105986"/>
+                  </a:lnTo>
+                  <a:lnTo>
+                    <a:pt x="1195856" y="111874"/>
+                  </a:lnTo>
+                  <a:lnTo>
+                    <a:pt x="1266200" y="117683"/>
+                  </a:lnTo>
+                  <a:lnTo>
+                    <a:pt x="1336545" y="123413"/>
+                  </a:lnTo>
+                  <a:lnTo>
+                    <a:pt x="1406889" y="129065"/>
+                  </a:lnTo>
+                  <a:lnTo>
+                    <a:pt x="1477234" y="134641"/>
+                  </a:lnTo>
+                  <a:lnTo>
+                    <a:pt x="1547578" y="140141"/>
+                  </a:lnTo>
+                  <a:lnTo>
+                    <a:pt x="1617923" y="145567"/>
+                  </a:lnTo>
+                  <a:lnTo>
+                    <a:pt x="1688267" y="150920"/>
+                  </a:lnTo>
+                  <a:lnTo>
+                    <a:pt x="1758612" y="156200"/>
+                  </a:lnTo>
+                  <a:lnTo>
+                    <a:pt x="1828956" y="161409"/>
+                  </a:lnTo>
+                  <a:lnTo>
+                    <a:pt x="1899301" y="166547"/>
+                  </a:lnTo>
+                  <a:lnTo>
+                    <a:pt x="1969645" y="171616"/>
+                  </a:lnTo>
+                  <a:lnTo>
+                    <a:pt x="2039990" y="176616"/>
+                  </a:lnTo>
+                  <a:lnTo>
+                    <a:pt x="2110334" y="181548"/>
+                  </a:lnTo>
+                  <a:lnTo>
+                    <a:pt x="2180679" y="186414"/>
+                  </a:lnTo>
+                  <a:lnTo>
+                    <a:pt x="2251023" y="191214"/>
+                  </a:lnTo>
+                  <a:lnTo>
+                    <a:pt x="2321368" y="195949"/>
+                  </a:lnTo>
+                  <a:lnTo>
+                    <a:pt x="2391712" y="200620"/>
+                  </a:lnTo>
+                  <a:lnTo>
+                    <a:pt x="2462057" y="205227"/>
+                  </a:lnTo>
+                  <a:lnTo>
+                    <a:pt x="2532401" y="209773"/>
+                  </a:lnTo>
+                  <a:lnTo>
+                    <a:pt x="2602746" y="214256"/>
+                  </a:lnTo>
+                  <a:lnTo>
+                    <a:pt x="2673090" y="218680"/>
+                  </a:lnTo>
+                  <a:lnTo>
+                    <a:pt x="2743435" y="223043"/>
+                  </a:lnTo>
+                  <a:lnTo>
+                    <a:pt x="2813779" y="227347"/>
+                  </a:lnTo>
+                  <a:lnTo>
+                    <a:pt x="2884124" y="231593"/>
+                  </a:lnTo>
+                  <a:lnTo>
+                    <a:pt x="2954468" y="235782"/>
+                  </a:lnTo>
+                  <a:lnTo>
+                    <a:pt x="3024813" y="239913"/>
+                  </a:lnTo>
+                  <a:lnTo>
+                    <a:pt x="3095157" y="243989"/>
+                  </a:lnTo>
+                  <a:lnTo>
+                    <a:pt x="3165502" y="248010"/>
+                  </a:lnTo>
+                  <a:lnTo>
+                    <a:pt x="3235846" y="251976"/>
+                  </a:lnTo>
+                  <a:lnTo>
+                    <a:pt x="3306191" y="255889"/>
+                  </a:lnTo>
+                  <a:lnTo>
+                    <a:pt x="3376535" y="259749"/>
+                  </a:lnTo>
+                  <a:lnTo>
+                    <a:pt x="3446880" y="263556"/>
+                  </a:lnTo>
+                  <a:lnTo>
+                    <a:pt x="3517224" y="267312"/>
+                  </a:lnTo>
+                  <a:lnTo>
+                    <a:pt x="3587569" y="271018"/>
+                  </a:lnTo>
+                  <a:lnTo>
+                    <a:pt x="3657913" y="274673"/>
+                  </a:lnTo>
+                  <a:lnTo>
+                    <a:pt x="3728257" y="278278"/>
+                  </a:lnTo>
+                  <a:lnTo>
+                    <a:pt x="3798602" y="281835"/>
+                  </a:lnTo>
+                  <a:lnTo>
+                    <a:pt x="3868946" y="285344"/>
+                  </a:lnTo>
+                  <a:lnTo>
+                    <a:pt x="3939291" y="288805"/>
+                  </a:lnTo>
+                  <a:lnTo>
+                    <a:pt x="4009635" y="292219"/>
+                  </a:lnTo>
+                  <a:lnTo>
+                    <a:pt x="4079980" y="295587"/>
+                  </a:lnTo>
+                  <a:lnTo>
+                    <a:pt x="4150324" y="298910"/>
+                  </a:lnTo>
+                  <a:lnTo>
+                    <a:pt x="4220669" y="302188"/>
+                  </a:lnTo>
+                  <a:lnTo>
+                    <a:pt x="4291013" y="305421"/>
+                  </a:lnTo>
+                  <a:lnTo>
+                    <a:pt x="4361358" y="308610"/>
+                  </a:lnTo>
+                  <a:lnTo>
+                    <a:pt x="4431702" y="311757"/>
+                  </a:lnTo>
+                  <a:lnTo>
+                    <a:pt x="4502047" y="314861"/>
+                  </a:lnTo>
+                  <a:lnTo>
+                    <a:pt x="4572391" y="317922"/>
+                  </a:lnTo>
+                  <a:lnTo>
+                    <a:pt x="4642736" y="320943"/>
+                  </a:lnTo>
+                  <a:lnTo>
+                    <a:pt x="4713080" y="323922"/>
+                  </a:lnTo>
+                  <a:lnTo>
+                    <a:pt x="4783425" y="326861"/>
+                  </a:lnTo>
+                  <a:lnTo>
+                    <a:pt x="4853769" y="329761"/>
+                  </a:lnTo>
+                  <a:lnTo>
+                    <a:pt x="4924114" y="332621"/>
+                  </a:lnTo>
+                  <a:lnTo>
+                    <a:pt x="4994458" y="335442"/>
+                  </a:lnTo>
+                  <a:lnTo>
+                    <a:pt x="5064803" y="338226"/>
+                  </a:lnTo>
+                  <a:lnTo>
+                    <a:pt x="5135147" y="340971"/>
+                  </a:lnTo>
+                  <a:lnTo>
+                    <a:pt x="5205492" y="343680"/>
+                  </a:lnTo>
+                  <a:lnTo>
+                    <a:pt x="5275836" y="346352"/>
+                  </a:lnTo>
+                  <a:lnTo>
+                    <a:pt x="5346181" y="348987"/>
+                  </a:lnTo>
+                  <a:lnTo>
+                    <a:pt x="5416525" y="351587"/>
+                  </a:lnTo>
+                  <a:lnTo>
+                    <a:pt x="5486870" y="354152"/>
+                  </a:lnTo>
+                  <a:lnTo>
+                    <a:pt x="5557214" y="356682"/>
+                  </a:lnTo>
+                  <a:lnTo>
+                    <a:pt x="5627559" y="359178"/>
+                  </a:lnTo>
+                  <a:lnTo>
+                    <a:pt x="5697903" y="361640"/>
+                  </a:lnTo>
+                  <a:lnTo>
+                    <a:pt x="5768248" y="364069"/>
+                  </a:lnTo>
+                  <a:lnTo>
+                    <a:pt x="5838592" y="366465"/>
+                  </a:lnTo>
+                  <a:lnTo>
+                    <a:pt x="5908937" y="368828"/>
+                  </a:lnTo>
+                  <a:lnTo>
+                    <a:pt x="5979281" y="371160"/>
+                  </a:lnTo>
+                  <a:lnTo>
+                    <a:pt x="6049626" y="373460"/>
+                  </a:lnTo>
+                  <a:lnTo>
+                    <a:pt x="6119970" y="375729"/>
+                  </a:lnTo>
+                  <a:lnTo>
+                    <a:pt x="6190315" y="377967"/>
+                  </a:lnTo>
+                  <a:lnTo>
+                    <a:pt x="6260659" y="380175"/>
+                  </a:lnTo>
+                  <a:lnTo>
+                    <a:pt x="6331004" y="382353"/>
+                  </a:lnTo>
+                  <a:lnTo>
+                    <a:pt x="6401348" y="384501"/>
+                  </a:lnTo>
+                  <a:lnTo>
+                    <a:pt x="6471693" y="386621"/>
+                  </a:lnTo>
+                  <a:lnTo>
+                    <a:pt x="6542037" y="388711"/>
+                  </a:lnTo>
+                  <a:lnTo>
+                    <a:pt x="6612382" y="390774"/>
+                  </a:lnTo>
+                  <a:lnTo>
+                    <a:pt x="6682726" y="392808"/>
+                  </a:lnTo>
+                  <a:lnTo>
+                    <a:pt x="6753071" y="394815"/>
+                  </a:lnTo>
+                  <a:lnTo>
+                    <a:pt x="6823415" y="396795"/>
+                  </a:lnTo>
+                  <a:lnTo>
+                    <a:pt x="6893760" y="398748"/>
+                  </a:lnTo>
+                  <a:lnTo>
+                    <a:pt x="6964104" y="400675"/>
+                  </a:lnTo>
+                </a:path>
+              </a:pathLst>
+            </a:custGeom>
+            <a:ln w="27101" cap="flat">
+              <a:solidFill>
+                <a:srgbClr val="FF8C00">
+                  <a:alpha val="100000"/>
+                </a:srgbClr>
+              </a:solidFill>
+              <a:prstDash val="solid"/>
+              <a:round/>
+            </a:ln>
+          </p:spPr>
+          <p:txBody>
+            <a:bodyPr/>
+            <a:lstStyle/>
+            <a:p/>
+          </p:txBody>
+        </p:sp>
+        <p:sp>
+          <p:nvSpPr>
+            <p:cNvPr id="75" name="pl75"/>
+            <p:cNvSpPr/>
+            <p:nvPr/>
+          </p:nvSpPr>
+          <p:spPr>
+            <a:xfrm>
+              <a:off x="887106" y="5294352"/>
+              <a:ext cx="7660515" cy="0"/>
+            </a:xfrm>
+            <a:custGeom>
+              <a:avLst/>
+              <a:pathLst>
+                <a:path w="7660515" h="0">
+                  <a:moveTo>
+                    <a:pt x="0" y="0"/>
+                  </a:moveTo>
+                  <a:lnTo>
+                    <a:pt x="7660515" y="0"/>
+                  </a:lnTo>
+                  <a:lnTo>
+                    <a:pt x="7660515" y="0"/>
+                  </a:lnTo>
+                </a:path>
+              </a:pathLst>
+            </a:custGeom>
+            <a:ln w="13550" cap="flat">
+              <a:solidFill>
+                <a:srgbClr val="7F7F7F">
+                  <a:alpha val="100000"/>
+                </a:srgbClr>
+              </a:solidFill>
+              <a:prstDash val="dash"/>
+              <a:round/>
+            </a:ln>
+          </p:spPr>
+          <p:txBody>
+            <a:bodyPr/>
+            <a:lstStyle/>
+            <a:p/>
+          </p:txBody>
+        </p:sp>
+        <p:sp>
+          <p:nvSpPr>
+            <p:cNvPr id="76" name="pl76"/>
+            <p:cNvSpPr/>
+            <p:nvPr/>
+          </p:nvSpPr>
+          <p:spPr>
+            <a:xfrm>
+              <a:off x="4292500" y="4336484"/>
+              <a:ext cx="0" cy="1317069"/>
+            </a:xfrm>
+            <a:custGeom>
+              <a:avLst/>
+              <a:pathLst>
+                <a:path w="0" h="1317069">
+                  <a:moveTo>
+                    <a:pt x="0" y="1317069"/>
+                  </a:moveTo>
+                  <a:lnTo>
+                    <a:pt x="0" y="0"/>
+                  </a:lnTo>
+                  <a:lnTo>
+                    <a:pt x="0" y="0"/>
+                  </a:lnTo>
+                </a:path>
+              </a:pathLst>
+            </a:custGeom>
+            <a:ln w="13550" cap="flat">
+              <a:solidFill>
+                <a:srgbClr val="666666">
+                  <a:alpha val="100000"/>
+                </a:srgbClr>
+              </a:solidFill>
+              <a:prstDash val="dot"/>
+              <a:round/>
+            </a:ln>
+          </p:spPr>
+          <p:txBody>
+            <a:bodyPr/>
+            <a:lstStyle/>
+            <a:p/>
+          </p:txBody>
+        </p:sp>
+        <p:sp>
+          <p:nvSpPr>
+            <p:cNvPr id="77" name="pl77"/>
+            <p:cNvSpPr/>
+            <p:nvPr/>
+          </p:nvSpPr>
+          <p:spPr>
+            <a:xfrm>
+              <a:off x="3124839" y="4336484"/>
+              <a:ext cx="0" cy="1317069"/>
+            </a:xfrm>
+            <a:custGeom>
+              <a:avLst/>
+              <a:pathLst>
+                <a:path w="0" h="1317069">
+                  <a:moveTo>
+                    <a:pt x="0" y="1317069"/>
+                  </a:moveTo>
+                  <a:lnTo>
+                    <a:pt x="0" y="0"/>
+                  </a:lnTo>
+                  <a:lnTo>
+                    <a:pt x="0" y="0"/>
+                  </a:lnTo>
+                </a:path>
+              </a:pathLst>
+            </a:custGeom>
+            <a:ln w="13550" cap="flat">
+              <a:solidFill>
+                <a:srgbClr val="4682B4">
+                  <a:alpha val="69803"/>
+                </a:srgbClr>
+              </a:solidFill>
+              <a:prstDash val="dash"/>
+              <a:round/>
+            </a:ln>
+          </p:spPr>
+          <p:txBody>
+            <a:bodyPr/>
+            <a:lstStyle/>
+            <a:p/>
+          </p:txBody>
+        </p:sp>
+        <p:sp>
+          <p:nvSpPr>
+            <p:cNvPr id="78" name="pl78"/>
+            <p:cNvSpPr/>
+            <p:nvPr/>
+          </p:nvSpPr>
+          <p:spPr>
+            <a:xfrm>
+              <a:off x="5508592" y="4336484"/>
+              <a:ext cx="0" cy="1317069"/>
+            </a:xfrm>
+            <a:custGeom>
+              <a:avLst/>
+              <a:pathLst>
+                <a:path w="0" h="1317069">
+                  <a:moveTo>
+                    <a:pt x="0" y="1317069"/>
+                  </a:moveTo>
+                  <a:lnTo>
+                    <a:pt x="0" y="0"/>
+                  </a:lnTo>
+                  <a:lnTo>
+                    <a:pt x="0" y="0"/>
+                  </a:lnTo>
+                </a:path>
+              </a:pathLst>
+            </a:custGeom>
+            <a:ln w="13550" cap="flat">
+              <a:solidFill>
+                <a:srgbClr val="4682B4">
+                  <a:alpha val="69803"/>
+                </a:srgbClr>
+              </a:solidFill>
+              <a:prstDash val="dash"/>
+              <a:round/>
+            </a:ln>
+          </p:spPr>
+          <p:txBody>
+            <a:bodyPr/>
+            <a:lstStyle/>
+            <a:p/>
+          </p:txBody>
+        </p:sp>
+        <p:sp>
+          <p:nvSpPr>
+            <p:cNvPr id="79" name="tx79"/>
+            <p:cNvSpPr/>
+            <p:nvPr/>
+          </p:nvSpPr>
+          <p:spPr>
+            <a:xfrm>
+              <a:off x="762297" y="5553636"/>
+              <a:ext cx="62179" cy="80101"/>
+            </a:xfrm>
+            <a:prstGeom prst="rect">
+              <a:avLst/>
+            </a:prstGeom>
+            <a:noFill/>
+          </p:spPr>
+          <p:txBody>
+            <a:bodyPr lIns="0" rIns="0" tIns="0" bIns="0" anchorCtr="1" anchor="ctr" wrap="none"/>
+            <a:lstStyle/>
+            <a:p>
+              <a:pPr algn="l" marL="0" marR="0" indent="0">
+                <a:lnSpc>
+                  <a:spcPts val="880"/>
+                </a:lnSpc>
+                <a:spcBef>
+                  <a:spcPts val="0"/>
+                </a:spcBef>
+                <a:spcAft>
+                  <a:spcPts val="0"/>
+                </a:spcAft>
+              </a:pPr>
+              <a:r>
+                <a:rPr sz="880">
+                  <a:solidFill>
+                    <a:srgbClr val="4D4D4D">
+                      <a:alpha val="100000"/>
+                    </a:srgbClr>
+                  </a:solidFill>
+                  <a:latin typeface="Helvetica"/>
+                  <a:cs typeface="Helvetica"/>
+                </a:rPr>
+                <a:t>0</a:t>
+              </a:r>
+            </a:p>
+          </p:txBody>
+        </p:sp>
+        <p:sp>
+          <p:nvSpPr>
+            <p:cNvPr id="80" name="tx80"/>
+            <p:cNvSpPr/>
+            <p:nvPr/>
+          </p:nvSpPr>
+          <p:spPr>
+            <a:xfrm>
+              <a:off x="762297" y="5254302"/>
+              <a:ext cx="62179" cy="80101"/>
+            </a:xfrm>
+            <a:prstGeom prst="rect">
+              <a:avLst/>
+            </a:prstGeom>
+            <a:noFill/>
+          </p:spPr>
+          <p:txBody>
+            <a:bodyPr lIns="0" rIns="0" tIns="0" bIns="0" anchorCtr="1" anchor="ctr" wrap="none"/>
+            <a:lstStyle/>
+            <a:p>
+              <a:pPr algn="l" marL="0" marR="0" indent="0">
+                <a:lnSpc>
+                  <a:spcPts val="880"/>
+                </a:lnSpc>
+                <a:spcBef>
+                  <a:spcPts val="0"/>
+                </a:spcBef>
+                <a:spcAft>
+                  <a:spcPts val="0"/>
+                </a:spcAft>
+              </a:pPr>
+              <a:r>
+                <a:rPr sz="880">
+                  <a:solidFill>
+                    <a:srgbClr val="4D4D4D">
+                      <a:alpha val="100000"/>
+                    </a:srgbClr>
+                  </a:solidFill>
+                  <a:latin typeface="Helvetica"/>
+                  <a:cs typeface="Helvetica"/>
+                </a:rPr>
+                <a:t>1</a:t>
+              </a:r>
+            </a:p>
+          </p:txBody>
+        </p:sp>
+        <p:sp>
+          <p:nvSpPr>
+            <p:cNvPr id="81" name="tx81"/>
+            <p:cNvSpPr/>
+            <p:nvPr/>
+          </p:nvSpPr>
+          <p:spPr>
+            <a:xfrm>
+              <a:off x="762297" y="4954968"/>
+              <a:ext cx="62179" cy="80101"/>
+            </a:xfrm>
+            <a:prstGeom prst="rect">
+              <a:avLst/>
+            </a:prstGeom>
+            <a:noFill/>
+          </p:spPr>
+          <p:txBody>
+            <a:bodyPr lIns="0" rIns="0" tIns="0" bIns="0" anchorCtr="1" anchor="ctr" wrap="none"/>
+            <a:lstStyle/>
+            <a:p>
+              <a:pPr algn="l" marL="0" marR="0" indent="0">
+                <a:lnSpc>
+                  <a:spcPts val="880"/>
+                </a:lnSpc>
+                <a:spcBef>
+                  <a:spcPts val="0"/>
+                </a:spcBef>
+                <a:spcAft>
+                  <a:spcPts val="0"/>
+                </a:spcAft>
+              </a:pPr>
+              <a:r>
+                <a:rPr sz="880">
+                  <a:solidFill>
+                    <a:srgbClr val="4D4D4D">
+                      <a:alpha val="100000"/>
+                    </a:srgbClr>
+                  </a:solidFill>
+                  <a:latin typeface="Helvetica"/>
+                  <a:cs typeface="Helvetica"/>
+                </a:rPr>
+                <a:t>2</a:t>
+              </a:r>
+            </a:p>
+          </p:txBody>
+        </p:sp>
+        <p:sp>
+          <p:nvSpPr>
+            <p:cNvPr id="82" name="tx82"/>
+            <p:cNvSpPr/>
+            <p:nvPr/>
+          </p:nvSpPr>
+          <p:spPr>
+            <a:xfrm>
+              <a:off x="762297" y="4655634"/>
+              <a:ext cx="62179" cy="80101"/>
+            </a:xfrm>
+            <a:prstGeom prst="rect">
+              <a:avLst/>
+            </a:prstGeom>
+            <a:noFill/>
+          </p:spPr>
+          <p:txBody>
+            <a:bodyPr lIns="0" rIns="0" tIns="0" bIns="0" anchorCtr="1" anchor="ctr" wrap="none"/>
+            <a:lstStyle/>
+            <a:p>
+              <a:pPr algn="l" marL="0" marR="0" indent="0">
+                <a:lnSpc>
+                  <a:spcPts val="880"/>
+                </a:lnSpc>
+                <a:spcBef>
+                  <a:spcPts val="0"/>
+                </a:spcBef>
+                <a:spcAft>
+                  <a:spcPts val="0"/>
+                </a:spcAft>
+              </a:pPr>
+              <a:r>
+                <a:rPr sz="880">
+                  <a:solidFill>
+                    <a:srgbClr val="4D4D4D">
+                      <a:alpha val="100000"/>
+                    </a:srgbClr>
+                  </a:solidFill>
+                  <a:latin typeface="Helvetica"/>
+                  <a:cs typeface="Helvetica"/>
+                </a:rPr>
+                <a:t>3</a:t>
+              </a:r>
+            </a:p>
+          </p:txBody>
+        </p:sp>
+        <p:sp>
+          <p:nvSpPr>
+            <p:cNvPr id="83" name="tx83"/>
+            <p:cNvSpPr/>
+            <p:nvPr/>
+          </p:nvSpPr>
+          <p:spPr>
+            <a:xfrm>
+              <a:off x="762297" y="4356300"/>
+              <a:ext cx="62179" cy="80101"/>
+            </a:xfrm>
+            <a:prstGeom prst="rect">
+              <a:avLst/>
+            </a:prstGeom>
+            <a:noFill/>
+          </p:spPr>
+          <p:txBody>
+            <a:bodyPr lIns="0" rIns="0" tIns="0" bIns="0" anchorCtr="1" anchor="ctr" wrap="none"/>
+            <a:lstStyle/>
+            <a:p>
+              <a:pPr algn="l" marL="0" marR="0" indent="0">
+                <a:lnSpc>
+                  <a:spcPts val="880"/>
+                </a:lnSpc>
+                <a:spcBef>
+                  <a:spcPts val="0"/>
+                </a:spcBef>
+                <a:spcAft>
+                  <a:spcPts val="0"/>
+                </a:spcAft>
+              </a:pPr>
+              <a:r>
+                <a:rPr sz="880">
+                  <a:solidFill>
+                    <a:srgbClr val="4D4D4D">
+                      <a:alpha val="100000"/>
+                    </a:srgbClr>
+                  </a:solidFill>
+                  <a:latin typeface="Helvetica"/>
+                  <a:cs typeface="Helvetica"/>
+                </a:rPr>
+                <a:t>4</a:t>
+              </a:r>
+            </a:p>
+          </p:txBody>
+        </p:sp>
+        <p:sp>
+          <p:nvSpPr>
+            <p:cNvPr id="84" name="tx84"/>
+            <p:cNvSpPr/>
+            <p:nvPr/>
+          </p:nvSpPr>
+          <p:spPr>
+            <a:xfrm>
+              <a:off x="1346003" y="5716183"/>
+              <a:ext cx="161574" cy="80101"/>
+            </a:xfrm>
+            <a:prstGeom prst="rect">
+              <a:avLst/>
+            </a:prstGeom>
+            <a:noFill/>
+          </p:spPr>
+          <p:txBody>
+            <a:bodyPr lIns="0" rIns="0" tIns="0" bIns="0" anchorCtr="1" anchor="ctr" wrap="none"/>
+            <a:lstStyle/>
+            <a:p>
+              <a:pPr algn="l" marL="0" marR="0" indent="0">
+                <a:lnSpc>
+                  <a:spcPts val="880"/>
+                </a:lnSpc>
+                <a:spcBef>
+                  <a:spcPts val="0"/>
+                </a:spcBef>
+                <a:spcAft>
+                  <a:spcPts val="0"/>
+                </a:spcAft>
+              </a:pPr>
+              <a:r>
+                <a:rPr sz="880">
+                  <a:solidFill>
+                    <a:srgbClr val="4D4D4D">
+                      <a:alpha val="100000"/>
+                    </a:srgbClr>
+                  </a:solidFill>
+                  <a:latin typeface="Helvetica"/>
+                  <a:cs typeface="Helvetica"/>
+                </a:rPr>
+                <a:t>-50</a:t>
+              </a:r>
+            </a:p>
+          </p:txBody>
+        </p:sp>
+        <p:sp>
+          <p:nvSpPr>
+            <p:cNvPr id="85" name="tx85"/>
+            <p:cNvSpPr/>
+            <p:nvPr/>
+          </p:nvSpPr>
+          <p:spPr>
+            <a:xfrm>
+              <a:off x="2196512" y="5716183"/>
+              <a:ext cx="161574" cy="80101"/>
+            </a:xfrm>
+            <a:prstGeom prst="rect">
+              <a:avLst/>
+            </a:prstGeom>
+            <a:noFill/>
+          </p:spPr>
+          <p:txBody>
+            <a:bodyPr lIns="0" rIns="0" tIns="0" bIns="0" anchorCtr="1" anchor="ctr" wrap="none"/>
+            <a:lstStyle/>
+            <a:p>
+              <a:pPr algn="l" marL="0" marR="0" indent="0">
+                <a:lnSpc>
+                  <a:spcPts val="880"/>
+                </a:lnSpc>
+                <a:spcBef>
+                  <a:spcPts val="0"/>
+                </a:spcBef>
+                <a:spcAft>
+                  <a:spcPts val="0"/>
+                </a:spcAft>
+              </a:pPr>
+              <a:r>
+                <a:rPr sz="880">
+                  <a:solidFill>
+                    <a:srgbClr val="4D4D4D">
+                      <a:alpha val="100000"/>
+                    </a:srgbClr>
+                  </a:solidFill>
+                  <a:latin typeface="Helvetica"/>
+                  <a:cs typeface="Helvetica"/>
+                </a:rPr>
+                <a:t>-40</a:t>
+              </a:r>
+            </a:p>
+          </p:txBody>
+        </p:sp>
+        <p:sp>
+          <p:nvSpPr>
+            <p:cNvPr id="86" name="tx86"/>
+            <p:cNvSpPr/>
+            <p:nvPr/>
+          </p:nvSpPr>
+          <p:spPr>
+            <a:xfrm>
+              <a:off x="3047022" y="5716183"/>
+              <a:ext cx="161574" cy="80101"/>
+            </a:xfrm>
+            <a:prstGeom prst="rect">
+              <a:avLst/>
+            </a:prstGeom>
+            <a:noFill/>
+          </p:spPr>
+          <p:txBody>
+            <a:bodyPr lIns="0" rIns="0" tIns="0" bIns="0" anchorCtr="1" anchor="ctr" wrap="none"/>
+            <a:lstStyle/>
+            <a:p>
+              <a:pPr algn="l" marL="0" marR="0" indent="0">
+                <a:lnSpc>
+                  <a:spcPts val="880"/>
+                </a:lnSpc>
+                <a:spcBef>
+                  <a:spcPts val="0"/>
+                </a:spcBef>
+                <a:spcAft>
+                  <a:spcPts val="0"/>
+                </a:spcAft>
+              </a:pPr>
+              <a:r>
+                <a:rPr sz="880">
+                  <a:solidFill>
+                    <a:srgbClr val="4D4D4D">
+                      <a:alpha val="100000"/>
+                    </a:srgbClr>
+                  </a:solidFill>
+                  <a:latin typeface="Helvetica"/>
+                  <a:cs typeface="Helvetica"/>
+                </a:rPr>
+                <a:t>-30</a:t>
+              </a:r>
+            </a:p>
+          </p:txBody>
+        </p:sp>
+        <p:sp>
+          <p:nvSpPr>
+            <p:cNvPr id="87" name="tx87"/>
+            <p:cNvSpPr/>
+            <p:nvPr/>
+          </p:nvSpPr>
+          <p:spPr>
+            <a:xfrm>
+              <a:off x="3897531" y="5716183"/>
+              <a:ext cx="161574" cy="80101"/>
+            </a:xfrm>
+            <a:prstGeom prst="rect">
+              <a:avLst/>
+            </a:prstGeom>
+            <a:noFill/>
+          </p:spPr>
+          <p:txBody>
+            <a:bodyPr lIns="0" rIns="0" tIns="0" bIns="0" anchorCtr="1" anchor="ctr" wrap="none"/>
+            <a:lstStyle/>
+            <a:p>
+              <a:pPr algn="l" marL="0" marR="0" indent="0">
+                <a:lnSpc>
+                  <a:spcPts val="880"/>
+                </a:lnSpc>
+                <a:spcBef>
+                  <a:spcPts val="0"/>
+                </a:spcBef>
+                <a:spcAft>
+                  <a:spcPts val="0"/>
+                </a:spcAft>
+              </a:pPr>
+              <a:r>
+                <a:rPr sz="880">
+                  <a:solidFill>
+                    <a:srgbClr val="4D4D4D">
+                      <a:alpha val="100000"/>
+                    </a:srgbClr>
+                  </a:solidFill>
+                  <a:latin typeface="Helvetica"/>
+                  <a:cs typeface="Helvetica"/>
+                </a:rPr>
+                <a:t>-20</a:t>
+              </a:r>
+            </a:p>
+          </p:txBody>
+        </p:sp>
+        <p:sp>
+          <p:nvSpPr>
+            <p:cNvPr id="88" name="tx88"/>
+            <p:cNvSpPr/>
+            <p:nvPr/>
+          </p:nvSpPr>
+          <p:spPr>
+            <a:xfrm>
+              <a:off x="4748041" y="5716183"/>
+              <a:ext cx="161574" cy="80101"/>
+            </a:xfrm>
+            <a:prstGeom prst="rect">
+              <a:avLst/>
+            </a:prstGeom>
+            <a:noFill/>
+          </p:spPr>
+          <p:txBody>
+            <a:bodyPr lIns="0" rIns="0" tIns="0" bIns="0" anchorCtr="1" anchor="ctr" wrap="none"/>
+            <a:lstStyle/>
+            <a:p>
+              <a:pPr algn="l" marL="0" marR="0" indent="0">
+                <a:lnSpc>
+                  <a:spcPts val="880"/>
+                </a:lnSpc>
+                <a:spcBef>
+                  <a:spcPts val="0"/>
+                </a:spcBef>
+                <a:spcAft>
+                  <a:spcPts val="0"/>
+                </a:spcAft>
+              </a:pPr>
+              <a:r>
+                <a:rPr sz="880">
+                  <a:solidFill>
+                    <a:srgbClr val="4D4D4D">
+                      <a:alpha val="100000"/>
+                    </a:srgbClr>
+                  </a:solidFill>
+                  <a:latin typeface="Helvetica"/>
+                  <a:cs typeface="Helvetica"/>
+                </a:rPr>
+                <a:t>-10</a:t>
+              </a:r>
+            </a:p>
+          </p:txBody>
+        </p:sp>
+        <p:sp>
+          <p:nvSpPr>
+            <p:cNvPr id="89" name="tx89"/>
+            <p:cNvSpPr/>
+            <p:nvPr/>
+          </p:nvSpPr>
+          <p:spPr>
+            <a:xfrm>
+              <a:off x="5648248" y="5716183"/>
+              <a:ext cx="62179" cy="80101"/>
+            </a:xfrm>
+            <a:prstGeom prst="rect">
+              <a:avLst/>
+            </a:prstGeom>
+            <a:noFill/>
+          </p:spPr>
+          <p:txBody>
+            <a:bodyPr lIns="0" rIns="0" tIns="0" bIns="0" anchorCtr="1" anchor="ctr" wrap="none"/>
+            <a:lstStyle/>
+            <a:p>
+              <a:pPr algn="l" marL="0" marR="0" indent="0">
+                <a:lnSpc>
+                  <a:spcPts val="880"/>
+                </a:lnSpc>
+                <a:spcBef>
+                  <a:spcPts val="0"/>
+                </a:spcBef>
+                <a:spcAft>
+                  <a:spcPts val="0"/>
+                </a:spcAft>
+              </a:pPr>
+              <a:r>
+                <a:rPr sz="880">
+                  <a:solidFill>
+                    <a:srgbClr val="4D4D4D">
+                      <a:alpha val="100000"/>
+                    </a:srgbClr>
+                  </a:solidFill>
+                  <a:latin typeface="Helvetica"/>
+                  <a:cs typeface="Helvetica"/>
+                </a:rPr>
+                <a:t>0</a:t>
+              </a:r>
+            </a:p>
+          </p:txBody>
+        </p:sp>
+        <p:sp>
+          <p:nvSpPr>
+            <p:cNvPr id="90" name="tx90"/>
+            <p:cNvSpPr/>
+            <p:nvPr/>
+          </p:nvSpPr>
+          <p:spPr>
+            <a:xfrm>
+              <a:off x="6467667" y="5716183"/>
+              <a:ext cx="124358" cy="80101"/>
+            </a:xfrm>
+            <a:prstGeom prst="rect">
+              <a:avLst/>
+            </a:prstGeom>
+            <a:noFill/>
+          </p:spPr>
+          <p:txBody>
+            <a:bodyPr lIns="0" rIns="0" tIns="0" bIns="0" anchorCtr="1" anchor="ctr" wrap="none"/>
+            <a:lstStyle/>
+            <a:p>
+              <a:pPr algn="l" marL="0" marR="0" indent="0">
+                <a:lnSpc>
+                  <a:spcPts val="880"/>
+                </a:lnSpc>
+                <a:spcBef>
+                  <a:spcPts val="0"/>
+                </a:spcBef>
+                <a:spcAft>
+                  <a:spcPts val="0"/>
+                </a:spcAft>
+              </a:pPr>
+              <a:r>
+                <a:rPr sz="880">
+                  <a:solidFill>
+                    <a:srgbClr val="4D4D4D">
+                      <a:alpha val="100000"/>
+                    </a:srgbClr>
+                  </a:solidFill>
+                  <a:latin typeface="Helvetica"/>
+                  <a:cs typeface="Helvetica"/>
+                </a:rPr>
+                <a:t>10</a:t>
+              </a:r>
+            </a:p>
+          </p:txBody>
+        </p:sp>
+        <p:sp>
+          <p:nvSpPr>
+            <p:cNvPr id="91" name="tx91"/>
+            <p:cNvSpPr/>
+            <p:nvPr/>
+          </p:nvSpPr>
+          <p:spPr>
+            <a:xfrm>
+              <a:off x="7318177" y="5716183"/>
+              <a:ext cx="124358" cy="80101"/>
+            </a:xfrm>
+            <a:prstGeom prst="rect">
+              <a:avLst/>
+            </a:prstGeom>
+            <a:noFill/>
+          </p:spPr>
+          <p:txBody>
+            <a:bodyPr lIns="0" rIns="0" tIns="0" bIns="0" anchorCtr="1" anchor="ctr" wrap="none"/>
+            <a:lstStyle/>
+            <a:p>
+              <a:pPr algn="l" marL="0" marR="0" indent="0">
+                <a:lnSpc>
+                  <a:spcPts val="880"/>
+                </a:lnSpc>
+                <a:spcBef>
+                  <a:spcPts val="0"/>
+                </a:spcBef>
+                <a:spcAft>
+                  <a:spcPts val="0"/>
+                </a:spcAft>
+              </a:pPr>
+              <a:r>
+                <a:rPr sz="880">
+                  <a:solidFill>
+                    <a:srgbClr val="4D4D4D">
+                      <a:alpha val="100000"/>
+                    </a:srgbClr>
+                  </a:solidFill>
+                  <a:latin typeface="Helvetica"/>
+                  <a:cs typeface="Helvetica"/>
+                </a:rPr>
+                <a:t>20</a:t>
+              </a:r>
+            </a:p>
+          </p:txBody>
+        </p:sp>
+        <p:sp>
+          <p:nvSpPr>
+            <p:cNvPr id="92" name="tx92"/>
+            <p:cNvSpPr/>
+            <p:nvPr/>
+          </p:nvSpPr>
+          <p:spPr>
+            <a:xfrm>
+              <a:off x="8168686" y="5716183"/>
+              <a:ext cx="124358" cy="80101"/>
+            </a:xfrm>
+            <a:prstGeom prst="rect">
+              <a:avLst/>
+            </a:prstGeom>
+            <a:noFill/>
+          </p:spPr>
+          <p:txBody>
+            <a:bodyPr lIns="0" rIns="0" tIns="0" bIns="0" anchorCtr="1" anchor="ctr" wrap="none"/>
+            <a:lstStyle/>
+            <a:p>
+              <a:pPr algn="l" marL="0" marR="0" indent="0">
+                <a:lnSpc>
+                  <a:spcPts val="880"/>
+                </a:lnSpc>
+                <a:spcBef>
+                  <a:spcPts val="0"/>
+                </a:spcBef>
+                <a:spcAft>
+                  <a:spcPts val="0"/>
+                </a:spcAft>
+              </a:pPr>
+              <a:r>
+                <a:rPr sz="880">
+                  <a:solidFill>
+                    <a:srgbClr val="4D4D4D">
+                      <a:alpha val="100000"/>
+                    </a:srgbClr>
+                  </a:solidFill>
+                  <a:latin typeface="Helvetica"/>
+                  <a:cs typeface="Helvetica"/>
+                </a:rPr>
+                <a:t>30</a:t>
+              </a:r>
+            </a:p>
+          </p:txBody>
+        </p:sp>
+        <p:sp>
+          <p:nvSpPr>
+            <p:cNvPr id="93" name="tx93"/>
+            <p:cNvSpPr/>
+            <p:nvPr/>
+          </p:nvSpPr>
+          <p:spPr>
+            <a:xfrm>
+              <a:off x="1561815" y="5855859"/>
+              <a:ext cx="6311097" cy="100218"/>
+            </a:xfrm>
+            <a:prstGeom prst="rect">
+              <a:avLst/>
+            </a:prstGeom>
+            <a:noFill/>
+          </p:spPr>
+          <p:txBody>
+            <a:bodyPr lIns="0" rIns="0" tIns="0" bIns="0" anchorCtr="1" anchor="ctr" wrap="none"/>
+            <a:lstStyle/>
+            <a:p>
+              <a:pPr algn="l" marL="0" marR="0" indent="0">
+                <a:lnSpc>
+                  <a:spcPts val="1100"/>
+                </a:lnSpc>
+                <a:spcBef>
+                  <a:spcPts val="0"/>
+                </a:spcBef>
+                <a:spcAft>
+                  <a:spcPts val="0"/>
+                </a:spcAft>
+              </a:pPr>
+              <a:r>
+                <a:rPr sz="1100">
+                  <a:solidFill>
+                    <a:srgbClr val="000000">
+                      <a:alpha val="100000"/>
+                    </a:srgbClr>
+                  </a:solidFill>
+                  <a:latin typeface="Helvetica"/>
+                  <a:cs typeface="Helvetica"/>
+                </a:rPr>
+                <a:t>Sensitivity eGFR Difference (%): 100 × (CKD-EPI 2012 CysC − CKD-EPI 2021 Cr) / CKD-EPI 2021 Cr</a:t>
+              </a:r>
+            </a:p>
+          </p:txBody>
+        </p:sp>
+        <p:sp>
+          <p:nvSpPr>
+            <p:cNvPr id="94" name="tx94"/>
+            <p:cNvSpPr/>
+            <p:nvPr/>
+          </p:nvSpPr>
+          <p:spPr>
+            <a:xfrm rot="-5400000">
+              <a:off x="138035" y="4944909"/>
+              <a:ext cx="1016904" cy="100218"/>
+            </a:xfrm>
+            <a:prstGeom prst="rect">
+              <a:avLst/>
+            </a:prstGeom>
+            <a:noFill/>
+          </p:spPr>
+          <p:txBody>
+            <a:bodyPr lIns="0" rIns="0" tIns="0" bIns="0" anchorCtr="1" anchor="ctr" wrap="none"/>
+            <a:lstStyle/>
+            <a:p>
+              <a:pPr algn="l" marL="0" marR="0" indent="0">
+                <a:lnSpc>
+                  <a:spcPts val="1100"/>
+                </a:lnSpc>
+                <a:spcBef>
+                  <a:spcPts val="0"/>
+                </a:spcBef>
+                <a:spcAft>
+                  <a:spcPts val="0"/>
+                </a:spcAft>
+              </a:pPr>
+              <a:r>
+                <a:rPr sz="1100">
+                  <a:solidFill>
+                    <a:srgbClr val="000000">
+                      <a:alpha val="100000"/>
+                    </a:srgbClr>
+                  </a:solidFill>
+                  <a:latin typeface="Helvetica"/>
+                  <a:cs typeface="Helvetica"/>
+                </a:rPr>
+                <a:t>subHR (95% CI)</a:t>
+              </a:r>
+            </a:p>
+          </p:txBody>
+        </p:sp>
+        <p:sp>
+          <p:nvSpPr>
+            <p:cNvPr id="95" name="tx95"/>
+            <p:cNvSpPr/>
+            <p:nvPr/>
+          </p:nvSpPr>
+          <p:spPr>
+            <a:xfrm>
+              <a:off x="887106" y="4159544"/>
+              <a:ext cx="7026615" cy="82021"/>
+            </a:xfrm>
+            <a:prstGeom prst="rect">
+              <a:avLst/>
+            </a:prstGeom>
+            <a:noFill/>
+          </p:spPr>
+          <p:txBody>
+            <a:bodyPr lIns="0" rIns="0" tIns="0" bIns="0" anchorCtr="1" anchor="ctr" wrap="none"/>
+            <a:lstStyle/>
+            <a:p>
+              <a:pPr algn="l" marL="0" marR="0" indent="0">
+                <a:lnSpc>
+                  <a:spcPts val="900"/>
+                </a:lnSpc>
+                <a:spcBef>
+                  <a:spcPts val="0"/>
+                </a:spcBef>
+                <a:spcAft>
+                  <a:spcPts val="0"/>
+                </a:spcAft>
+              </a:pPr>
+              <a:r>
+                <a:rPr sz="900">
+                  <a:solidFill>
+                    <a:srgbClr val="404040">
+                      <a:alpha val="100000"/>
+                    </a:srgbClr>
+                  </a:solidFill>
+                  <a:latin typeface="Helvetica"/>
+                  <a:cs typeface="Helvetica"/>
+                </a:rPr>
+                <a:t>subHR per 10 % decline: 1.18 (1.10-1.26), p_Bonf = &lt;0.001 (n = 6)  |  per IQR decline (Δ = 28.0 %): 1.59 (1.31-1.92)  |  IQR: [-30.0, -2.0] %</a:t>
+              </a:r>
+            </a:p>
+          </p:txBody>
+        </p:sp>
+        <p:sp>
+          <p:nvSpPr>
+            <p:cNvPr id="96" name="tx96"/>
+            <p:cNvSpPr/>
+            <p:nvPr/>
+          </p:nvSpPr>
+          <p:spPr>
+            <a:xfrm>
+              <a:off x="887106" y="3932770"/>
               <a:ext cx="3668481" cy="120152"/>
             </a:xfrm>
             <a:prstGeom prst="rect">
